--- a/Präsentation-CSS-T&A.pptx
+++ b/Präsentation-CSS-T&A.pptx
@@ -6,7 +6,7 @@
     <p:sldMasterId id="2147483708" r:id="rId2"/>
   </p:sldMasterIdLst>
   <p:notesMasterIdLst>
-    <p:notesMasterId r:id="rId8"/>
+    <p:notesMasterId r:id="rId9"/>
   </p:notesMasterIdLst>
   <p:sldIdLst>
     <p:sldId id="265" r:id="rId3"/>
@@ -14,6 +14,7 @@
     <p:sldId id="262" r:id="rId5"/>
     <p:sldId id="263" r:id="rId6"/>
     <p:sldId id="264" r:id="rId7"/>
+    <p:sldId id="266" r:id="rId8"/>
   </p:sldIdLst>
   <p:sldSz cx="12192000" cy="6858000"/>
   <p:notesSz cx="6858000" cy="9144000"/>
@@ -123,7 +124,7 @@
 <file path=ppt/revisionInfo.xml><?xml version="1.0" encoding="utf-8"?>
 <p1510:revInfo xmlns:a="http://schemas.openxmlformats.org/drawingml/2006/main" xmlns:r="http://schemas.openxmlformats.org/officeDocument/2006/relationships" xmlns:p1510="http://schemas.microsoft.com/office/powerpoint/2015/10/main">
   <p1510:revLst>
-    <p1510:client id="{66E3F9D8-9CB6-4AB4-A50A-F10ABA866F6E}" v="28" dt="2026-03-04T20:40:45.813"/>
+    <p1510:client id="{66E3F9D8-9CB6-4AB4-A50A-F10ABA866F6E}" v="36" dt="2026-03-05T08:47:23.309"/>
   </p1510:revLst>
 </p1510:revInfo>
 </file>
@@ -133,7 +134,7 @@
   <pc:docChgLst>
     <pc:chgData name="Nassery, Wanisa" userId="eb577ee2-3895-4f93-9de0-b07a06e375bf" providerId="ADAL" clId="{0563F7C6-264B-407D-9CB8-9601D089DAD8}"/>
     <pc:docChg chg="undo custSel addSld delSld modSld">
-      <pc:chgData name="Nassery, Wanisa" userId="eb577ee2-3895-4f93-9de0-b07a06e375bf" providerId="ADAL" clId="{0563F7C6-264B-407D-9CB8-9601D089DAD8}" dt="2026-03-04T20:41:24.778" v="1379" actId="1076"/>
+      <pc:chgData name="Nassery, Wanisa" userId="eb577ee2-3895-4f93-9de0-b07a06e375bf" providerId="ADAL" clId="{0563F7C6-264B-407D-9CB8-9601D089DAD8}" dt="2026-03-05T16:11:16.729" v="1484" actId="1076"/>
       <pc:docMkLst>
         <pc:docMk/>
       </pc:docMkLst>
@@ -143,22 +144,6 @@
           <pc:docMk/>
           <pc:sldMk cId="3698334526" sldId="256"/>
         </pc:sldMkLst>
-        <pc:spChg chg="mod">
-          <ac:chgData name="Nassery, Wanisa" userId="eb577ee2-3895-4f93-9de0-b07a06e375bf" providerId="ADAL" clId="{0563F7C6-264B-407D-9CB8-9601D089DAD8}" dt="2026-02-27T13:19:39.540" v="812" actId="1076"/>
-          <ac:spMkLst>
-            <pc:docMk/>
-            <pc:sldMk cId="3698334526" sldId="256"/>
-            <ac:spMk id="2" creationId="{687A6056-9B56-F7CA-8441-E1DA71A84458}"/>
-          </ac:spMkLst>
-        </pc:spChg>
-        <pc:spChg chg="mod">
-          <ac:chgData name="Nassery, Wanisa" userId="eb577ee2-3895-4f93-9de0-b07a06e375bf" providerId="ADAL" clId="{0563F7C6-264B-407D-9CB8-9601D089DAD8}" dt="2026-02-28T12:46:44.329" v="952" actId="1076"/>
-          <ac:spMkLst>
-            <pc:docMk/>
-            <pc:sldMk cId="3698334526" sldId="256"/>
-            <ac:spMk id="3" creationId="{FDFE9184-CA2A-A170-BFC4-2198E1A58B53}"/>
-          </ac:spMkLst>
-        </pc:spChg>
       </pc:sldChg>
       <pc:sldChg chg="addSp delSp modSp new del mod setBg setClrOvrMap">
         <pc:chgData name="Nassery, Wanisa" userId="eb577ee2-3895-4f93-9de0-b07a06e375bf" providerId="ADAL" clId="{0563F7C6-264B-407D-9CB8-9601D089DAD8}" dt="2026-03-04T20:39:24.929" v="1221" actId="2696"/>
@@ -166,54 +151,6 @@
           <pc:docMk/>
           <pc:sldMk cId="2104667562" sldId="257"/>
         </pc:sldMkLst>
-        <pc:spChg chg="mod">
-          <ac:chgData name="Nassery, Wanisa" userId="eb577ee2-3895-4f93-9de0-b07a06e375bf" providerId="ADAL" clId="{0563F7C6-264B-407D-9CB8-9601D089DAD8}" dt="2026-03-01T09:19:07.724" v="1032" actId="27636"/>
-          <ac:spMkLst>
-            <pc:docMk/>
-            <pc:sldMk cId="2104667562" sldId="257"/>
-            <ac:spMk id="2" creationId="{1CEFFC0A-70AA-D8EB-F331-00E010C8544E}"/>
-          </ac:spMkLst>
-        </pc:spChg>
-        <pc:spChg chg="add mod">
-          <ac:chgData name="Nassery, Wanisa" userId="eb577ee2-3895-4f93-9de0-b07a06e375bf" providerId="ADAL" clId="{0563F7C6-264B-407D-9CB8-9601D089DAD8}" dt="2026-03-03T10:33:13.819" v="1140" actId="20577"/>
-          <ac:spMkLst>
-            <pc:docMk/>
-            <pc:sldMk cId="2104667562" sldId="257"/>
-            <ac:spMk id="4" creationId="{A2E70C5C-D330-FC53-0034-5F1B514DDE3A}"/>
-          </ac:spMkLst>
-        </pc:spChg>
-        <pc:spChg chg="add mod">
-          <ac:chgData name="Nassery, Wanisa" userId="eb577ee2-3895-4f93-9de0-b07a06e375bf" providerId="ADAL" clId="{0563F7C6-264B-407D-9CB8-9601D089DAD8}" dt="2026-03-03T08:46:03.189" v="1075" actId="1076"/>
-          <ac:spMkLst>
-            <pc:docMk/>
-            <pc:sldMk cId="2104667562" sldId="257"/>
-            <ac:spMk id="6" creationId="{45ADE669-CC9D-587F-6369-8A04C4C2E987}"/>
-          </ac:spMkLst>
-        </pc:spChg>
-        <pc:spChg chg="add del mod">
-          <ac:chgData name="Nassery, Wanisa" userId="eb577ee2-3895-4f93-9de0-b07a06e375bf" providerId="ADAL" clId="{0563F7C6-264B-407D-9CB8-9601D089DAD8}" dt="2026-02-27T13:14:21.945" v="689" actId="47"/>
-          <ac:spMkLst>
-            <pc:docMk/>
-            <pc:sldMk cId="2104667562" sldId="257"/>
-            <ac:spMk id="19" creationId="{175EDA75-415A-A774-E933-98885C66F0F6}"/>
-          </ac:spMkLst>
-        </pc:spChg>
-        <pc:spChg chg="add mod">
-          <ac:chgData name="Nassery, Wanisa" userId="eb577ee2-3895-4f93-9de0-b07a06e375bf" providerId="ADAL" clId="{0563F7C6-264B-407D-9CB8-9601D089DAD8}" dt="2026-02-28T12:50:38.195" v="976" actId="403"/>
-          <ac:spMkLst>
-            <pc:docMk/>
-            <pc:sldMk cId="2104667562" sldId="257"/>
-            <ac:spMk id="50" creationId="{860199F2-296C-AACF-FC20-34FDB9C3FD82}"/>
-          </ac:spMkLst>
-        </pc:spChg>
-        <pc:spChg chg="add mod">
-          <ac:chgData name="Nassery, Wanisa" userId="eb577ee2-3895-4f93-9de0-b07a06e375bf" providerId="ADAL" clId="{0563F7C6-264B-407D-9CB8-9601D089DAD8}" dt="2026-02-28T12:48:26.495" v="959" actId="1076"/>
-          <ac:spMkLst>
-            <pc:docMk/>
-            <pc:sldMk cId="2104667562" sldId="257"/>
-            <ac:spMk id="52" creationId="{F0677F92-6DF6-709D-09A7-C783C98810E2}"/>
-          </ac:spMkLst>
-        </pc:spChg>
       </pc:sldChg>
       <pc:sldChg chg="add del">
         <pc:chgData name="Nassery, Wanisa" userId="eb577ee2-3895-4f93-9de0-b07a06e375bf" providerId="ADAL" clId="{0563F7C6-264B-407D-9CB8-9601D089DAD8}" dt="2026-03-04T20:39:28.322" v="1223" actId="2696"/>
@@ -228,62 +165,6 @@
           <pc:docMk/>
           <pc:sldMk cId="3123524222" sldId="258"/>
         </pc:sldMkLst>
-        <pc:spChg chg="mod">
-          <ac:chgData name="Nassery, Wanisa" userId="eb577ee2-3895-4f93-9de0-b07a06e375bf" providerId="ADAL" clId="{0563F7C6-264B-407D-9CB8-9601D089DAD8}" dt="2026-02-27T13:23:02.690" v="831" actId="20577"/>
-          <ac:spMkLst>
-            <pc:docMk/>
-            <pc:sldMk cId="3123524222" sldId="258"/>
-            <ac:spMk id="2" creationId="{5FAAD02D-420C-4F19-C7FA-1F08071404C4}"/>
-          </ac:spMkLst>
-        </pc:spChg>
-        <pc:spChg chg="add mod">
-          <ac:chgData name="Nassery, Wanisa" userId="eb577ee2-3895-4f93-9de0-b07a06e375bf" providerId="ADAL" clId="{0563F7C6-264B-407D-9CB8-9601D089DAD8}" dt="2026-02-28T12:47:56.729" v="953" actId="403"/>
-          <ac:spMkLst>
-            <pc:docMk/>
-            <pc:sldMk cId="3123524222" sldId="258"/>
-            <ac:spMk id="3" creationId="{448F8956-7542-8DA7-0A00-688CD0146B0E}"/>
-          </ac:spMkLst>
-        </pc:spChg>
-        <pc:spChg chg="add mod">
-          <ac:chgData name="Nassery, Wanisa" userId="eb577ee2-3895-4f93-9de0-b07a06e375bf" providerId="ADAL" clId="{0563F7C6-264B-407D-9CB8-9601D089DAD8}" dt="2026-03-03T10:32:52.078" v="1102" actId="1076"/>
-          <ac:spMkLst>
-            <pc:docMk/>
-            <pc:sldMk cId="3123524222" sldId="258"/>
-            <ac:spMk id="5" creationId="{95E2DF47-A9B9-2813-48A6-302FAB199773}"/>
-          </ac:spMkLst>
-        </pc:spChg>
-        <pc:spChg chg="add mod">
-          <ac:chgData name="Nassery, Wanisa" userId="eb577ee2-3895-4f93-9de0-b07a06e375bf" providerId="ADAL" clId="{0563F7C6-264B-407D-9CB8-9601D089DAD8}" dt="2026-02-28T12:48:03.435" v="954" actId="403"/>
-          <ac:spMkLst>
-            <pc:docMk/>
-            <pc:sldMk cId="3123524222" sldId="258"/>
-            <ac:spMk id="6" creationId="{4C7B1D99-E901-7AA3-ED64-FB2FC0E5D03A}"/>
-          </ac:spMkLst>
-        </pc:spChg>
-        <pc:spChg chg="add del mod">
-          <ac:chgData name="Nassery, Wanisa" userId="eb577ee2-3895-4f93-9de0-b07a06e375bf" providerId="ADAL" clId="{0563F7C6-264B-407D-9CB8-9601D089DAD8}" dt="2026-03-03T10:32:46.769" v="1101" actId="21"/>
-          <ac:spMkLst>
-            <pc:docMk/>
-            <pc:sldMk cId="3123524222" sldId="258"/>
-            <ac:spMk id="7" creationId="{0D95BBFF-1CE8-704D-F1DC-A6D90098D819}"/>
-          </ac:spMkLst>
-        </pc:spChg>
-        <pc:spChg chg="add del mod">
-          <ac:chgData name="Nassery, Wanisa" userId="eb577ee2-3895-4f93-9de0-b07a06e375bf" providerId="ADAL" clId="{0563F7C6-264B-407D-9CB8-9601D089DAD8}" dt="2026-03-03T08:21:50.165" v="1067" actId="21"/>
-          <ac:spMkLst>
-            <pc:docMk/>
-            <pc:sldMk cId="3123524222" sldId="258"/>
-            <ac:spMk id="8" creationId="{03162A46-05AD-5665-6314-CC96D8C2A100}"/>
-          </ac:spMkLst>
-        </pc:spChg>
-        <pc:spChg chg="add mod">
-          <ac:chgData name="Nassery, Wanisa" userId="eb577ee2-3895-4f93-9de0-b07a06e375bf" providerId="ADAL" clId="{0563F7C6-264B-407D-9CB8-9601D089DAD8}" dt="2026-03-03T08:45:44.166" v="1071" actId="1076"/>
-          <ac:spMkLst>
-            <pc:docMk/>
-            <pc:sldMk cId="3123524222" sldId="258"/>
-            <ac:spMk id="10" creationId="{4B9CFA51-38FA-F2B0-55FD-1FE4423DE52D}"/>
-          </ac:spMkLst>
-        </pc:spChg>
       </pc:sldChg>
       <pc:sldChg chg="addSp delSp modSp new del mod">
         <pc:chgData name="Nassery, Wanisa" userId="eb577ee2-3895-4f93-9de0-b07a06e375bf" providerId="ADAL" clId="{0563F7C6-264B-407D-9CB8-9601D089DAD8}" dt="2026-03-04T20:39:23.226" v="1219" actId="2696"/>
@@ -291,38 +172,6 @@
           <pc:docMk/>
           <pc:sldMk cId="4154904347" sldId="259"/>
         </pc:sldMkLst>
-        <pc:spChg chg="mod">
-          <ac:chgData name="Nassery, Wanisa" userId="eb577ee2-3895-4f93-9de0-b07a06e375bf" providerId="ADAL" clId="{0563F7C6-264B-407D-9CB8-9601D089DAD8}" dt="2026-02-27T14:24:23.102" v="935" actId="20577"/>
-          <ac:spMkLst>
-            <pc:docMk/>
-            <pc:sldMk cId="4154904347" sldId="259"/>
-            <ac:spMk id="2" creationId="{0343E820-3228-1CE4-3E0D-D20FA340DBA1}"/>
-          </ac:spMkLst>
-        </pc:spChg>
-        <pc:spChg chg="add mod">
-          <ac:chgData name="Nassery, Wanisa" userId="eb577ee2-3895-4f93-9de0-b07a06e375bf" providerId="ADAL" clId="{0563F7C6-264B-407D-9CB8-9601D089DAD8}" dt="2026-02-28T12:48:31.986" v="960" actId="403"/>
-          <ac:spMkLst>
-            <pc:docMk/>
-            <pc:sldMk cId="4154904347" sldId="259"/>
-            <ac:spMk id="4" creationId="{48701C36-A375-C62E-32D9-200EB4F750AA}"/>
-          </ac:spMkLst>
-        </pc:spChg>
-        <pc:spChg chg="add mod">
-          <ac:chgData name="Nassery, Wanisa" userId="eb577ee2-3895-4f93-9de0-b07a06e375bf" providerId="ADAL" clId="{0563F7C6-264B-407D-9CB8-9601D089DAD8}" dt="2026-02-28T12:55:15.596" v="979" actId="20577"/>
-          <ac:spMkLst>
-            <pc:docMk/>
-            <pc:sldMk cId="4154904347" sldId="259"/>
-            <ac:spMk id="6" creationId="{9BBDAA44-E77C-E386-D61B-EE838593B7C8}"/>
-          </ac:spMkLst>
-        </pc:spChg>
-        <pc:spChg chg="add mod">
-          <ac:chgData name="Nassery, Wanisa" userId="eb577ee2-3895-4f93-9de0-b07a06e375bf" providerId="ADAL" clId="{0563F7C6-264B-407D-9CB8-9601D089DAD8}" dt="2026-03-03T08:46:14.359" v="1077" actId="1076"/>
-          <ac:spMkLst>
-            <pc:docMk/>
-            <pc:sldMk cId="4154904347" sldId="259"/>
-            <ac:spMk id="14" creationId="{223D1B1C-59E6-A490-1F31-22A8DB631A4F}"/>
-          </ac:spMkLst>
-        </pc:spChg>
       </pc:sldChg>
       <pc:sldChg chg="addSp delSp modSp new del mod">
         <pc:chgData name="Nassery, Wanisa" userId="eb577ee2-3895-4f93-9de0-b07a06e375bf" providerId="ADAL" clId="{0563F7C6-264B-407D-9CB8-9601D089DAD8}" dt="2026-03-04T20:39:22.111" v="1218" actId="2696"/>
@@ -330,41 +179,9 @@
           <pc:docMk/>
           <pc:sldMk cId="1878799206" sldId="260"/>
         </pc:sldMkLst>
-        <pc:spChg chg="mod">
-          <ac:chgData name="Nassery, Wanisa" userId="eb577ee2-3895-4f93-9de0-b07a06e375bf" providerId="ADAL" clId="{0563F7C6-264B-407D-9CB8-9601D089DAD8}" dt="2026-03-01T09:18:59.056" v="1014" actId="20577"/>
-          <ac:spMkLst>
-            <pc:docMk/>
-            <pc:sldMk cId="1878799206" sldId="260"/>
-            <ac:spMk id="2" creationId="{B1257FB5-0E62-7D5C-CFB6-567E4624B481}"/>
-          </ac:spMkLst>
-        </pc:spChg>
-        <pc:spChg chg="add mod">
-          <ac:chgData name="Nassery, Wanisa" userId="eb577ee2-3895-4f93-9de0-b07a06e375bf" providerId="ADAL" clId="{0563F7C6-264B-407D-9CB8-9601D089DAD8}" dt="2026-03-01T09:19:39.138" v="1066" actId="1076"/>
-          <ac:spMkLst>
-            <pc:docMk/>
-            <pc:sldMk cId="1878799206" sldId="260"/>
-            <ac:spMk id="7" creationId="{19AFEEA6-B6E6-A882-38A6-7AE84203497D}"/>
-          </ac:spMkLst>
-        </pc:spChg>
-        <pc:spChg chg="add del mod">
-          <ac:chgData name="Nassery, Wanisa" userId="eb577ee2-3895-4f93-9de0-b07a06e375bf" providerId="ADAL" clId="{0563F7C6-264B-407D-9CB8-9601D089DAD8}" dt="2026-03-03T08:46:27.524" v="1080" actId="21"/>
-          <ac:spMkLst>
-            <pc:docMk/>
-            <pc:sldMk cId="1878799206" sldId="260"/>
-            <ac:spMk id="8" creationId="{AE4A3293-0AEF-6BC0-76C4-05C781105B86}"/>
-          </ac:spMkLst>
-        </pc:spChg>
-        <pc:spChg chg="add mod">
-          <ac:chgData name="Nassery, Wanisa" userId="eb577ee2-3895-4f93-9de0-b07a06e375bf" providerId="ADAL" clId="{0563F7C6-264B-407D-9CB8-9601D089DAD8}" dt="2026-03-03T08:46:38.699" v="1096" actId="1076"/>
-          <ac:spMkLst>
-            <pc:docMk/>
-            <pc:sldMk cId="1878799206" sldId="260"/>
-            <ac:spMk id="10" creationId="{2A13C103-40A1-3539-B6C7-5D2221E82010}"/>
-          </ac:spMkLst>
-        </pc:spChg>
       </pc:sldChg>
       <pc:sldChg chg="addSp delSp modSp add mod modTransition setBg delAnim modNotes">
-        <pc:chgData name="Nassery, Wanisa" userId="eb577ee2-3895-4f93-9de0-b07a06e375bf" providerId="ADAL" clId="{0563F7C6-264B-407D-9CB8-9601D089DAD8}" dt="2026-03-04T20:41:24.778" v="1379" actId="1076"/>
+        <pc:chgData name="Nassery, Wanisa" userId="eb577ee2-3895-4f93-9de0-b07a06e375bf" providerId="ADAL" clId="{0563F7C6-264B-407D-9CB8-9601D089DAD8}" dt="2026-03-05T08:47:53.537" v="1459" actId="1076"/>
         <pc:sldMkLst>
           <pc:docMk/>
           <pc:sldMk cId="0" sldId="261"/>
@@ -378,11 +195,43 @@
           </ac:spMkLst>
         </pc:spChg>
         <pc:spChg chg="add del mod">
+          <ac:chgData name="Nassery, Wanisa" userId="eb577ee2-3895-4f93-9de0-b07a06e375bf" providerId="ADAL" clId="{0563F7C6-264B-407D-9CB8-9601D089DAD8}" dt="2026-03-05T08:45:06.362" v="1384" actId="21"/>
+          <ac:spMkLst>
+            <pc:docMk/>
+            <pc:sldMk cId="0" sldId="261"/>
+            <ac:spMk id="3" creationId="{CA6266D7-EA12-4954-2E1B-AF22E27DDC0B}"/>
+          </ac:spMkLst>
+        </pc:spChg>
+        <pc:spChg chg="add mod">
+          <ac:chgData name="Nassery, Wanisa" userId="eb577ee2-3895-4f93-9de0-b07a06e375bf" providerId="ADAL" clId="{0563F7C6-264B-407D-9CB8-9601D089DAD8}" dt="2026-03-05T08:45:48.173" v="1428" actId="403"/>
+          <ac:spMkLst>
+            <pc:docMk/>
+            <pc:sldMk cId="0" sldId="261"/>
+            <ac:spMk id="4" creationId="{653A7C3D-9C14-7FE7-051E-E2249B704918}"/>
+          </ac:spMkLst>
+        </pc:spChg>
+        <pc:spChg chg="add mod">
+          <ac:chgData name="Nassery, Wanisa" userId="eb577ee2-3895-4f93-9de0-b07a06e375bf" providerId="ADAL" clId="{0563F7C6-264B-407D-9CB8-9601D089DAD8}" dt="2026-03-05T08:45:41.809" v="1421" actId="1076"/>
+          <ac:spMkLst>
+            <pc:docMk/>
+            <pc:sldMk cId="0" sldId="261"/>
+            <ac:spMk id="5" creationId="{9C5BCA58-AB2F-8F73-B804-7B2EDFDB9E65}"/>
+          </ac:spMkLst>
+        </pc:spChg>
+        <pc:spChg chg="add del mod">
           <ac:chgData name="Nassery, Wanisa" userId="eb577ee2-3895-4f93-9de0-b07a06e375bf" providerId="ADAL" clId="{0563F7C6-264B-407D-9CB8-9601D089DAD8}" dt="2026-03-04T20:31:39.910" v="1143" actId="21"/>
           <ac:spMkLst>
             <pc:docMk/>
             <pc:sldMk cId="0" sldId="261"/>
             <ac:spMk id="5" creationId="{D711861C-47E6-E6A3-E5DE-C9153C499747}"/>
+          </ac:spMkLst>
+        </pc:spChg>
+        <pc:spChg chg="add mod">
+          <ac:chgData name="Nassery, Wanisa" userId="eb577ee2-3895-4f93-9de0-b07a06e375bf" providerId="ADAL" clId="{0563F7C6-264B-407D-9CB8-9601D089DAD8}" dt="2026-03-05T08:47:14.375" v="1446" actId="1076"/>
+          <ac:spMkLst>
+            <pc:docMk/>
+            <pc:sldMk cId="0" sldId="261"/>
+            <ac:spMk id="6" creationId="{003E8A07-805A-A8F6-F527-3158DD7BF1A8}"/>
           </ac:spMkLst>
         </pc:spChg>
         <pc:spChg chg="add mod">
@@ -401,8 +250,8 @@
             <ac:spMk id="7" creationId="{FD19B060-1427-E520-CA35-6AE0DEAA93F9}"/>
           </ac:spMkLst>
         </pc:spChg>
-        <pc:spChg chg="add mod">
-          <ac:chgData name="Nassery, Wanisa" userId="eb577ee2-3895-4f93-9de0-b07a06e375bf" providerId="ADAL" clId="{0563F7C6-264B-407D-9CB8-9601D089DAD8}" dt="2026-03-04T20:41:24.778" v="1379" actId="1076"/>
+        <pc:spChg chg="add del mod">
+          <ac:chgData name="Nassery, Wanisa" userId="eb577ee2-3895-4f93-9de0-b07a06e375bf" providerId="ADAL" clId="{0563F7C6-264B-407D-9CB8-9601D089DAD8}" dt="2026-03-05T08:45:03.019" v="1383" actId="21"/>
           <ac:spMkLst>
             <pc:docMk/>
             <pc:sldMk cId="0" sldId="261"/>
@@ -418,7 +267,7 @@
           </ac:spMkLst>
         </pc:spChg>
         <pc:spChg chg="add mod">
-          <ac:chgData name="Nassery, Wanisa" userId="eb577ee2-3895-4f93-9de0-b07a06e375bf" providerId="ADAL" clId="{0563F7C6-264B-407D-9CB8-9601D089DAD8}" dt="2026-03-04T20:32:23.309" v="1150" actId="207"/>
+          <ac:chgData name="Nassery, Wanisa" userId="eb577ee2-3895-4f93-9de0-b07a06e375bf" providerId="ADAL" clId="{0563F7C6-264B-407D-9CB8-9601D089DAD8}" dt="2026-03-05T08:47:53.537" v="1459" actId="1076"/>
           <ac:spMkLst>
             <pc:docMk/>
             <pc:sldMk cId="0" sldId="261"/>
@@ -426,7 +275,7 @@
           </ac:spMkLst>
         </pc:spChg>
         <pc:spChg chg="add mod">
-          <ac:chgData name="Nassery, Wanisa" userId="eb577ee2-3895-4f93-9de0-b07a06e375bf" providerId="ADAL" clId="{0563F7C6-264B-407D-9CB8-9601D089DAD8}" dt="2026-03-04T20:32:46.071" v="1157" actId="207"/>
+          <ac:chgData name="Nassery, Wanisa" userId="eb577ee2-3895-4f93-9de0-b07a06e375bf" providerId="ADAL" clId="{0563F7C6-264B-407D-9CB8-9601D089DAD8}" dt="2026-03-05T08:45:53.602" v="1429" actId="1076"/>
           <ac:spMkLst>
             <pc:docMk/>
             <pc:sldMk cId="0" sldId="261"/>
@@ -434,7 +283,7 @@
           </ac:spMkLst>
         </pc:spChg>
         <pc:spChg chg="add mod">
-          <ac:chgData name="Nassery, Wanisa" userId="eb577ee2-3895-4f93-9de0-b07a06e375bf" providerId="ADAL" clId="{0563F7C6-264B-407D-9CB8-9601D089DAD8}" dt="2026-03-04T20:32:05.109" v="1146"/>
+          <ac:chgData name="Nassery, Wanisa" userId="eb577ee2-3895-4f93-9de0-b07a06e375bf" providerId="ADAL" clId="{0563F7C6-264B-407D-9CB8-9601D089DAD8}" dt="2026-03-05T08:45:00.024" v="1382" actId="1076"/>
           <ac:spMkLst>
             <pc:docMk/>
             <pc:sldMk cId="0" sldId="261"/>
@@ -459,11 +308,19 @@
         </pc:spChg>
       </pc:sldChg>
       <pc:sldChg chg="addSp delSp modSp add mod modTransition setBg delAnim modNotes">
-        <pc:chgData name="Nassery, Wanisa" userId="eb577ee2-3895-4f93-9de0-b07a06e375bf" providerId="ADAL" clId="{0563F7C6-264B-407D-9CB8-9601D089DAD8}" dt="2026-03-04T20:36:45.123" v="1198" actId="1076"/>
+        <pc:chgData name="Nassery, Wanisa" userId="eb577ee2-3895-4f93-9de0-b07a06e375bf" providerId="ADAL" clId="{0563F7C6-264B-407D-9CB8-9601D089DAD8}" dt="2026-03-05T16:11:16.729" v="1484" actId="1076"/>
         <pc:sldMkLst>
           <pc:docMk/>
           <pc:sldMk cId="0" sldId="262"/>
         </pc:sldMkLst>
+        <pc:spChg chg="add mod">
+          <ac:chgData name="Nassery, Wanisa" userId="eb577ee2-3895-4f93-9de0-b07a06e375bf" providerId="ADAL" clId="{0563F7C6-264B-407D-9CB8-9601D089DAD8}" dt="2026-03-05T08:47:30.383" v="1452" actId="20577"/>
+          <ac:spMkLst>
+            <pc:docMk/>
+            <pc:sldMk cId="0" sldId="262"/>
+            <ac:spMk id="2" creationId="{2CD55DBD-4758-08AE-B9D6-CEAC81854039}"/>
+          </ac:spMkLst>
+        </pc:spChg>
         <pc:spChg chg="add del mod">
           <ac:chgData name="Nassery, Wanisa" userId="eb577ee2-3895-4f93-9de0-b07a06e375bf" providerId="ADAL" clId="{0563F7C6-264B-407D-9CB8-9601D089DAD8}" dt="2026-03-04T20:34:12.001" v="1190" actId="21"/>
           <ac:spMkLst>
@@ -481,7 +338,7 @@
           </ac:spMkLst>
         </pc:spChg>
         <pc:spChg chg="add mod">
-          <ac:chgData name="Nassery, Wanisa" userId="eb577ee2-3895-4f93-9de0-b07a06e375bf" providerId="ADAL" clId="{0563F7C6-264B-407D-9CB8-9601D089DAD8}" dt="2026-03-04T20:36:42.435" v="1197" actId="1076"/>
+          <ac:chgData name="Nassery, Wanisa" userId="eb577ee2-3895-4f93-9de0-b07a06e375bf" providerId="ADAL" clId="{0563F7C6-264B-407D-9CB8-9601D089DAD8}" dt="2026-03-05T08:46:20.237" v="1430" actId="113"/>
           <ac:spMkLst>
             <pc:docMk/>
             <pc:sldMk cId="0" sldId="262"/>
@@ -489,15 +346,15 @@
           </ac:spMkLst>
         </pc:spChg>
         <pc:spChg chg="add mod">
-          <ac:chgData name="Nassery, Wanisa" userId="eb577ee2-3895-4f93-9de0-b07a06e375bf" providerId="ADAL" clId="{0563F7C6-264B-407D-9CB8-9601D089DAD8}" dt="2026-03-04T20:36:36.374" v="1196" actId="1076"/>
+          <ac:chgData name="Nassery, Wanisa" userId="eb577ee2-3895-4f93-9de0-b07a06e375bf" providerId="ADAL" clId="{0563F7C6-264B-407D-9CB8-9601D089DAD8}" dt="2026-03-05T16:11:16.729" v="1484" actId="1076"/>
           <ac:spMkLst>
             <pc:docMk/>
             <pc:sldMk cId="0" sldId="262"/>
             <ac:spMk id="7" creationId="{77A9D232-2BA6-CA4F-ACE4-FA07C41254C3}"/>
           </ac:spMkLst>
         </pc:spChg>
-        <pc:spChg chg="add mod">
-          <ac:chgData name="Nassery, Wanisa" userId="eb577ee2-3895-4f93-9de0-b07a06e375bf" providerId="ADAL" clId="{0563F7C6-264B-407D-9CB8-9601D089DAD8}" dt="2026-03-04T20:36:36.374" v="1196" actId="1076"/>
+        <pc:spChg chg="add del mod">
+          <ac:chgData name="Nassery, Wanisa" userId="eb577ee2-3895-4f93-9de0-b07a06e375bf" providerId="ADAL" clId="{0563F7C6-264B-407D-9CB8-9601D089DAD8}" dt="2026-03-05T16:11:14.170" v="1483" actId="21"/>
           <ac:spMkLst>
             <pc:docMk/>
             <pc:sldMk cId="0" sldId="262"/>
@@ -505,7 +362,7 @@
           </ac:spMkLst>
         </pc:spChg>
         <pc:spChg chg="add mod">
-          <ac:chgData name="Nassery, Wanisa" userId="eb577ee2-3895-4f93-9de0-b07a06e375bf" providerId="ADAL" clId="{0563F7C6-264B-407D-9CB8-9601D089DAD8}" dt="2026-03-04T20:36:36.374" v="1196" actId="1076"/>
+          <ac:chgData name="Nassery, Wanisa" userId="eb577ee2-3895-4f93-9de0-b07a06e375bf" providerId="ADAL" clId="{0563F7C6-264B-407D-9CB8-9601D089DAD8}" dt="2026-03-05T08:48:24.572" v="1463" actId="1076"/>
           <ac:spMkLst>
             <pc:docMk/>
             <pc:sldMk cId="0" sldId="262"/>
@@ -513,7 +370,7 @@
           </ac:spMkLst>
         </pc:spChg>
         <pc:spChg chg="add mod">
-          <ac:chgData name="Nassery, Wanisa" userId="eb577ee2-3895-4f93-9de0-b07a06e375bf" providerId="ADAL" clId="{0563F7C6-264B-407D-9CB8-9601D089DAD8}" dt="2026-03-04T20:36:45.123" v="1198" actId="1076"/>
+          <ac:chgData name="Nassery, Wanisa" userId="eb577ee2-3895-4f93-9de0-b07a06e375bf" providerId="ADAL" clId="{0563F7C6-264B-407D-9CB8-9601D089DAD8}" dt="2026-03-05T16:11:06.533" v="1481" actId="1076"/>
           <ac:spMkLst>
             <pc:docMk/>
             <pc:sldMk cId="0" sldId="262"/>
@@ -538,11 +395,19 @@
         </pc:spChg>
       </pc:sldChg>
       <pc:sldChg chg="addSp delSp modSp add mod">
-        <pc:chgData name="Nassery, Wanisa" userId="eb577ee2-3895-4f93-9de0-b07a06e375bf" providerId="ADAL" clId="{0563F7C6-264B-407D-9CB8-9601D089DAD8}" dt="2026-03-04T20:37:38.925" v="1208" actId="1076"/>
+        <pc:chgData name="Nassery, Wanisa" userId="eb577ee2-3895-4f93-9de0-b07a06e375bf" providerId="ADAL" clId="{0563F7C6-264B-407D-9CB8-9601D089DAD8}" dt="2026-03-05T16:10:47.543" v="1476" actId="1076"/>
         <pc:sldMkLst>
           <pc:docMk/>
           <pc:sldMk cId="893894787" sldId="263"/>
         </pc:sldMkLst>
+        <pc:spChg chg="add mod">
+          <ac:chgData name="Nassery, Wanisa" userId="eb577ee2-3895-4f93-9de0-b07a06e375bf" providerId="ADAL" clId="{0563F7C6-264B-407D-9CB8-9601D089DAD8}" dt="2026-03-05T08:47:34.921" v="1454" actId="20577"/>
+          <ac:spMkLst>
+            <pc:docMk/>
+            <pc:sldMk cId="893894787" sldId="263"/>
+            <ac:spMk id="2" creationId="{105AFAF5-7A33-A7AC-05DC-550716FBBF8D}"/>
+          </ac:spMkLst>
+        </pc:spChg>
         <pc:spChg chg="add del mod">
           <ac:chgData name="Nassery, Wanisa" userId="eb577ee2-3895-4f93-9de0-b07a06e375bf" providerId="ADAL" clId="{0563F7C6-264B-407D-9CB8-9601D089DAD8}" dt="2026-03-04T20:37:11.668" v="1202" actId="21"/>
           <ac:spMkLst>
@@ -560,7 +425,7 @@
           </ac:spMkLst>
         </pc:spChg>
         <pc:spChg chg="add mod">
-          <ac:chgData name="Nassery, Wanisa" userId="eb577ee2-3895-4f93-9de0-b07a06e375bf" providerId="ADAL" clId="{0563F7C6-264B-407D-9CB8-9601D089DAD8}" dt="2026-03-04T20:37:38.925" v="1208" actId="1076"/>
+          <ac:chgData name="Nassery, Wanisa" userId="eb577ee2-3895-4f93-9de0-b07a06e375bf" providerId="ADAL" clId="{0563F7C6-264B-407D-9CB8-9601D089DAD8}" dt="2026-03-05T08:46:24.804" v="1431" actId="113"/>
           <ac:spMkLst>
             <pc:docMk/>
             <pc:sldMk cId="893894787" sldId="263"/>
@@ -608,7 +473,7 @@
           </ac:spMkLst>
         </pc:spChg>
         <pc:spChg chg="add mod">
-          <ac:chgData name="Nassery, Wanisa" userId="eb577ee2-3895-4f93-9de0-b07a06e375bf" providerId="ADAL" clId="{0563F7C6-264B-407D-9CB8-9601D089DAD8}" dt="2026-03-04T20:37:28.246" v="1206" actId="1076"/>
+          <ac:chgData name="Nassery, Wanisa" userId="eb577ee2-3895-4f93-9de0-b07a06e375bf" providerId="ADAL" clId="{0563F7C6-264B-407D-9CB8-9601D089DAD8}" dt="2026-03-05T16:10:37.747" v="1474" actId="20577"/>
           <ac:spMkLst>
             <pc:docMk/>
             <pc:sldMk cId="893894787" sldId="263"/>
@@ -616,7 +481,7 @@
           </ac:spMkLst>
         </pc:spChg>
         <pc:spChg chg="add mod">
-          <ac:chgData name="Nassery, Wanisa" userId="eb577ee2-3895-4f93-9de0-b07a06e375bf" providerId="ADAL" clId="{0563F7C6-264B-407D-9CB8-9601D089DAD8}" dt="2026-03-04T20:37:28.246" v="1206" actId="1076"/>
+          <ac:chgData name="Nassery, Wanisa" userId="eb577ee2-3895-4f93-9de0-b07a06e375bf" providerId="ADAL" clId="{0563F7C6-264B-407D-9CB8-9601D089DAD8}" dt="2026-03-05T16:10:47.543" v="1476" actId="1076"/>
           <ac:spMkLst>
             <pc:docMk/>
             <pc:sldMk cId="893894787" sldId="263"/>
@@ -624,7 +489,7 @@
           </ac:spMkLst>
         </pc:spChg>
         <pc:spChg chg="add mod">
-          <ac:chgData name="Nassery, Wanisa" userId="eb577ee2-3895-4f93-9de0-b07a06e375bf" providerId="ADAL" clId="{0563F7C6-264B-407D-9CB8-9601D089DAD8}" dt="2026-03-04T20:37:28.246" v="1206" actId="1076"/>
+          <ac:chgData name="Nassery, Wanisa" userId="eb577ee2-3895-4f93-9de0-b07a06e375bf" providerId="ADAL" clId="{0563F7C6-264B-407D-9CB8-9601D089DAD8}" dt="2026-03-05T16:10:42.562" v="1475" actId="1076"/>
           <ac:spMkLst>
             <pc:docMk/>
             <pc:sldMk cId="893894787" sldId="263"/>
@@ -633,11 +498,19 @@
         </pc:spChg>
       </pc:sldChg>
       <pc:sldChg chg="addSp delSp modSp add mod">
-        <pc:chgData name="Nassery, Wanisa" userId="eb577ee2-3895-4f93-9de0-b07a06e375bf" providerId="ADAL" clId="{0563F7C6-264B-407D-9CB8-9601D089DAD8}" dt="2026-03-04T20:38:21.031" v="1215" actId="1076"/>
+        <pc:chgData name="Nassery, Wanisa" userId="eb577ee2-3895-4f93-9de0-b07a06e375bf" providerId="ADAL" clId="{0563F7C6-264B-407D-9CB8-9601D089DAD8}" dt="2026-03-05T16:10:54.553" v="1479" actId="1076"/>
         <pc:sldMkLst>
           <pc:docMk/>
           <pc:sldMk cId="3714839329" sldId="264"/>
         </pc:sldMkLst>
+        <pc:spChg chg="add mod">
+          <ac:chgData name="Nassery, Wanisa" userId="eb577ee2-3895-4f93-9de0-b07a06e375bf" providerId="ADAL" clId="{0563F7C6-264B-407D-9CB8-9601D089DAD8}" dt="2026-03-05T08:47:40.094" v="1456" actId="20577"/>
+          <ac:spMkLst>
+            <pc:docMk/>
+            <pc:sldMk cId="3714839329" sldId="264"/>
+            <ac:spMk id="2" creationId="{11F0C13B-3AE9-CB48-36DD-A95A6684D3E8}"/>
+          </ac:spMkLst>
+        </pc:spChg>
         <pc:spChg chg="add del mod">
           <ac:chgData name="Nassery, Wanisa" userId="eb577ee2-3895-4f93-9de0-b07a06e375bf" providerId="ADAL" clId="{0563F7C6-264B-407D-9CB8-9601D089DAD8}" dt="2026-03-04T20:38:15.257" v="1213" actId="21"/>
           <ac:spMkLst>
@@ -647,7 +520,7 @@
           </ac:spMkLst>
         </pc:spChg>
         <pc:spChg chg="add mod">
-          <ac:chgData name="Nassery, Wanisa" userId="eb577ee2-3895-4f93-9de0-b07a06e375bf" providerId="ADAL" clId="{0563F7C6-264B-407D-9CB8-9601D089DAD8}" dt="2026-03-04T20:38:21.031" v="1215" actId="1076"/>
+          <ac:chgData name="Nassery, Wanisa" userId="eb577ee2-3895-4f93-9de0-b07a06e375bf" providerId="ADAL" clId="{0563F7C6-264B-407D-9CB8-9601D089DAD8}" dt="2026-03-05T08:46:31.538" v="1432" actId="113"/>
           <ac:spMkLst>
             <pc:docMk/>
             <pc:sldMk cId="3714839329" sldId="264"/>
@@ -671,7 +544,7 @@
           </ac:spMkLst>
         </pc:spChg>
         <pc:spChg chg="add mod">
-          <ac:chgData name="Nassery, Wanisa" userId="eb577ee2-3895-4f93-9de0-b07a06e375bf" providerId="ADAL" clId="{0563F7C6-264B-407D-9CB8-9601D089DAD8}" dt="2026-03-04T20:38:12.302" v="1212" actId="14100"/>
+          <ac:chgData name="Nassery, Wanisa" userId="eb577ee2-3895-4f93-9de0-b07a06e375bf" providerId="ADAL" clId="{0563F7C6-264B-407D-9CB8-9601D089DAD8}" dt="2026-03-05T16:10:54.553" v="1479" actId="1076"/>
           <ac:spMkLst>
             <pc:docMk/>
             <pc:sldMk cId="3714839329" sldId="264"/>
@@ -723,6 +596,45 @@
             <pc:docMk/>
             <pc:sldMk cId="0" sldId="265"/>
             <ac:spMk id="348" creationId="{00000000-0000-0000-0000-000000000000}"/>
+          </ac:spMkLst>
+        </pc:spChg>
+      </pc:sldChg>
+      <pc:sldChg chg="addSp delSp modSp add mod">
+        <pc:chgData name="Nassery, Wanisa" userId="eb577ee2-3895-4f93-9de0-b07a06e375bf" providerId="ADAL" clId="{0563F7C6-264B-407D-9CB8-9601D089DAD8}" dt="2026-03-05T08:47:44.728" v="1458" actId="20577"/>
+        <pc:sldMkLst>
+          <pc:docMk/>
+          <pc:sldMk cId="3371027184" sldId="266"/>
+        </pc:sldMkLst>
+        <pc:spChg chg="add mod">
+          <ac:chgData name="Nassery, Wanisa" userId="eb577ee2-3895-4f93-9de0-b07a06e375bf" providerId="ADAL" clId="{0563F7C6-264B-407D-9CB8-9601D089DAD8}" dt="2026-03-05T08:47:44.728" v="1458" actId="20577"/>
+          <ac:spMkLst>
+            <pc:docMk/>
+            <pc:sldMk cId="3371027184" sldId="266"/>
+            <ac:spMk id="2" creationId="{520CE756-32A4-008F-9951-78308E0D4EAB}"/>
+          </ac:spMkLst>
+        </pc:spChg>
+        <pc:spChg chg="mod">
+          <ac:chgData name="Nassery, Wanisa" userId="eb577ee2-3895-4f93-9de0-b07a06e375bf" providerId="ADAL" clId="{0563F7C6-264B-407D-9CB8-9601D089DAD8}" dt="2026-03-05T08:46:47.858" v="1443" actId="1076"/>
+          <ac:spMkLst>
+            <pc:docMk/>
+            <pc:sldMk cId="3371027184" sldId="266"/>
+            <ac:spMk id="4" creationId="{6DC4CE76-F451-C485-ACF1-1EE7E26C383C}"/>
+          </ac:spMkLst>
+        </pc:spChg>
+        <pc:spChg chg="del">
+          <ac:chgData name="Nassery, Wanisa" userId="eb577ee2-3895-4f93-9de0-b07a06e375bf" providerId="ADAL" clId="{0563F7C6-264B-407D-9CB8-9601D089DAD8}" dt="2026-03-05T08:46:44.559" v="1442" actId="21"/>
+          <ac:spMkLst>
+            <pc:docMk/>
+            <pc:sldMk cId="3371027184" sldId="266"/>
+            <ac:spMk id="6" creationId="{5E23AC5B-885C-5F0C-0DB7-D10DBD686F97}"/>
+          </ac:spMkLst>
+        </pc:spChg>
+        <pc:spChg chg="del">
+          <ac:chgData name="Nassery, Wanisa" userId="eb577ee2-3895-4f93-9de0-b07a06e375bf" providerId="ADAL" clId="{0563F7C6-264B-407D-9CB8-9601D089DAD8}" dt="2026-03-05T08:46:42.784" v="1441" actId="21"/>
+          <ac:spMkLst>
+            <pc:docMk/>
+            <pc:sldMk cId="3371027184" sldId="266"/>
+            <ac:spMk id="7" creationId="{F7F2B078-B556-74D3-533F-28CC86C557EC}"/>
           </ac:spMkLst>
         </pc:spChg>
       </pc:sldChg>
@@ -813,7 +725,7 @@
           <a:p>
             <a:fld id="{FEFDAE92-5C12-4E8A-B55C-FE9B6EE6BA09}" type="datetimeFigureOut">
               <a:rPr lang="de-DE" smtClean="0"/>
-              <a:t>04.03.2026</a:t>
+              <a:t>05.03.2026</a:t>
             </a:fld>
             <a:endParaRPr lang="de-DE"/>
           </a:p>
@@ -1647,6 +1559,133 @@
 </p:notes>
 </file>
 
+<file path=ppt/notesSlides/notesSlide6.xml><?xml version="1.0" encoding="utf-8"?>
+<p:notes xmlns:a="http://schemas.openxmlformats.org/drawingml/2006/main" xmlns:r="http://schemas.openxmlformats.org/officeDocument/2006/relationships" xmlns:p="http://schemas.openxmlformats.org/presentationml/2006/main" showMasterSp="0" showMasterPhAnim="0">
+  <p:cSld>
+    <p:spTree>
+      <p:nvGrpSpPr>
+        <p:cNvPr id="1" name="Shape 423">
+          <a:extLst>
+            <a:ext uri="{FF2B5EF4-FFF2-40B4-BE49-F238E27FC236}">
+              <a16:creationId xmlns:a16="http://schemas.microsoft.com/office/drawing/2014/main" id="{8BE28D27-7ACF-D03B-02D6-D05BAE4657D4}"/>
+            </a:ext>
+          </a:extLst>
+        </p:cNvPr>
+        <p:cNvGrpSpPr/>
+        <p:nvPr/>
+      </p:nvGrpSpPr>
+      <p:grpSpPr>
+        <a:xfrm>
+          <a:off x="0" y="0"/>
+          <a:ext cx="0" cy="0"/>
+          <a:chOff x="0" y="0"/>
+          <a:chExt cx="0" cy="0"/>
+        </a:xfrm>
+      </p:grpSpPr>
+      <p:sp>
+        <p:nvSpPr>
+          <p:cNvPr id="424" name="Google Shape;424;g703d6efd59_0_25:notes">
+            <a:extLst>
+              <a:ext uri="{FF2B5EF4-FFF2-40B4-BE49-F238E27FC236}">
+                <a16:creationId xmlns:a16="http://schemas.microsoft.com/office/drawing/2014/main" id="{7CCD274E-E47E-C529-151E-0E51EBC3BCC1}"/>
+              </a:ext>
+            </a:extLst>
+          </p:cNvPr>
+          <p:cNvSpPr>
+            <a:spLocks noGrp="1" noRot="1" noChangeAspect="1"/>
+          </p:cNvSpPr>
+          <p:nvPr>
+            <p:ph type="sldImg" idx="2"/>
+          </p:nvPr>
+        </p:nvSpPr>
+        <p:spPr>
+          <a:xfrm>
+            <a:off x="381000" y="685800"/>
+            <a:ext cx="6096000" cy="3429000"/>
+          </a:xfrm>
+          <a:custGeom>
+            <a:avLst/>
+            <a:gdLst/>
+            <a:ahLst/>
+            <a:cxnLst/>
+            <a:rect l="l" t="t" r="r" b="b"/>
+            <a:pathLst>
+              <a:path w="120000" h="120000" extrusionOk="0">
+                <a:moveTo>
+                  <a:pt x="0" y="0"/>
+                </a:moveTo>
+                <a:lnTo>
+                  <a:pt x="120000" y="0"/>
+                </a:lnTo>
+                <a:lnTo>
+                  <a:pt x="120000" y="120000"/>
+                </a:lnTo>
+                <a:lnTo>
+                  <a:pt x="0" y="120000"/>
+                </a:lnTo>
+                <a:close/>
+              </a:path>
+            </a:pathLst>
+          </a:custGeom>
+        </p:spPr>
+      </p:sp>
+      <p:sp>
+        <p:nvSpPr>
+          <p:cNvPr id="425" name="Google Shape;425;g703d6efd59_0_25:notes">
+            <a:extLst>
+              <a:ext uri="{FF2B5EF4-FFF2-40B4-BE49-F238E27FC236}">
+                <a16:creationId xmlns:a16="http://schemas.microsoft.com/office/drawing/2014/main" id="{C9C93855-67F2-9A6C-96B3-1944FDEE6D14}"/>
+              </a:ext>
+            </a:extLst>
+          </p:cNvPr>
+          <p:cNvSpPr txBox="1">
+            <a:spLocks noGrp="1"/>
+          </p:cNvSpPr>
+          <p:nvPr>
+            <p:ph type="body" idx="1"/>
+          </p:nvPr>
+        </p:nvSpPr>
+        <p:spPr>
+          <a:xfrm>
+            <a:off x="685800" y="4343400"/>
+            <a:ext cx="5486400" cy="4114800"/>
+          </a:xfrm>
+          <a:prstGeom prst="rect">
+            <a:avLst/>
+          </a:prstGeom>
+        </p:spPr>
+        <p:txBody>
+          <a:bodyPr spcFirstLastPara="1" wrap="square" lIns="91425" tIns="91425" rIns="91425" bIns="91425" anchor="t" anchorCtr="0">
+            <a:noAutofit/>
+          </a:bodyPr>
+          <a:lstStyle/>
+          <a:p>
+            <a:pPr marL="0" lvl="0" indent="0" algn="l" rtl="0">
+              <a:spcBef>
+                <a:spcPts val="0"/>
+              </a:spcBef>
+              <a:spcAft>
+                <a:spcPts val="0"/>
+              </a:spcAft>
+              <a:buNone/>
+            </a:pPr>
+            <a:endParaRPr/>
+          </a:p>
+        </p:txBody>
+      </p:sp>
+    </p:spTree>
+    <p:extLst>
+      <p:ext uri="{BB962C8B-B14F-4D97-AF65-F5344CB8AC3E}">
+        <p14:creationId xmlns:p14="http://schemas.microsoft.com/office/powerpoint/2010/main" val="349737266"/>
+      </p:ext>
+    </p:extLst>
+  </p:cSld>
+  <p:clrMapOvr>
+    <a:masterClrMapping/>
+  </p:clrMapOvr>
+</p:notes>
+</file>
+
 <file path=ppt/slideLayouts/slideLayout1.xml><?xml version="1.0" encoding="utf-8"?>
 <p:sldLayout xmlns:a="http://schemas.openxmlformats.org/drawingml/2006/main" xmlns:r="http://schemas.openxmlformats.org/officeDocument/2006/relationships" xmlns:p="http://schemas.openxmlformats.org/presentationml/2006/main" type="title" preserve="1">
   <p:cSld name="Title Slide">
@@ -1796,7 +1835,7 @@
           <a:p>
             <a:fld id="{9D77692B-027E-4498-B3B3-73749BE6E1E0}" type="datetimeFigureOut">
               <a:rPr lang="de-DE" smtClean="0"/>
-              <a:t>04.03.2026</a:t>
+              <a:t>05.03.2026</a:t>
             </a:fld>
             <a:endParaRPr lang="de-DE"/>
           </a:p>
@@ -1996,7 +2035,7 @@
           <a:p>
             <a:fld id="{9D77692B-027E-4498-B3B3-73749BE6E1E0}" type="datetimeFigureOut">
               <a:rPr lang="de-DE" smtClean="0"/>
-              <a:t>04.03.2026</a:t>
+              <a:t>05.03.2026</a:t>
             </a:fld>
             <a:endParaRPr lang="de-DE"/>
           </a:p>
@@ -2206,7 +2245,7 @@
           <a:p>
             <a:fld id="{9D77692B-027E-4498-B3B3-73749BE6E1E0}" type="datetimeFigureOut">
               <a:rPr lang="de-DE" smtClean="0"/>
-              <a:t>04.03.2026</a:t>
+              <a:t>05.03.2026</a:t>
             </a:fld>
             <a:endParaRPr lang="de-DE"/>
           </a:p>
@@ -2622,6 +2661,13 @@
             </a:outerShdw>
           </a:effectLst>
         </p:spPr>
+        <p:txBody>
+          <a:bodyPr/>
+          <a:lstStyle/>
+          <a:p>
+            <a:endParaRPr lang="de-DE"/>
+          </a:p>
+        </p:txBody>
       </p:sp>
     </p:spTree>
     <p:extLst>
@@ -5768,7 +5814,7 @@
           <a:p>
             <a:fld id="{9D77692B-027E-4498-B3B3-73749BE6E1E0}" type="datetimeFigureOut">
               <a:rPr lang="de-DE" smtClean="0"/>
-              <a:t>04.03.2026</a:t>
+              <a:t>05.03.2026</a:t>
             </a:fld>
             <a:endParaRPr lang="de-DE"/>
           </a:p>
@@ -14528,7 +14574,7 @@
           <a:p>
             <a:fld id="{9D77692B-027E-4498-B3B3-73749BE6E1E0}" type="datetimeFigureOut">
               <a:rPr lang="de-DE" smtClean="0"/>
-              <a:t>04.03.2026</a:t>
+              <a:t>05.03.2026</a:t>
             </a:fld>
             <a:endParaRPr lang="de-DE"/>
           </a:p>
@@ -23211,7 +23257,7 @@
           <a:p>
             <a:fld id="{9D77692B-027E-4498-B3B3-73749BE6E1E0}" type="datetimeFigureOut">
               <a:rPr lang="de-DE" smtClean="0"/>
-              <a:t>04.03.2026</a:t>
+              <a:t>05.03.2026</a:t>
             </a:fld>
             <a:endParaRPr lang="de-DE"/>
           </a:p>
@@ -35543,7 +35589,7 @@
           <a:p>
             <a:fld id="{9D77692B-027E-4498-B3B3-73749BE6E1E0}" type="datetimeFigureOut">
               <a:rPr lang="de-DE" smtClean="0"/>
-              <a:t>04.03.2026</a:t>
+              <a:t>05.03.2026</a:t>
             </a:fld>
             <a:endParaRPr lang="de-DE"/>
           </a:p>
@@ -40694,7 +40740,7 @@
           <a:p>
             <a:fld id="{9D77692B-027E-4498-B3B3-73749BE6E1E0}" type="datetimeFigureOut">
               <a:rPr lang="de-DE" smtClean="0"/>
-              <a:t>04.03.2026</a:t>
+              <a:t>05.03.2026</a:t>
             </a:fld>
             <a:endParaRPr lang="de-DE"/>
           </a:p>
@@ -44113,7 +44159,7 @@
           <a:p>
             <a:fld id="{9D77692B-027E-4498-B3B3-73749BE6E1E0}" type="datetimeFigureOut">
               <a:rPr lang="de-DE" smtClean="0"/>
-              <a:t>04.03.2026</a:t>
+              <a:t>05.03.2026</a:t>
             </a:fld>
             <a:endParaRPr lang="de-DE"/>
           </a:p>
@@ -44426,7 +44472,7 @@
           <a:p>
             <a:fld id="{9D77692B-027E-4498-B3B3-73749BE6E1E0}" type="datetimeFigureOut">
               <a:rPr lang="de-DE" smtClean="0"/>
-              <a:t>04.03.2026</a:t>
+              <a:t>05.03.2026</a:t>
             </a:fld>
             <a:endParaRPr lang="de-DE"/>
           </a:p>
@@ -44715,7 +44761,7 @@
           <a:p>
             <a:fld id="{9D77692B-027E-4498-B3B3-73749BE6E1E0}" type="datetimeFigureOut">
               <a:rPr lang="de-DE" smtClean="0"/>
-              <a:t>04.03.2026</a:t>
+              <a:t>05.03.2026</a:t>
             </a:fld>
             <a:endParaRPr lang="de-DE"/>
           </a:p>
@@ -44958,7 +45004,7 @@
           <a:p>
             <a:fld id="{9D77692B-027E-4498-B3B3-73749BE6E1E0}" type="datetimeFigureOut">
               <a:rPr lang="de-DE" smtClean="0"/>
-              <a:t>04.03.2026</a:t>
+              <a:t>05.03.2026</a:t>
             </a:fld>
             <a:endParaRPr lang="de-DE"/>
           </a:p>
@@ -46773,48 +46819,6 @@
       </p:grpSpPr>
       <p:sp>
         <p:nvSpPr>
-          <p:cNvPr id="8" name="Title 1">
-            <a:extLst>
-              <a:ext uri="{FF2B5EF4-FFF2-40B4-BE49-F238E27FC236}">
-                <a16:creationId xmlns:a16="http://schemas.microsoft.com/office/drawing/2014/main" id="{17140089-9E3F-2565-E6EA-4632BE839F95}"/>
-              </a:ext>
-            </a:extLst>
-          </p:cNvPr>
-          <p:cNvSpPr>
-            <a:spLocks noGrp="1"/>
-          </p:cNvSpPr>
-          <p:nvPr>
-            <p:ph type="title"/>
-          </p:nvPr>
-        </p:nvSpPr>
-        <p:spPr>
-          <a:xfrm>
-            <a:off x="-1701800" y="101089"/>
-            <a:ext cx="11580654" cy="1507067"/>
-          </a:xfrm>
-        </p:spPr>
-        <p:txBody>
-          <a:bodyPr>
-            <a:normAutofit/>
-          </a:bodyPr>
-          <a:lstStyle/>
-          <a:p>
-            <a:r>
-              <a:rPr lang="de-DE" dirty="0"/>
-              <a:t>Transition basics    </a:t>
-            </a:r>
-            <a:br>
-              <a:rPr lang="de-DE" dirty="0"/>
-            </a:br>
-            <a:r>
-              <a:rPr lang="de-DE" dirty="0"/>
-              <a:t>                                                                                            &amp;     Timing Functions</a:t>
-            </a:r>
-          </a:p>
-        </p:txBody>
-      </p:sp>
-      <p:sp>
-        <p:nvSpPr>
           <p:cNvPr id="9" name="TextBox 8">
             <a:extLst>
               <a:ext uri="{FF2B5EF4-FFF2-40B4-BE49-F238E27FC236}">
@@ -46859,8 +46863,8 @@
         </p:nvSpPr>
         <p:spPr>
           <a:xfrm>
-            <a:off x="176054" y="1389888"/>
-            <a:ext cx="5831554" cy="2799869"/>
+            <a:off x="80773" y="1064502"/>
+            <a:ext cx="5831554" cy="1902187"/>
           </a:xfrm>
           <a:prstGeom prst="rect">
             <a:avLst/>
@@ -46879,27 +46883,6 @@
               </a:lnSpc>
               <a:buNone/>
             </a:pPr>
-            <a:r>
-              <a:rPr lang="en-US" sz="2000" b="0" dirty="0">
-                <a:solidFill>
-                  <a:schemeClr val="tx1">
-                    <a:lumMod val="95000"/>
-                    <a:lumOff val="5000"/>
-                  </a:schemeClr>
-                </a:solidFill>
-                <a:effectLst/>
-                <a:latin typeface="Consolas" panose="020B0609020204030204" pitchFamily="49" charset="0"/>
-              </a:rPr>
-              <a:t>/*Define the transition on the base state */</a:t>
-            </a:r>
-          </a:p>
-          <a:p>
-            <a:pPr>
-              <a:lnSpc>
-                <a:spcPts val="1425"/>
-              </a:lnSpc>
-              <a:buNone/>
-            </a:pPr>
             <a:endParaRPr lang="en-US" sz="2000" b="0" dirty="0">
               <a:solidFill>
                 <a:srgbClr val="1F2328"/>
@@ -47136,42 +47119,6 @@
                 <a:latin typeface="Consolas" panose="020B0609020204030204" pitchFamily="49" charset="0"/>
               </a:rPr>
             </a:br>
-            <a:endParaRPr lang="en-US" sz="2000" b="0" dirty="0">
-              <a:solidFill>
-                <a:srgbClr val="1F2328"/>
-              </a:solidFill>
-              <a:effectLst/>
-              <a:latin typeface="Consolas" panose="020B0609020204030204" pitchFamily="49" charset="0"/>
-            </a:endParaRPr>
-          </a:p>
-          <a:p>
-            <a:pPr>
-              <a:lnSpc>
-                <a:spcPts val="1425"/>
-              </a:lnSpc>
-              <a:buNone/>
-            </a:pPr>
-            <a:r>
-              <a:rPr lang="en-US" sz="2000" b="0" dirty="0">
-                <a:solidFill>
-                  <a:schemeClr val="tx1">
-                    <a:lumMod val="95000"/>
-                    <a:lumOff val="5000"/>
-                  </a:schemeClr>
-                </a:solidFill>
-                <a:effectLst/>
-                <a:latin typeface="Consolas" panose="020B0609020204030204" pitchFamily="49" charset="0"/>
-              </a:rPr>
-              <a:t>/*Change the property value on state change */</a:t>
-            </a:r>
-          </a:p>
-          <a:p>
-            <a:pPr>
-              <a:lnSpc>
-                <a:spcPts val="1425"/>
-              </a:lnSpc>
-              <a:buNone/>
-            </a:pPr>
             <a:endParaRPr lang="en-US" sz="2000" b="0" dirty="0">
               <a:solidFill>
                 <a:srgbClr val="1F2328"/>
@@ -47310,7 +47257,7 @@
         </p:nvSpPr>
         <p:spPr>
           <a:xfrm>
-            <a:off x="6096000" y="1946754"/>
+            <a:off x="6279674" y="1725428"/>
             <a:ext cx="6094476" cy="4056623"/>
           </a:xfrm>
           <a:prstGeom prst="rect">
@@ -47962,7 +47909,7 @@
         </p:nvSpPr>
         <p:spPr>
           <a:xfrm>
-            <a:off x="284988" y="4377291"/>
+            <a:off x="176054" y="3292075"/>
             <a:ext cx="6103620" cy="923330"/>
           </a:xfrm>
           <a:prstGeom prst="rect">
@@ -47986,6 +47933,111 @@
             <a:r>
               <a:rPr lang="de-DE" dirty="0"/>
               <a:t>Animation startet bei Änderung (z. B. Hover) und nicht automatisch.</a:t>
+            </a:r>
+          </a:p>
+        </p:txBody>
+      </p:sp>
+      <p:sp>
+        <p:nvSpPr>
+          <p:cNvPr id="4" name="TextBox 3">
+            <a:extLst>
+              <a:ext uri="{FF2B5EF4-FFF2-40B4-BE49-F238E27FC236}">
+                <a16:creationId xmlns:a16="http://schemas.microsoft.com/office/drawing/2014/main" id="{653A7C3D-9C14-7FE7-051E-E2249B704918}"/>
+              </a:ext>
+            </a:extLst>
+          </p:cNvPr>
+          <p:cNvSpPr txBox="1"/>
+          <p:nvPr/>
+        </p:nvSpPr>
+        <p:spPr>
+          <a:xfrm>
+            <a:off x="384048" y="356616"/>
+            <a:ext cx="4608576" cy="707886"/>
+          </a:xfrm>
+          <a:prstGeom prst="rect">
+            <a:avLst/>
+          </a:prstGeom>
+          <a:noFill/>
+        </p:spPr>
+        <p:txBody>
+          <a:bodyPr wrap="square" rtlCol="0">
+            <a:spAutoFit/>
+          </a:bodyPr>
+          <a:lstStyle/>
+          <a:p>
+            <a:r>
+              <a:rPr lang="de-DE" sz="4000" b="1" dirty="0"/>
+              <a:t>Transitions</a:t>
+            </a:r>
+          </a:p>
+        </p:txBody>
+      </p:sp>
+      <p:sp>
+        <p:nvSpPr>
+          <p:cNvPr id="5" name="TextBox 4">
+            <a:extLst>
+              <a:ext uri="{FF2B5EF4-FFF2-40B4-BE49-F238E27FC236}">
+                <a16:creationId xmlns:a16="http://schemas.microsoft.com/office/drawing/2014/main" id="{9C5BCA58-AB2F-8F73-B804-7B2EDFDB9E65}"/>
+              </a:ext>
+            </a:extLst>
+          </p:cNvPr>
+          <p:cNvSpPr txBox="1"/>
+          <p:nvPr/>
+        </p:nvSpPr>
+        <p:spPr>
+          <a:xfrm>
+            <a:off x="7031736" y="854623"/>
+            <a:ext cx="5650992" cy="646331"/>
+          </a:xfrm>
+          <a:prstGeom prst="rect">
+            <a:avLst/>
+          </a:prstGeom>
+          <a:noFill/>
+        </p:spPr>
+        <p:txBody>
+          <a:bodyPr wrap="square" rtlCol="0">
+            <a:spAutoFit/>
+          </a:bodyPr>
+          <a:lstStyle/>
+          <a:p>
+            <a:r>
+              <a:rPr lang="de-DE" sz="3600" b="1" dirty="0"/>
+              <a:t>Timing Functions</a:t>
+            </a:r>
+          </a:p>
+        </p:txBody>
+      </p:sp>
+      <p:sp>
+        <p:nvSpPr>
+          <p:cNvPr id="6" name="TextBox 5">
+            <a:extLst>
+              <a:ext uri="{FF2B5EF4-FFF2-40B4-BE49-F238E27FC236}">
+                <a16:creationId xmlns:a16="http://schemas.microsoft.com/office/drawing/2014/main" id="{003E8A07-805A-A8F6-F527-3158DD7BF1A8}"/>
+              </a:ext>
+            </a:extLst>
+          </p:cNvPr>
+          <p:cNvSpPr txBox="1"/>
+          <p:nvPr/>
+        </p:nvSpPr>
+        <p:spPr>
+          <a:xfrm>
+            <a:off x="11878056" y="6506956"/>
+            <a:ext cx="1307592" cy="369332"/>
+          </a:xfrm>
+          <a:prstGeom prst="rect">
+            <a:avLst/>
+          </a:prstGeom>
+          <a:noFill/>
+        </p:spPr>
+        <p:txBody>
+          <a:bodyPr wrap="square" rtlCol="0">
+            <a:spAutoFit/>
+          </a:bodyPr>
+          <a:lstStyle/>
+          <a:p>
+            <a:r>
+              <a:rPr lang="de-DE" dirty="0"/>
+              <a:t>1</a:t>
             </a:r>
           </a:p>
         </p:txBody>
@@ -48042,7 +48094,7 @@
           <a:lstStyle/>
           <a:p>
             <a:r>
-              <a:rPr lang="de-DE" dirty="0"/>
+              <a:rPr lang="de-DE" b="1" dirty="0"/>
               <a:t>Keyframes</a:t>
             </a:r>
           </a:p>
@@ -48062,7 +48114,7 @@
         </p:nvSpPr>
         <p:spPr>
           <a:xfrm>
-            <a:off x="614172" y="2831540"/>
+            <a:off x="823722" y="3429000"/>
             <a:ext cx="6094476" cy="824969"/>
           </a:xfrm>
           <a:prstGeom prst="rect">
@@ -48306,53 +48358,6 @@
               </a:rPr>
               <a:t>}</a:t>
             </a:r>
-          </a:p>
-        </p:txBody>
-      </p:sp>
-      <p:sp>
-        <p:nvSpPr>
-          <p:cNvPr id="8" name="TextBox 7">
-            <a:extLst>
-              <a:ext uri="{FF2B5EF4-FFF2-40B4-BE49-F238E27FC236}">
-                <a16:creationId xmlns:a16="http://schemas.microsoft.com/office/drawing/2014/main" id="{2CD8AD9D-F633-F92D-4CB5-78067BC54D61}"/>
-              </a:ext>
-            </a:extLst>
-          </p:cNvPr>
-          <p:cNvSpPr txBox="1"/>
-          <p:nvPr/>
-        </p:nvSpPr>
-        <p:spPr>
-          <a:xfrm>
-            <a:off x="614172" y="1988682"/>
-            <a:ext cx="3596640" cy="1261884"/>
-          </a:xfrm>
-          <a:prstGeom prst="rect">
-            <a:avLst/>
-          </a:prstGeom>
-          <a:noFill/>
-        </p:spPr>
-        <p:txBody>
-          <a:bodyPr wrap="square" rtlCol="0">
-            <a:spAutoFit/>
-          </a:bodyPr>
-          <a:lstStyle/>
-          <a:p>
-            <a:r>
-              <a:rPr lang="en-US" sz="2000" dirty="0"/>
-              <a:t>From A starting offset of 0%.</a:t>
-            </a:r>
-          </a:p>
-          <a:p>
-            <a:r>
-              <a:rPr lang="en-US" sz="2000" dirty="0"/>
-              <a:t>To An ending offset of 100%.</a:t>
-            </a:r>
-          </a:p>
-          <a:p>
-            <a:endParaRPr lang="en-US" dirty="0"/>
-          </a:p>
-          <a:p>
-            <a:endParaRPr lang="de-DE" dirty="0"/>
           </a:p>
         </p:txBody>
       </p:sp>
@@ -48370,7 +48375,7 @@
         </p:nvSpPr>
         <p:spPr>
           <a:xfrm>
-            <a:off x="5814060" y="4352861"/>
+            <a:off x="6166485" y="3293039"/>
             <a:ext cx="6094476" cy="1363578"/>
           </a:xfrm>
           <a:prstGeom prst="rect">
@@ -48985,8 +48990,8 @@
         </p:nvSpPr>
         <p:spPr>
           <a:xfrm>
-            <a:off x="6096000" y="1973293"/>
-            <a:ext cx="6176772" cy="646331"/>
+            <a:off x="1017651" y="1139118"/>
+            <a:ext cx="6176772" cy="830997"/>
           </a:xfrm>
           <a:prstGeom prst="rect">
             <a:avLst/>
@@ -49000,15 +49005,50 @@
           <a:lstStyle/>
           <a:p>
             <a:r>
-              <a:rPr lang="de-DE" b="1" dirty="0"/>
+              <a:rPr lang="de-DE" sz="2400" b="1" dirty="0"/>
               <a:t>Bewegung selbst definieren.</a:t>
             </a:r>
             <a:br>
-              <a:rPr lang="de-DE" dirty="0"/>
+              <a:rPr lang="de-DE" sz="2400" dirty="0"/>
             </a:br>
             <a:r>
+              <a:rPr lang="de-DE" sz="2400" dirty="0"/>
+              <a:t>Mehrere Schritte von Start bis Ende möglich.</a:t>
+            </a:r>
+          </a:p>
+        </p:txBody>
+      </p:sp>
+      <p:sp>
+        <p:nvSpPr>
+          <p:cNvPr id="2" name="TextBox 1">
+            <a:extLst>
+              <a:ext uri="{FF2B5EF4-FFF2-40B4-BE49-F238E27FC236}">
+                <a16:creationId xmlns:a16="http://schemas.microsoft.com/office/drawing/2014/main" id="{2CD55DBD-4758-08AE-B9D6-CEAC81854039}"/>
+              </a:ext>
+            </a:extLst>
+          </p:cNvPr>
+          <p:cNvSpPr txBox="1"/>
+          <p:nvPr/>
+        </p:nvSpPr>
+        <p:spPr>
+          <a:xfrm>
+            <a:off x="11878056" y="6506956"/>
+            <a:ext cx="1307592" cy="369332"/>
+          </a:xfrm>
+          <a:prstGeom prst="rect">
+            <a:avLst/>
+          </a:prstGeom>
+          <a:noFill/>
+        </p:spPr>
+        <p:txBody>
+          <a:bodyPr wrap="square" rtlCol="0">
+            <a:spAutoFit/>
+          </a:bodyPr>
+          <a:lstStyle/>
+          <a:p>
+            <a:r>
               <a:rPr lang="de-DE" dirty="0"/>
-              <a:t>Mehrere Schritte von Start bis Ende möglich.</a:t>
+              <a:t>2</a:t>
             </a:r>
           </a:p>
         </p:txBody>
@@ -49071,7 +49111,7 @@
           <a:lstStyle/>
           <a:p>
             <a:r>
-              <a:rPr lang="de-DE" dirty="0"/>
+              <a:rPr lang="de-DE" b="1" dirty="0"/>
               <a:t>Animated Elements</a:t>
             </a:r>
           </a:p>
@@ -49091,8 +49131,8 @@
         </p:nvSpPr>
         <p:spPr>
           <a:xfrm>
-            <a:off x="3458972" y="2431871"/>
-            <a:ext cx="4215384" cy="1261884"/>
+            <a:off x="3276346" y="2578792"/>
+            <a:ext cx="5639308" cy="1384995"/>
           </a:xfrm>
           <a:prstGeom prst="rect">
             <a:avLst/>
@@ -49106,14 +49146,14 @@
           <a:lstStyle/>
           <a:p>
             <a:r>
-              <a:rPr lang="de-DE" sz="2000" dirty="0"/>
+              <a:rPr lang="de-DE" sz="2400" dirty="0"/>
               <a:t>@keyframes → beschreibt Bewegung</a:t>
             </a:r>
           </a:p>
           <a:p>
             <a:r>
-              <a:rPr lang="de-DE" sz="2000" dirty="0"/>
-              <a:t>animation → startet Bewegung</a:t>
+              <a:rPr lang="de-DE" sz="2400" dirty="0"/>
+              <a:t>animation: → startet Bewegung</a:t>
             </a:r>
           </a:p>
           <a:p>
@@ -49138,8 +49178,8 @@
         </p:nvSpPr>
         <p:spPr>
           <a:xfrm>
-            <a:off x="3458972" y="3632200"/>
-            <a:ext cx="6758938" cy="1722651"/>
+            <a:off x="3276346" y="3934349"/>
+            <a:ext cx="7541260" cy="1543115"/>
           </a:xfrm>
           <a:prstGeom prst="rect">
             <a:avLst/>
@@ -49612,8 +49652,8 @@
         </p:nvSpPr>
         <p:spPr>
           <a:xfrm>
-            <a:off x="3159506" y="1586383"/>
-            <a:ext cx="6094476" cy="646331"/>
+            <a:off x="5472938" y="582434"/>
+            <a:ext cx="6094476" cy="1569660"/>
           </a:xfrm>
           <a:prstGeom prst="rect">
             <a:avLst/>
@@ -49627,15 +49667,50 @@
           <a:lstStyle/>
           <a:p>
             <a:r>
-              <a:rPr lang="de-DE" b="1" dirty="0"/>
+              <a:rPr lang="de-DE" sz="2400" b="1" dirty="0"/>
               <a:t>Animationen zur Verbesserung der User Experience.</a:t>
             </a:r>
             <a:br>
-              <a:rPr lang="de-DE" dirty="0"/>
+              <a:rPr lang="de-DE" sz="2400" dirty="0"/>
             </a:br>
             <a:r>
+              <a:rPr lang="de-DE" sz="2400" dirty="0"/>
+              <a:t>Feedback, Statusanzeige, sanftes Einblenden.</a:t>
+            </a:r>
+          </a:p>
+        </p:txBody>
+      </p:sp>
+      <p:sp>
+        <p:nvSpPr>
+          <p:cNvPr id="2" name="TextBox 1">
+            <a:extLst>
+              <a:ext uri="{FF2B5EF4-FFF2-40B4-BE49-F238E27FC236}">
+                <a16:creationId xmlns:a16="http://schemas.microsoft.com/office/drawing/2014/main" id="{105AFAF5-7A33-A7AC-05DC-550716FBBF8D}"/>
+              </a:ext>
+            </a:extLst>
+          </p:cNvPr>
+          <p:cNvSpPr txBox="1"/>
+          <p:nvPr/>
+        </p:nvSpPr>
+        <p:spPr>
+          <a:xfrm>
+            <a:off x="11878056" y="6506956"/>
+            <a:ext cx="1307592" cy="369332"/>
+          </a:xfrm>
+          <a:prstGeom prst="rect">
+            <a:avLst/>
+          </a:prstGeom>
+          <a:noFill/>
+        </p:spPr>
+        <p:txBody>
+          <a:bodyPr wrap="square" rtlCol="0">
+            <a:spAutoFit/>
+          </a:bodyPr>
+          <a:lstStyle/>
+          <a:p>
+            <a:r>
               <a:rPr lang="de-DE" dirty="0"/>
-              <a:t>Feedback, Statusanzeige, sanftes Einblenden.</a:t>
+              <a:t>3</a:t>
             </a:r>
           </a:p>
         </p:txBody>
@@ -49816,7 +49891,7 @@
           </a:lstStyle>
           <a:p>
             <a:r>
-              <a:rPr lang="de-DE" dirty="0"/>
+              <a:rPr lang="de-DE" b="1" dirty="0"/>
               <a:t>Complex Animations</a:t>
             </a:r>
           </a:p>
@@ -50947,8 +51022,8 @@
         </p:nvSpPr>
         <p:spPr>
           <a:xfrm>
-            <a:off x="2088261" y="1690688"/>
-            <a:ext cx="5900039" cy="923330"/>
+            <a:off x="2088261" y="1526096"/>
+            <a:ext cx="5900039" cy="1200329"/>
           </a:xfrm>
           <a:prstGeom prst="rect">
             <a:avLst/>
@@ -50962,15 +51037,50 @@
           <a:lstStyle/>
           <a:p>
             <a:r>
-              <a:rPr lang="de-DE" b="1" dirty="0"/>
+              <a:rPr lang="de-DE" sz="2400" b="1" dirty="0"/>
               <a:t>Mehrstufige Abläufe und Kombinationen.</a:t>
             </a:r>
             <a:br>
-              <a:rPr lang="de-DE" dirty="0"/>
+              <a:rPr lang="de-DE" sz="2400" dirty="0"/>
             </a:br>
             <a:r>
+              <a:rPr lang="de-DE" sz="2400" dirty="0"/>
+              <a:t>Richtung, Fill-Mode, mehrere Animationen / Verkettungen gleichzeitig.</a:t>
+            </a:r>
+          </a:p>
+        </p:txBody>
+      </p:sp>
+      <p:sp>
+        <p:nvSpPr>
+          <p:cNvPr id="2" name="TextBox 1">
+            <a:extLst>
+              <a:ext uri="{FF2B5EF4-FFF2-40B4-BE49-F238E27FC236}">
+                <a16:creationId xmlns:a16="http://schemas.microsoft.com/office/drawing/2014/main" id="{11F0C13B-3AE9-CB48-36DD-A95A6684D3E8}"/>
+              </a:ext>
+            </a:extLst>
+          </p:cNvPr>
+          <p:cNvSpPr txBox="1"/>
+          <p:nvPr/>
+        </p:nvSpPr>
+        <p:spPr>
+          <a:xfrm>
+            <a:off x="11878056" y="6506956"/>
+            <a:ext cx="1307592" cy="369332"/>
+          </a:xfrm>
+          <a:prstGeom prst="rect">
+            <a:avLst/>
+          </a:prstGeom>
+          <a:noFill/>
+        </p:spPr>
+        <p:txBody>
+          <a:bodyPr wrap="square" rtlCol="0">
+            <a:spAutoFit/>
+          </a:bodyPr>
+          <a:lstStyle/>
+          <a:p>
+            <a:r>
               <a:rPr lang="de-DE" dirty="0"/>
-              <a:t>Richtung, Fill-Mode, mehrere Animationen / Verkettungen gleichzeitig.</a:t>
+              <a:t>4</a:t>
             </a:r>
           </a:p>
         </p:txBody>
@@ -50979,6 +51089,223 @@
     <p:extLst>
       <p:ext uri="{BB962C8B-B14F-4D97-AF65-F5344CB8AC3E}">
         <p14:creationId xmlns:p14="http://schemas.microsoft.com/office/powerpoint/2010/main" val="3714839329"/>
+      </p:ext>
+    </p:extLst>
+  </p:cSld>
+  <p:clrMapOvr>
+    <a:masterClrMapping/>
+  </p:clrMapOvr>
+</p:sld>
+</file>
+
+<file path=ppt/slides/slide6.xml><?xml version="1.0" encoding="utf-8"?>
+<p:sld xmlns:a="http://schemas.openxmlformats.org/drawingml/2006/main" xmlns:r="http://schemas.openxmlformats.org/officeDocument/2006/relationships" xmlns:p="http://schemas.openxmlformats.org/presentationml/2006/main">
+  <p:cSld>
+    <p:spTree>
+      <p:nvGrpSpPr>
+        <p:cNvPr id="1" name="Shape 426">
+          <a:extLst>
+            <a:ext uri="{FF2B5EF4-FFF2-40B4-BE49-F238E27FC236}">
+              <a16:creationId xmlns:a16="http://schemas.microsoft.com/office/drawing/2014/main" id="{94AA566A-0E50-98A0-1694-8C7046879669}"/>
+            </a:ext>
+          </a:extLst>
+        </p:cNvPr>
+        <p:cNvGrpSpPr/>
+        <p:nvPr/>
+      </p:nvGrpSpPr>
+      <p:grpSpPr>
+        <a:xfrm>
+          <a:off x="0" y="0"/>
+          <a:ext cx="0" cy="0"/>
+          <a:chOff x="0" y="0"/>
+          <a:chExt cx="0" cy="0"/>
+        </a:xfrm>
+      </p:grpSpPr>
+      <p:sp>
+        <p:nvSpPr>
+          <p:cNvPr id="4" name="Title 1">
+            <a:extLst>
+              <a:ext uri="{FF2B5EF4-FFF2-40B4-BE49-F238E27FC236}">
+                <a16:creationId xmlns:a16="http://schemas.microsoft.com/office/drawing/2014/main" id="{6DC4CE76-F451-C485-ACF1-1EE7E26C383C}"/>
+              </a:ext>
+            </a:extLst>
+          </p:cNvPr>
+          <p:cNvSpPr txBox="1">
+            <a:spLocks/>
+          </p:cNvSpPr>
+          <p:nvPr/>
+        </p:nvSpPr>
+        <p:spPr>
+          <a:xfrm>
+            <a:off x="-458724" y="279781"/>
+            <a:ext cx="4127500" cy="625475"/>
+          </a:xfrm>
+          <a:prstGeom prst="rect">
+            <a:avLst/>
+          </a:prstGeom>
+        </p:spPr>
+        <p:txBody>
+          <a:bodyPr spcFirstLastPara="1" vert="horz" wrap="square" lIns="91425" tIns="91425" rIns="91425" bIns="91425" rtlCol="0" anchor="b" anchorCtr="0">
+            <a:noAutofit/>
+          </a:bodyPr>
+          <a:lstStyle>
+            <a:lvl1pPr lvl="0" algn="ctr" defTabSz="914400" rtl="0" eaLnBrk="1" latinLnBrk="0" hangingPunct="1">
+              <a:lnSpc>
+                <a:spcPct val="90000"/>
+              </a:lnSpc>
+              <a:spcBef>
+                <a:spcPts val="0"/>
+              </a:spcBef>
+              <a:spcAft>
+                <a:spcPts val="0"/>
+              </a:spcAft>
+              <a:buSzPts val="2400"/>
+              <a:buNone/>
+              <a:defRPr sz="3200" kern="1200">
+                <a:solidFill>
+                  <a:schemeClr val="tx1"/>
+                </a:solidFill>
+                <a:latin typeface="+mj-lt"/>
+                <a:ea typeface="+mj-ea"/>
+                <a:cs typeface="+mj-cs"/>
+              </a:defRPr>
+            </a:lvl1pPr>
+            <a:lvl2pPr lvl="1" algn="ctr">
+              <a:spcBef>
+                <a:spcPts val="0"/>
+              </a:spcBef>
+              <a:spcAft>
+                <a:spcPts val="0"/>
+              </a:spcAft>
+              <a:buSzPts val="2400"/>
+              <a:buNone/>
+              <a:defRPr sz="3200"/>
+            </a:lvl2pPr>
+            <a:lvl3pPr lvl="2" algn="ctr">
+              <a:spcBef>
+                <a:spcPts val="0"/>
+              </a:spcBef>
+              <a:spcAft>
+                <a:spcPts val="0"/>
+              </a:spcAft>
+              <a:buSzPts val="2400"/>
+              <a:buNone/>
+              <a:defRPr sz="3200"/>
+            </a:lvl3pPr>
+            <a:lvl4pPr lvl="3" algn="ctr">
+              <a:spcBef>
+                <a:spcPts val="0"/>
+              </a:spcBef>
+              <a:spcAft>
+                <a:spcPts val="0"/>
+              </a:spcAft>
+              <a:buSzPts val="2400"/>
+              <a:buNone/>
+              <a:defRPr sz="3200"/>
+            </a:lvl4pPr>
+            <a:lvl5pPr lvl="4" algn="ctr">
+              <a:spcBef>
+                <a:spcPts val="0"/>
+              </a:spcBef>
+              <a:spcAft>
+                <a:spcPts val="0"/>
+              </a:spcAft>
+              <a:buSzPts val="2400"/>
+              <a:buNone/>
+              <a:defRPr sz="3200"/>
+            </a:lvl5pPr>
+            <a:lvl6pPr lvl="5" algn="ctr">
+              <a:spcBef>
+                <a:spcPts val="0"/>
+              </a:spcBef>
+              <a:spcAft>
+                <a:spcPts val="0"/>
+              </a:spcAft>
+              <a:buSzPts val="2400"/>
+              <a:buNone/>
+              <a:defRPr sz="3200"/>
+            </a:lvl6pPr>
+            <a:lvl7pPr lvl="6" algn="ctr">
+              <a:spcBef>
+                <a:spcPts val="0"/>
+              </a:spcBef>
+              <a:spcAft>
+                <a:spcPts val="0"/>
+              </a:spcAft>
+              <a:buSzPts val="2400"/>
+              <a:buNone/>
+              <a:defRPr sz="3200"/>
+            </a:lvl7pPr>
+            <a:lvl8pPr lvl="7" algn="ctr">
+              <a:spcBef>
+                <a:spcPts val="0"/>
+              </a:spcBef>
+              <a:spcAft>
+                <a:spcPts val="0"/>
+              </a:spcAft>
+              <a:buSzPts val="2400"/>
+              <a:buNone/>
+              <a:defRPr sz="3200"/>
+            </a:lvl8pPr>
+            <a:lvl9pPr lvl="8" algn="ctr">
+              <a:spcBef>
+                <a:spcPts val="0"/>
+              </a:spcBef>
+              <a:spcAft>
+                <a:spcPts val="0"/>
+              </a:spcAft>
+              <a:buSzPts val="2400"/>
+              <a:buNone/>
+              <a:defRPr sz="3200"/>
+            </a:lvl9pPr>
+          </a:lstStyle>
+          <a:p>
+            <a:r>
+              <a:rPr lang="de-DE" b="1" dirty="0"/>
+              <a:t>Quellen</a:t>
+            </a:r>
+          </a:p>
+        </p:txBody>
+      </p:sp>
+      <p:sp>
+        <p:nvSpPr>
+          <p:cNvPr id="2" name="TextBox 1">
+            <a:extLst>
+              <a:ext uri="{FF2B5EF4-FFF2-40B4-BE49-F238E27FC236}">
+                <a16:creationId xmlns:a16="http://schemas.microsoft.com/office/drawing/2014/main" id="{520CE756-32A4-008F-9951-78308E0D4EAB}"/>
+              </a:ext>
+            </a:extLst>
+          </p:cNvPr>
+          <p:cNvSpPr txBox="1"/>
+          <p:nvPr/>
+        </p:nvSpPr>
+        <p:spPr>
+          <a:xfrm>
+            <a:off x="11878056" y="6506956"/>
+            <a:ext cx="1307592" cy="369332"/>
+          </a:xfrm>
+          <a:prstGeom prst="rect">
+            <a:avLst/>
+          </a:prstGeom>
+          <a:noFill/>
+        </p:spPr>
+        <p:txBody>
+          <a:bodyPr wrap="square" rtlCol="0">
+            <a:spAutoFit/>
+          </a:bodyPr>
+          <a:lstStyle/>
+          <a:p>
+            <a:r>
+              <a:rPr lang="de-DE" dirty="0"/>
+              <a:t>5</a:t>
+            </a:r>
+          </a:p>
+        </p:txBody>
+      </p:sp>
+    </p:spTree>
+    <p:extLst>
+      <p:ext uri="{BB962C8B-B14F-4D97-AF65-F5344CB8AC3E}">
+        <p14:creationId xmlns:p14="http://schemas.microsoft.com/office/powerpoint/2010/main" val="3371027184"/>
       </p:ext>
     </p:extLst>
   </p:cSld>

--- a/Präsentation-CSS-T&A.pptx
+++ b/Präsentation-CSS-T&A.pptx
@@ -6,15 +6,16 @@
     <p:sldMasterId id="2147483708" r:id="rId2"/>
   </p:sldMasterIdLst>
   <p:notesMasterIdLst>
-    <p:notesMasterId r:id="rId9"/>
+    <p:notesMasterId r:id="rId10"/>
   </p:notesMasterIdLst>
   <p:sldIdLst>
     <p:sldId id="265" r:id="rId3"/>
     <p:sldId id="261" r:id="rId4"/>
     <p:sldId id="262" r:id="rId5"/>
     <p:sldId id="263" r:id="rId6"/>
-    <p:sldId id="264" r:id="rId7"/>
-    <p:sldId id="266" r:id="rId8"/>
+    <p:sldId id="267" r:id="rId7"/>
+    <p:sldId id="264" r:id="rId8"/>
+    <p:sldId id="266" r:id="rId9"/>
   </p:sldIdLst>
   <p:sldSz cx="12192000" cy="6858000"/>
   <p:notesSz cx="6858000" cy="9144000"/>
@@ -124,7 +125,7 @@
 <file path=ppt/revisionInfo.xml><?xml version="1.0" encoding="utf-8"?>
 <p1510:revInfo xmlns:a="http://schemas.openxmlformats.org/drawingml/2006/main" xmlns:r="http://schemas.openxmlformats.org/officeDocument/2006/relationships" xmlns:p1510="http://schemas.microsoft.com/office/powerpoint/2015/10/main">
   <p1510:revLst>
-    <p1510:client id="{66E3F9D8-9CB6-4AB4-A50A-F10ABA866F6E}" v="36" dt="2026-03-05T08:47:23.309"/>
+    <p1510:client id="{66E3F9D8-9CB6-4AB4-A50A-F10ABA866F6E}" v="50" dt="2026-03-05T20:32:08.631"/>
   </p1510:revLst>
 </p1510:revInfo>
 </file>
@@ -134,7 +135,7 @@
   <pc:docChgLst>
     <pc:chgData name="Nassery, Wanisa" userId="eb577ee2-3895-4f93-9de0-b07a06e375bf" providerId="ADAL" clId="{0563F7C6-264B-407D-9CB8-9601D089DAD8}"/>
     <pc:docChg chg="undo custSel addSld delSld modSld">
-      <pc:chgData name="Nassery, Wanisa" userId="eb577ee2-3895-4f93-9de0-b07a06e375bf" providerId="ADAL" clId="{0563F7C6-264B-407D-9CB8-9601D089DAD8}" dt="2026-03-05T16:11:16.729" v="1484" actId="1076"/>
+      <pc:chgData name="Nassery, Wanisa" userId="eb577ee2-3895-4f93-9de0-b07a06e375bf" providerId="ADAL" clId="{0563F7C6-264B-407D-9CB8-9601D089DAD8}" dt="2026-03-05T20:32:15.807" v="1940" actId="403"/>
       <pc:docMkLst>
         <pc:docMk/>
       </pc:docMkLst>
@@ -181,7 +182,7 @@
         </pc:sldMkLst>
       </pc:sldChg>
       <pc:sldChg chg="addSp delSp modSp add mod modTransition setBg delAnim modNotes">
-        <pc:chgData name="Nassery, Wanisa" userId="eb577ee2-3895-4f93-9de0-b07a06e375bf" providerId="ADAL" clId="{0563F7C6-264B-407D-9CB8-9601D089DAD8}" dt="2026-03-05T08:47:53.537" v="1459" actId="1076"/>
+        <pc:chgData name="Nassery, Wanisa" userId="eb577ee2-3895-4f93-9de0-b07a06e375bf" providerId="ADAL" clId="{0563F7C6-264B-407D-9CB8-9601D089DAD8}" dt="2026-03-05T19:51:51.265" v="1731" actId="14100"/>
         <pc:sldMkLst>
           <pc:docMk/>
           <pc:sldMk cId="0" sldId="261"/>
@@ -192,6 +193,14 @@
             <pc:docMk/>
             <pc:sldMk cId="0" sldId="261"/>
             <ac:spMk id="3" creationId="{0EFC40BB-CCD2-B11B-7F63-D86474C2D3D3}"/>
+          </ac:spMkLst>
+        </pc:spChg>
+        <pc:spChg chg="add del">
+          <ac:chgData name="Nassery, Wanisa" userId="eb577ee2-3895-4f93-9de0-b07a06e375bf" providerId="ADAL" clId="{0563F7C6-264B-407D-9CB8-9601D089DAD8}" dt="2026-03-05T19:50:54.807" v="1719" actId="22"/>
+          <ac:spMkLst>
+            <pc:docMk/>
+            <pc:sldMk cId="0" sldId="261"/>
+            <ac:spMk id="3" creationId="{3201666D-3490-71F8-3AA0-89996D4A698E}"/>
           </ac:spMkLst>
         </pc:spChg>
         <pc:spChg chg="add del mod">
@@ -211,7 +220,7 @@
           </ac:spMkLst>
         </pc:spChg>
         <pc:spChg chg="add mod">
-          <ac:chgData name="Nassery, Wanisa" userId="eb577ee2-3895-4f93-9de0-b07a06e375bf" providerId="ADAL" clId="{0563F7C6-264B-407D-9CB8-9601D089DAD8}" dt="2026-03-05T08:45:41.809" v="1421" actId="1076"/>
+          <ac:chgData name="Nassery, Wanisa" userId="eb577ee2-3895-4f93-9de0-b07a06e375bf" providerId="ADAL" clId="{0563F7C6-264B-407D-9CB8-9601D089DAD8}" dt="2026-03-05T19:51:04.495" v="1724" actId="1076"/>
           <ac:spMkLst>
             <pc:docMk/>
             <pc:sldMk cId="0" sldId="261"/>
@@ -259,6 +268,14 @@
           </ac:spMkLst>
         </pc:spChg>
         <pc:spChg chg="add mod">
+          <ac:chgData name="Nassery, Wanisa" userId="eb577ee2-3895-4f93-9de0-b07a06e375bf" providerId="ADAL" clId="{0563F7C6-264B-407D-9CB8-9601D089DAD8}" dt="2026-03-05T19:51:38.117" v="1729" actId="20577"/>
+          <ac:spMkLst>
+            <pc:docMk/>
+            <pc:sldMk cId="0" sldId="261"/>
+            <ac:spMk id="8" creationId="{FE58152F-C3BF-9888-C930-FC2529D89C3B}"/>
+          </ac:spMkLst>
+        </pc:spChg>
+        <pc:spChg chg="add mod">
           <ac:chgData name="Nassery, Wanisa" userId="eb577ee2-3895-4f93-9de0-b07a06e375bf" providerId="ADAL" clId="{0563F7C6-264B-407D-9CB8-9601D089DAD8}" dt="2026-03-04T20:32:05.109" v="1146"/>
           <ac:spMkLst>
             <pc:docMk/>
@@ -267,7 +284,7 @@
           </ac:spMkLst>
         </pc:spChg>
         <pc:spChg chg="add mod">
-          <ac:chgData name="Nassery, Wanisa" userId="eb577ee2-3895-4f93-9de0-b07a06e375bf" providerId="ADAL" clId="{0563F7C6-264B-407D-9CB8-9601D089DAD8}" dt="2026-03-05T08:47:53.537" v="1459" actId="1076"/>
+          <ac:chgData name="Nassery, Wanisa" userId="eb577ee2-3895-4f93-9de0-b07a06e375bf" providerId="ADAL" clId="{0563F7C6-264B-407D-9CB8-9601D089DAD8}" dt="2026-03-05T19:47:17.719" v="1645" actId="207"/>
           <ac:spMkLst>
             <pc:docMk/>
             <pc:sldMk cId="0" sldId="261"/>
@@ -275,7 +292,7 @@
           </ac:spMkLst>
         </pc:spChg>
         <pc:spChg chg="add mod">
-          <ac:chgData name="Nassery, Wanisa" userId="eb577ee2-3895-4f93-9de0-b07a06e375bf" providerId="ADAL" clId="{0563F7C6-264B-407D-9CB8-9601D089DAD8}" dt="2026-03-05T08:45:53.602" v="1429" actId="1076"/>
+          <ac:chgData name="Nassery, Wanisa" userId="eb577ee2-3895-4f93-9de0-b07a06e375bf" providerId="ADAL" clId="{0563F7C6-264B-407D-9CB8-9601D089DAD8}" dt="2026-03-05T19:51:10.494" v="1726" actId="1076"/>
           <ac:spMkLst>
             <pc:docMk/>
             <pc:sldMk cId="0" sldId="261"/>
@@ -283,7 +300,7 @@
           </ac:spMkLst>
         </pc:spChg>
         <pc:spChg chg="add mod">
-          <ac:chgData name="Nassery, Wanisa" userId="eb577ee2-3895-4f93-9de0-b07a06e375bf" providerId="ADAL" clId="{0563F7C6-264B-407D-9CB8-9601D089DAD8}" dt="2026-03-05T08:45:00.024" v="1382" actId="1076"/>
+          <ac:chgData name="Nassery, Wanisa" userId="eb577ee2-3895-4f93-9de0-b07a06e375bf" providerId="ADAL" clId="{0563F7C6-264B-407D-9CB8-9601D089DAD8}" dt="2026-03-05T19:51:51.265" v="1731" actId="14100"/>
           <ac:spMkLst>
             <pc:docMk/>
             <pc:sldMk cId="0" sldId="261"/>
@@ -308,7 +325,7 @@
         </pc:spChg>
       </pc:sldChg>
       <pc:sldChg chg="addSp delSp modSp add mod modTransition setBg delAnim modNotes">
-        <pc:chgData name="Nassery, Wanisa" userId="eb577ee2-3895-4f93-9de0-b07a06e375bf" providerId="ADAL" clId="{0563F7C6-264B-407D-9CB8-9601D089DAD8}" dt="2026-03-05T16:11:16.729" v="1484" actId="1076"/>
+        <pc:chgData name="Nassery, Wanisa" userId="eb577ee2-3895-4f93-9de0-b07a06e375bf" providerId="ADAL" clId="{0563F7C6-264B-407D-9CB8-9601D089DAD8}" dt="2026-03-05T19:52:05.991" v="1743" actId="20577"/>
         <pc:sldMkLst>
           <pc:docMk/>
           <pc:sldMk cId="0" sldId="262"/>
@@ -338,7 +355,7 @@
           </ac:spMkLst>
         </pc:spChg>
         <pc:spChg chg="add mod">
-          <ac:chgData name="Nassery, Wanisa" userId="eb577ee2-3895-4f93-9de0-b07a06e375bf" providerId="ADAL" clId="{0563F7C6-264B-407D-9CB8-9601D089DAD8}" dt="2026-03-05T08:46:20.237" v="1430" actId="113"/>
+          <ac:chgData name="Nassery, Wanisa" userId="eb577ee2-3895-4f93-9de0-b07a06e375bf" providerId="ADAL" clId="{0563F7C6-264B-407D-9CB8-9601D089DAD8}" dt="2026-03-05T17:03:18.614" v="1499" actId="1076"/>
           <ac:spMkLst>
             <pc:docMk/>
             <pc:sldMk cId="0" sldId="262"/>
@@ -362,7 +379,7 @@
           </ac:spMkLst>
         </pc:spChg>
         <pc:spChg chg="add mod">
-          <ac:chgData name="Nassery, Wanisa" userId="eb577ee2-3895-4f93-9de0-b07a06e375bf" providerId="ADAL" clId="{0563F7C6-264B-407D-9CB8-9601D089DAD8}" dt="2026-03-05T08:48:24.572" v="1463" actId="1076"/>
+          <ac:chgData name="Nassery, Wanisa" userId="eb577ee2-3895-4f93-9de0-b07a06e375bf" providerId="ADAL" clId="{0563F7C6-264B-407D-9CB8-9601D089DAD8}" dt="2026-03-05T19:48:01.569" v="1659" actId="207"/>
           <ac:spMkLst>
             <pc:docMk/>
             <pc:sldMk cId="0" sldId="262"/>
@@ -370,7 +387,7 @@
           </ac:spMkLst>
         </pc:spChg>
         <pc:spChg chg="add mod">
-          <ac:chgData name="Nassery, Wanisa" userId="eb577ee2-3895-4f93-9de0-b07a06e375bf" providerId="ADAL" clId="{0563F7C6-264B-407D-9CB8-9601D089DAD8}" dt="2026-03-05T16:11:06.533" v="1481" actId="1076"/>
+          <ac:chgData name="Nassery, Wanisa" userId="eb577ee2-3895-4f93-9de0-b07a06e375bf" providerId="ADAL" clId="{0563F7C6-264B-407D-9CB8-9601D089DAD8}" dt="2026-03-05T19:52:05.991" v="1743" actId="20577"/>
           <ac:spMkLst>
             <pc:docMk/>
             <pc:sldMk cId="0" sldId="262"/>
@@ -395,7 +412,7 @@
         </pc:spChg>
       </pc:sldChg>
       <pc:sldChg chg="addSp delSp modSp add mod">
-        <pc:chgData name="Nassery, Wanisa" userId="eb577ee2-3895-4f93-9de0-b07a06e375bf" providerId="ADAL" clId="{0563F7C6-264B-407D-9CB8-9601D089DAD8}" dt="2026-03-05T16:10:47.543" v="1476" actId="1076"/>
+        <pc:chgData name="Nassery, Wanisa" userId="eb577ee2-3895-4f93-9de0-b07a06e375bf" providerId="ADAL" clId="{0563F7C6-264B-407D-9CB8-9601D089DAD8}" dt="2026-03-05T19:56:12.560" v="1807" actId="1076"/>
         <pc:sldMkLst>
           <pc:docMk/>
           <pc:sldMk cId="893894787" sldId="263"/>
@@ -473,7 +490,7 @@
           </ac:spMkLst>
         </pc:spChg>
         <pc:spChg chg="add mod">
-          <ac:chgData name="Nassery, Wanisa" userId="eb577ee2-3895-4f93-9de0-b07a06e375bf" providerId="ADAL" clId="{0563F7C6-264B-407D-9CB8-9601D089DAD8}" dt="2026-03-05T16:10:37.747" v="1474" actId="20577"/>
+          <ac:chgData name="Nassery, Wanisa" userId="eb577ee2-3895-4f93-9de0-b07a06e375bf" providerId="ADAL" clId="{0563F7C6-264B-407D-9CB8-9601D089DAD8}" dt="2026-03-05T19:56:06.376" v="1806" actId="113"/>
           <ac:spMkLst>
             <pc:docMk/>
             <pc:sldMk cId="893894787" sldId="263"/>
@@ -481,7 +498,7 @@
           </ac:spMkLst>
         </pc:spChg>
         <pc:spChg chg="add mod">
-          <ac:chgData name="Nassery, Wanisa" userId="eb577ee2-3895-4f93-9de0-b07a06e375bf" providerId="ADAL" clId="{0563F7C6-264B-407D-9CB8-9601D089DAD8}" dt="2026-03-05T16:10:47.543" v="1476" actId="1076"/>
+          <ac:chgData name="Nassery, Wanisa" userId="eb577ee2-3895-4f93-9de0-b07a06e375bf" providerId="ADAL" clId="{0563F7C6-264B-407D-9CB8-9601D089DAD8}" dt="2026-03-05T19:56:00.248" v="1805" actId="1037"/>
           <ac:spMkLst>
             <pc:docMk/>
             <pc:sldMk cId="893894787" sldId="263"/>
@@ -489,7 +506,7 @@
           </ac:spMkLst>
         </pc:spChg>
         <pc:spChg chg="add mod">
-          <ac:chgData name="Nassery, Wanisa" userId="eb577ee2-3895-4f93-9de0-b07a06e375bf" providerId="ADAL" clId="{0563F7C6-264B-407D-9CB8-9601D089DAD8}" dt="2026-03-05T16:10:42.562" v="1475" actId="1076"/>
+          <ac:chgData name="Nassery, Wanisa" userId="eb577ee2-3895-4f93-9de0-b07a06e375bf" providerId="ADAL" clId="{0563F7C6-264B-407D-9CB8-9601D089DAD8}" dt="2026-03-05T19:56:12.560" v="1807" actId="1076"/>
           <ac:spMkLst>
             <pc:docMk/>
             <pc:sldMk cId="893894787" sldId="263"/>
@@ -498,13 +515,13 @@
         </pc:spChg>
       </pc:sldChg>
       <pc:sldChg chg="addSp delSp modSp add mod">
-        <pc:chgData name="Nassery, Wanisa" userId="eb577ee2-3895-4f93-9de0-b07a06e375bf" providerId="ADAL" clId="{0563F7C6-264B-407D-9CB8-9601D089DAD8}" dt="2026-03-05T16:10:54.553" v="1479" actId="1076"/>
+        <pc:chgData name="Nassery, Wanisa" userId="eb577ee2-3895-4f93-9de0-b07a06e375bf" providerId="ADAL" clId="{0563F7C6-264B-407D-9CB8-9601D089DAD8}" dt="2026-03-05T20:18:27.735" v="1918" actId="20577"/>
         <pc:sldMkLst>
           <pc:docMk/>
           <pc:sldMk cId="3714839329" sldId="264"/>
         </pc:sldMkLst>
         <pc:spChg chg="add mod">
-          <ac:chgData name="Nassery, Wanisa" userId="eb577ee2-3895-4f93-9de0-b07a06e375bf" providerId="ADAL" clId="{0563F7C6-264B-407D-9CB8-9601D089DAD8}" dt="2026-03-05T08:47:40.094" v="1456" actId="20577"/>
+          <ac:chgData name="Nassery, Wanisa" userId="eb577ee2-3895-4f93-9de0-b07a06e375bf" providerId="ADAL" clId="{0563F7C6-264B-407D-9CB8-9601D089DAD8}" dt="2026-03-05T20:18:27.735" v="1918" actId="20577"/>
           <ac:spMkLst>
             <pc:docMk/>
             <pc:sldMk cId="3714839329" sldId="264"/>
@@ -520,7 +537,7 @@
           </ac:spMkLst>
         </pc:spChg>
         <pc:spChg chg="add mod">
-          <ac:chgData name="Nassery, Wanisa" userId="eb577ee2-3895-4f93-9de0-b07a06e375bf" providerId="ADAL" clId="{0563F7C6-264B-407D-9CB8-9601D089DAD8}" dt="2026-03-05T08:46:31.538" v="1432" actId="113"/>
+          <ac:chgData name="Nassery, Wanisa" userId="eb577ee2-3895-4f93-9de0-b07a06e375bf" providerId="ADAL" clId="{0563F7C6-264B-407D-9CB8-9601D089DAD8}" dt="2026-03-05T20:12:05.159" v="1887" actId="14100"/>
           <ac:spMkLst>
             <pc:docMk/>
             <pc:sldMk cId="3714839329" sldId="264"/>
@@ -535,20 +552,36 @@
             <ac:spMk id="5" creationId="{50A186DD-6F23-95C9-5E96-5D72433CC83F}"/>
           </ac:spMkLst>
         </pc:spChg>
-        <pc:spChg chg="add mod">
-          <ac:chgData name="Nassery, Wanisa" userId="eb577ee2-3895-4f93-9de0-b07a06e375bf" providerId="ADAL" clId="{0563F7C6-264B-407D-9CB8-9601D089DAD8}" dt="2026-03-04T20:38:12.302" v="1212" actId="14100"/>
+        <pc:spChg chg="add del mod">
+          <ac:chgData name="Nassery, Wanisa" userId="eb577ee2-3895-4f93-9de0-b07a06e375bf" providerId="ADAL" clId="{0563F7C6-264B-407D-9CB8-9601D089DAD8}" dt="2026-03-05T20:11:44.615" v="1851" actId="22"/>
+          <ac:spMkLst>
+            <pc:docMk/>
+            <pc:sldMk cId="3714839329" sldId="264"/>
+            <ac:spMk id="5" creationId="{EE261D86-44F4-9AFD-AC5E-FE3EE79EF983}"/>
+          </ac:spMkLst>
+        </pc:spChg>
+        <pc:spChg chg="add del mod">
+          <ac:chgData name="Nassery, Wanisa" userId="eb577ee2-3895-4f93-9de0-b07a06e375bf" providerId="ADAL" clId="{0563F7C6-264B-407D-9CB8-9601D089DAD8}" dt="2026-03-05T20:11:51.821" v="1855" actId="21"/>
           <ac:spMkLst>
             <pc:docMk/>
             <pc:sldMk cId="3714839329" sldId="264"/>
             <ac:spMk id="6" creationId="{84E4579A-16AD-C89F-8510-747E396EF242}"/>
           </ac:spMkLst>
         </pc:spChg>
-        <pc:spChg chg="add mod">
-          <ac:chgData name="Nassery, Wanisa" userId="eb577ee2-3895-4f93-9de0-b07a06e375bf" providerId="ADAL" clId="{0563F7C6-264B-407D-9CB8-9601D089DAD8}" dt="2026-03-05T16:10:54.553" v="1479" actId="1076"/>
+        <pc:spChg chg="add del mod">
+          <ac:chgData name="Nassery, Wanisa" userId="eb577ee2-3895-4f93-9de0-b07a06e375bf" providerId="ADAL" clId="{0563F7C6-264B-407D-9CB8-9601D089DAD8}" dt="2026-03-05T20:11:50.111" v="1854" actId="21"/>
           <ac:spMkLst>
             <pc:docMk/>
             <pc:sldMk cId="3714839329" sldId="264"/>
             <ac:spMk id="7" creationId="{35D73B0B-089E-BFE5-4BCA-CD21BDA49913}"/>
+          </ac:spMkLst>
+        </pc:spChg>
+        <pc:spChg chg="add mod">
+          <ac:chgData name="Nassery, Wanisa" userId="eb577ee2-3895-4f93-9de0-b07a06e375bf" providerId="ADAL" clId="{0563F7C6-264B-407D-9CB8-9601D089DAD8}" dt="2026-03-05T20:13:14.870" v="1909" actId="20577"/>
+          <ac:spMkLst>
+            <pc:docMk/>
+            <pc:sldMk cId="3714839329" sldId="264"/>
+            <ac:spMk id="9" creationId="{C98678A6-6983-6D75-BE09-D393A5F31071}"/>
           </ac:spMkLst>
         </pc:spChg>
         <pc:spChg chg="del">
@@ -600,17 +633,25 @@
         </pc:spChg>
       </pc:sldChg>
       <pc:sldChg chg="addSp delSp modSp add mod">
-        <pc:chgData name="Nassery, Wanisa" userId="eb577ee2-3895-4f93-9de0-b07a06e375bf" providerId="ADAL" clId="{0563F7C6-264B-407D-9CB8-9601D089DAD8}" dt="2026-03-05T08:47:44.728" v="1458" actId="20577"/>
+        <pc:chgData name="Nassery, Wanisa" userId="eb577ee2-3895-4f93-9de0-b07a06e375bf" providerId="ADAL" clId="{0563F7C6-264B-407D-9CB8-9601D089DAD8}" dt="2026-03-05T20:32:15.807" v="1940" actId="403"/>
         <pc:sldMkLst>
           <pc:docMk/>
           <pc:sldMk cId="3371027184" sldId="266"/>
         </pc:sldMkLst>
         <pc:spChg chg="add mod">
-          <ac:chgData name="Nassery, Wanisa" userId="eb577ee2-3895-4f93-9de0-b07a06e375bf" providerId="ADAL" clId="{0563F7C6-264B-407D-9CB8-9601D089DAD8}" dt="2026-03-05T08:47:44.728" v="1458" actId="20577"/>
+          <ac:chgData name="Nassery, Wanisa" userId="eb577ee2-3895-4f93-9de0-b07a06e375bf" providerId="ADAL" clId="{0563F7C6-264B-407D-9CB8-9601D089DAD8}" dt="2026-03-05T20:18:32.475" v="1920" actId="20577"/>
           <ac:spMkLst>
             <pc:docMk/>
             <pc:sldMk cId="3371027184" sldId="266"/>
             <ac:spMk id="2" creationId="{520CE756-32A4-008F-9951-78308E0D4EAB}"/>
+          </ac:spMkLst>
+        </pc:spChg>
+        <pc:spChg chg="add mod">
+          <ac:chgData name="Nassery, Wanisa" userId="eb577ee2-3895-4f93-9de0-b07a06e375bf" providerId="ADAL" clId="{0563F7C6-264B-407D-9CB8-9601D089DAD8}" dt="2026-03-05T20:32:15.807" v="1940" actId="403"/>
+          <ac:spMkLst>
+            <pc:docMk/>
+            <pc:sldMk cId="3371027184" sldId="266"/>
+            <ac:spMk id="3" creationId="{03BBEBEA-7E0B-5B2C-0A45-12E4CD503837}"/>
           </ac:spMkLst>
         </pc:spChg>
         <pc:spChg chg="mod">
@@ -637,6 +678,20 @@
             <ac:spMk id="7" creationId="{F7F2B078-B556-74D3-533F-28CC86C557EC}"/>
           </ac:spMkLst>
         </pc:spChg>
+      </pc:sldChg>
+      <pc:sldChg chg="add">
+        <pc:chgData name="Nassery, Wanisa" userId="eb577ee2-3895-4f93-9de0-b07a06e375bf" providerId="ADAL" clId="{0563F7C6-264B-407D-9CB8-9601D089DAD8}" dt="2026-03-05T20:16:27.332" v="1910"/>
+        <pc:sldMkLst>
+          <pc:docMk/>
+          <pc:sldMk cId="1455364464" sldId="267"/>
+        </pc:sldMkLst>
+      </pc:sldChg>
+      <pc:sldChg chg="add del">
+        <pc:chgData name="Nassery, Wanisa" userId="eb577ee2-3895-4f93-9de0-b07a06e375bf" providerId="ADAL" clId="{0563F7C6-264B-407D-9CB8-9601D089DAD8}" dt="2026-03-05T20:11:43.284" v="1848"/>
+        <pc:sldMkLst>
+          <pc:docMk/>
+          <pc:sldMk cId="3070470082" sldId="267"/>
+        </pc:sldMkLst>
       </pc:sldChg>
     </pc:docChg>
   </pc:docChgLst>
@@ -1567,6 +1622,133 @@
         <p:cNvPr id="1" name="Shape 423">
           <a:extLst>
             <a:ext uri="{FF2B5EF4-FFF2-40B4-BE49-F238E27FC236}">
+              <a16:creationId xmlns:a16="http://schemas.microsoft.com/office/drawing/2014/main" id="{B364A2AE-D377-9FCB-31FB-5FD9E7B29440}"/>
+            </a:ext>
+          </a:extLst>
+        </p:cNvPr>
+        <p:cNvGrpSpPr/>
+        <p:nvPr/>
+      </p:nvGrpSpPr>
+      <p:grpSpPr>
+        <a:xfrm>
+          <a:off x="0" y="0"/>
+          <a:ext cx="0" cy="0"/>
+          <a:chOff x="0" y="0"/>
+          <a:chExt cx="0" cy="0"/>
+        </a:xfrm>
+      </p:grpSpPr>
+      <p:sp>
+        <p:nvSpPr>
+          <p:cNvPr id="424" name="Google Shape;424;g703d6efd59_0_25:notes">
+            <a:extLst>
+              <a:ext uri="{FF2B5EF4-FFF2-40B4-BE49-F238E27FC236}">
+                <a16:creationId xmlns:a16="http://schemas.microsoft.com/office/drawing/2014/main" id="{B66532B1-0F19-D938-A859-86989493F528}"/>
+              </a:ext>
+            </a:extLst>
+          </p:cNvPr>
+          <p:cNvSpPr>
+            <a:spLocks noGrp="1" noRot="1" noChangeAspect="1"/>
+          </p:cNvSpPr>
+          <p:nvPr>
+            <p:ph type="sldImg" idx="2"/>
+          </p:nvPr>
+        </p:nvSpPr>
+        <p:spPr>
+          <a:xfrm>
+            <a:off x="381000" y="685800"/>
+            <a:ext cx="6096000" cy="3429000"/>
+          </a:xfrm>
+          <a:custGeom>
+            <a:avLst/>
+            <a:gdLst/>
+            <a:ahLst/>
+            <a:cxnLst/>
+            <a:rect l="l" t="t" r="r" b="b"/>
+            <a:pathLst>
+              <a:path w="120000" h="120000" extrusionOk="0">
+                <a:moveTo>
+                  <a:pt x="0" y="0"/>
+                </a:moveTo>
+                <a:lnTo>
+                  <a:pt x="120000" y="0"/>
+                </a:lnTo>
+                <a:lnTo>
+                  <a:pt x="120000" y="120000"/>
+                </a:lnTo>
+                <a:lnTo>
+                  <a:pt x="0" y="120000"/>
+                </a:lnTo>
+                <a:close/>
+              </a:path>
+            </a:pathLst>
+          </a:custGeom>
+        </p:spPr>
+      </p:sp>
+      <p:sp>
+        <p:nvSpPr>
+          <p:cNvPr id="425" name="Google Shape;425;g703d6efd59_0_25:notes">
+            <a:extLst>
+              <a:ext uri="{FF2B5EF4-FFF2-40B4-BE49-F238E27FC236}">
+                <a16:creationId xmlns:a16="http://schemas.microsoft.com/office/drawing/2014/main" id="{D1B2C490-14B7-EB51-0737-C776575BB519}"/>
+              </a:ext>
+            </a:extLst>
+          </p:cNvPr>
+          <p:cNvSpPr txBox="1">
+            <a:spLocks noGrp="1"/>
+          </p:cNvSpPr>
+          <p:nvPr>
+            <p:ph type="body" idx="1"/>
+          </p:nvPr>
+        </p:nvSpPr>
+        <p:spPr>
+          <a:xfrm>
+            <a:off x="685800" y="4343400"/>
+            <a:ext cx="5486400" cy="4114800"/>
+          </a:xfrm>
+          <a:prstGeom prst="rect">
+            <a:avLst/>
+          </a:prstGeom>
+        </p:spPr>
+        <p:txBody>
+          <a:bodyPr spcFirstLastPara="1" wrap="square" lIns="91425" tIns="91425" rIns="91425" bIns="91425" anchor="t" anchorCtr="0">
+            <a:noAutofit/>
+          </a:bodyPr>
+          <a:lstStyle/>
+          <a:p>
+            <a:pPr marL="0" lvl="0" indent="0" algn="l" rtl="0">
+              <a:spcBef>
+                <a:spcPts val="0"/>
+              </a:spcBef>
+              <a:spcAft>
+                <a:spcPts val="0"/>
+              </a:spcAft>
+              <a:buNone/>
+            </a:pPr>
+            <a:endParaRPr/>
+          </a:p>
+        </p:txBody>
+      </p:sp>
+    </p:spTree>
+    <p:extLst>
+      <p:ext uri="{BB962C8B-B14F-4D97-AF65-F5344CB8AC3E}">
+        <p14:creationId xmlns:p14="http://schemas.microsoft.com/office/powerpoint/2010/main" val="2500944754"/>
+      </p:ext>
+    </p:extLst>
+  </p:cSld>
+  <p:clrMapOvr>
+    <a:masterClrMapping/>
+  </p:clrMapOvr>
+</p:notes>
+</file>
+
+<file path=ppt/notesSlides/notesSlide7.xml><?xml version="1.0" encoding="utf-8"?>
+<p:notes xmlns:a="http://schemas.openxmlformats.org/drawingml/2006/main" xmlns:r="http://schemas.openxmlformats.org/officeDocument/2006/relationships" xmlns:p="http://schemas.openxmlformats.org/presentationml/2006/main" showMasterSp="0" showMasterPhAnim="0">
+  <p:cSld>
+    <p:spTree>
+      <p:nvGrpSpPr>
+        <p:cNvPr id="1" name="Shape 423">
+          <a:extLst>
+            <a:ext uri="{FF2B5EF4-FFF2-40B4-BE49-F238E27FC236}">
               <a16:creationId xmlns:a16="http://schemas.microsoft.com/office/drawing/2014/main" id="{8BE28D27-7ACF-D03B-02D6-D05BAE4657D4}"/>
             </a:ext>
           </a:extLst>
@@ -1669,7 +1851,7 @@
               </a:spcAft>
               <a:buNone/>
             </a:pPr>
-            <a:endParaRPr/>
+            <a:endParaRPr dirty="0"/>
           </a:p>
         </p:txBody>
       </p:sp>
@@ -46863,7 +47045,7 @@
         </p:nvSpPr>
         <p:spPr>
           <a:xfrm>
-            <a:off x="80773" y="1064502"/>
+            <a:off x="176054" y="2453938"/>
             <a:ext cx="5831554" cy="1902187"/>
           </a:xfrm>
           <a:prstGeom prst="rect">
@@ -46900,13 +47082,20 @@
             </a:pPr>
             <a:r>
               <a:rPr lang="en-US" sz="2000" b="0" dirty="0">
-                <a:solidFill>
-                  <a:srgbClr val="0550AE"/>
-                </a:solidFill>
                 <a:effectLst/>
                 <a:latin typeface="Consolas" panose="020B0609020204030204" pitchFamily="49" charset="0"/>
               </a:rPr>
-              <a:t>.element</a:t>
+              <a:t>1</a:t>
+            </a:r>
+            <a:r>
+              <a:rPr lang="en-US" sz="2000" b="0" dirty="0">
+                <a:solidFill>
+                  <a:srgbClr val="0550AE"/>
+                </a:solidFill>
+                <a:effectLst/>
+                <a:latin typeface="Consolas" panose="020B0609020204030204" pitchFamily="49" charset="0"/>
+              </a:rPr>
+              <a:t> .element</a:t>
             </a:r>
             <a:r>
               <a:rPr lang="en-US" sz="2000" b="0" dirty="0">
@@ -46934,7 +47123,7 @@
                 <a:effectLst/>
                 <a:latin typeface="Consolas" panose="020B0609020204030204" pitchFamily="49" charset="0"/>
               </a:rPr>
-              <a:t>  </a:t>
+              <a:t>2   </a:t>
             </a:r>
             <a:r>
               <a:rPr lang="en-US" sz="2000" b="0" dirty="0">
@@ -46992,7 +47181,7 @@
                 <a:effectLst/>
                 <a:latin typeface="Consolas" panose="020B0609020204030204" pitchFamily="49" charset="0"/>
               </a:rPr>
-              <a:t>  </a:t>
+              <a:t>3   </a:t>
             </a:r>
             <a:r>
               <a:rPr lang="en-US" sz="2000" b="0" dirty="0">
@@ -47100,7 +47289,7 @@
                 <a:effectLst/>
                 <a:latin typeface="Consolas" panose="020B0609020204030204" pitchFamily="49" charset="0"/>
               </a:rPr>
-              <a:t>}</a:t>
+              <a:t>4 }</a:t>
             </a:r>
           </a:p>
           <a:p>
@@ -47136,13 +47325,20 @@
             </a:pPr>
             <a:r>
               <a:rPr lang="en-US" sz="2000" b="0" dirty="0">
-                <a:solidFill>
-                  <a:srgbClr val="0550AE"/>
-                </a:solidFill>
                 <a:effectLst/>
                 <a:latin typeface="Consolas" panose="020B0609020204030204" pitchFamily="49" charset="0"/>
               </a:rPr>
-              <a:t>.</a:t>
+              <a:t>5</a:t>
+            </a:r>
+            <a:r>
+              <a:rPr lang="en-US" sz="2000" b="0" dirty="0">
+                <a:solidFill>
+                  <a:srgbClr val="0550AE"/>
+                </a:solidFill>
+                <a:effectLst/>
+                <a:latin typeface="Consolas" panose="020B0609020204030204" pitchFamily="49" charset="0"/>
+              </a:rPr>
+              <a:t> .</a:t>
             </a:r>
             <a:r>
               <a:rPr lang="en-US" sz="2000" b="0" dirty="0" err="1">
@@ -47180,7 +47376,7 @@
                 <a:effectLst/>
                 <a:latin typeface="Consolas" panose="020B0609020204030204" pitchFamily="49" charset="0"/>
               </a:rPr>
-              <a:t>  </a:t>
+              <a:t>6   </a:t>
             </a:r>
             <a:r>
               <a:rPr lang="en-US" sz="2000" b="0" dirty="0">
@@ -47238,7 +47434,7 @@
                 <a:effectLst/>
                 <a:latin typeface="Consolas" panose="020B0609020204030204" pitchFamily="49" charset="0"/>
               </a:rPr>
-              <a:t>}</a:t>
+              <a:t>7 }</a:t>
             </a:r>
           </a:p>
         </p:txBody>
@@ -47257,8 +47453,8 @@
         </p:nvSpPr>
         <p:spPr>
           <a:xfrm>
-            <a:off x="6279674" y="1725428"/>
-            <a:ext cx="6094476" cy="4056623"/>
+            <a:off x="6035040" y="2270844"/>
+            <a:ext cx="6430518" cy="4056623"/>
           </a:xfrm>
           <a:prstGeom prst="rect">
             <a:avLst/>
@@ -47279,6 +47475,13 @@
             </a:pPr>
             <a:r>
               <a:rPr lang="en-US" sz="2000" b="0" dirty="0">
+                <a:effectLst/>
+                <a:latin typeface="Consolas" panose="020B0609020204030204" pitchFamily="49" charset="0"/>
+              </a:rPr>
+              <a:t>1 </a:t>
+            </a:r>
+            <a:r>
+              <a:rPr lang="en-US" sz="2000" b="0" dirty="0">
                 <a:solidFill>
                   <a:srgbClr val="0550AE"/>
                 </a:solidFill>
@@ -47331,7 +47534,7 @@
                 <a:effectLst/>
                 <a:latin typeface="Consolas" panose="020B0609020204030204" pitchFamily="49" charset="0"/>
               </a:rPr>
-              <a:t>  /* Constant speed throughout */</a:t>
+              <a:t>    /* Constant speed throughout */</a:t>
             </a:r>
           </a:p>
           <a:p>
@@ -47357,14 +47560,13 @@
               <a:buNone/>
             </a:pPr>
             <a:r>
-              <a:rPr lang="en-US" sz="2000" b="0" dirty="0">
+              <a:rPr lang="en-US" sz="2000" dirty="0">
                 <a:solidFill>
                   <a:srgbClr val="1F2328"/>
                 </a:solidFill>
-                <a:effectLst/>
                 <a:latin typeface="Consolas" panose="020B0609020204030204" pitchFamily="49" charset="0"/>
               </a:rPr>
-              <a:t>  </a:t>
+              <a:t>2  </a:t>
             </a:r>
             <a:r>
               <a:rPr lang="en-US" sz="2000" b="0" dirty="0">
@@ -47453,7 +47655,7 @@
                 <a:effectLst/>
                 <a:latin typeface="Consolas" panose="020B0609020204030204" pitchFamily="49" charset="0"/>
               </a:rPr>
-              <a:t>  /* Slow start, fast middle, slow end*/</a:t>
+              <a:t>    /* Slow start, fast middle, slow end*/</a:t>
             </a:r>
           </a:p>
           <a:p>
@@ -47479,14 +47681,13 @@
               <a:buNone/>
             </a:pPr>
             <a:r>
-              <a:rPr lang="en-US" sz="2000" b="0" dirty="0">
+              <a:rPr lang="en-US" sz="2000" dirty="0">
                 <a:solidFill>
                   <a:srgbClr val="1F2328"/>
                 </a:solidFill>
-                <a:effectLst/>
                 <a:latin typeface="Consolas" panose="020B0609020204030204" pitchFamily="49" charset="0"/>
               </a:rPr>
-              <a:t>  </a:t>
+              <a:t>3  </a:t>
             </a:r>
             <a:r>
               <a:rPr lang="en-US" sz="2000" b="0" dirty="0">
@@ -47565,7 +47766,7 @@
                 <a:effectLst/>
                 <a:latin typeface="Consolas" panose="020B0609020204030204" pitchFamily="49" charset="0"/>
               </a:rPr>
-              <a:t>  /* Slow start, fast end */</a:t>
+              <a:t>    /* Slow start, fast end */</a:t>
             </a:r>
           </a:p>
           <a:p>
@@ -47591,14 +47792,13 @@
               <a:buNone/>
             </a:pPr>
             <a:r>
-              <a:rPr lang="en-US" sz="2000" b="0" dirty="0">
+              <a:rPr lang="en-US" sz="2000" dirty="0">
                 <a:solidFill>
                   <a:srgbClr val="1F2328"/>
                 </a:solidFill>
-                <a:effectLst/>
                 <a:latin typeface="Consolas" panose="020B0609020204030204" pitchFamily="49" charset="0"/>
               </a:rPr>
-              <a:t>  </a:t>
+              <a:t>4  </a:t>
             </a:r>
             <a:r>
               <a:rPr lang="en-US" sz="2000" b="0" dirty="0">
@@ -47677,7 +47877,7 @@
                 <a:effectLst/>
                 <a:latin typeface="Consolas" panose="020B0609020204030204" pitchFamily="49" charset="0"/>
               </a:rPr>
-              <a:t>  /* Fast start, slow end */</a:t>
+              <a:t>    /* Fast start, slow end */</a:t>
             </a:r>
           </a:p>
           <a:p>
@@ -47703,14 +47903,13 @@
               <a:buNone/>
             </a:pPr>
             <a:r>
-              <a:rPr lang="en-US" sz="2000" b="0" dirty="0">
+              <a:rPr lang="en-US" sz="2000" dirty="0">
                 <a:solidFill>
                   <a:srgbClr val="1F2328"/>
                 </a:solidFill>
-                <a:effectLst/>
                 <a:latin typeface="Consolas" panose="020B0609020204030204" pitchFamily="49" charset="0"/>
               </a:rPr>
-              <a:t>  </a:t>
+              <a:t>5  </a:t>
             </a:r>
             <a:r>
               <a:rPr lang="en-US" sz="2000" b="0" dirty="0">
@@ -47799,7 +47998,7 @@
                 <a:effectLst/>
                 <a:latin typeface="Consolas" panose="020B0609020204030204" pitchFamily="49" charset="0"/>
               </a:rPr>
-              <a:t>  /* Slow start and end */</a:t>
+              <a:t>    /* Slow start and end */</a:t>
             </a:r>
           </a:p>
           <a:p>
@@ -47825,14 +48024,13 @@
               <a:buNone/>
             </a:pPr>
             <a:r>
-              <a:rPr lang="en-US" sz="2000" b="0" dirty="0">
+              <a:rPr lang="en-US" sz="2000" dirty="0">
                 <a:solidFill>
                   <a:srgbClr val="1F2328"/>
                 </a:solidFill>
-                <a:effectLst/>
                 <a:latin typeface="Consolas" panose="020B0609020204030204" pitchFamily="49" charset="0"/>
               </a:rPr>
-              <a:t>  </a:t>
+              <a:t>6  </a:t>
             </a:r>
             <a:r>
               <a:rPr lang="en-US" sz="2000" b="0" dirty="0">
@@ -47909,8 +48107,8 @@
         </p:nvSpPr>
         <p:spPr>
           <a:xfrm>
-            <a:off x="176054" y="3292075"/>
-            <a:ext cx="6103620" cy="923330"/>
+            <a:off x="176054" y="1121240"/>
+            <a:ext cx="5593810" cy="1015663"/>
           </a:xfrm>
           <a:prstGeom prst="rect">
             <a:avLst/>
@@ -47924,14 +48122,14 @@
           <a:lstStyle/>
           <a:p>
             <a:r>
-              <a:rPr lang="de-DE" b="1" dirty="0"/>
+              <a:rPr lang="de-DE" sz="2000" b="1" dirty="0"/>
               <a:t>Übergang zwischen ZWEI Zuständen.</a:t>
             </a:r>
             <a:br>
-              <a:rPr lang="de-DE" dirty="0"/>
+              <a:rPr lang="de-DE" sz="2000" dirty="0"/>
             </a:br>
             <a:r>
-              <a:rPr lang="de-DE" dirty="0"/>
+              <a:rPr lang="de-DE" sz="2000" dirty="0"/>
               <a:t>Animation startet bei Änderung (z. B. Hover) und nicht automatisch.</a:t>
             </a:r>
           </a:p>
@@ -47986,7 +48184,7 @@
         </p:nvSpPr>
         <p:spPr>
           <a:xfrm>
-            <a:off x="7031736" y="854623"/>
+            <a:off x="7031736" y="396198"/>
             <a:ext cx="5650992" cy="646331"/>
           </a:xfrm>
           <a:prstGeom prst="rect">
@@ -48042,6 +48240,41 @@
           </a:p>
         </p:txBody>
       </p:sp>
+      <p:sp>
+        <p:nvSpPr>
+          <p:cNvPr id="8" name="TextBox 7">
+            <a:extLst>
+              <a:ext uri="{FF2B5EF4-FFF2-40B4-BE49-F238E27FC236}">
+                <a16:creationId xmlns:a16="http://schemas.microsoft.com/office/drawing/2014/main" id="{FE58152F-C3BF-9888-C930-FC2529D89C3B}"/>
+              </a:ext>
+            </a:extLst>
+          </p:cNvPr>
+          <p:cNvSpPr txBox="1"/>
+          <p:nvPr/>
+        </p:nvSpPr>
+        <p:spPr>
+          <a:xfrm>
+            <a:off x="7031736" y="1121240"/>
+            <a:ext cx="4347242" cy="1015663"/>
+          </a:xfrm>
+          <a:prstGeom prst="rect">
+            <a:avLst/>
+          </a:prstGeom>
+          <a:noFill/>
+        </p:spPr>
+        <p:txBody>
+          <a:bodyPr wrap="square">
+            <a:spAutoFit/>
+          </a:bodyPr>
+          <a:lstStyle/>
+          <a:p>
+            <a:r>
+              <a:rPr lang="de-DE" sz="2000" dirty="0"/>
+              <a:t>Timing Functions bestimmen, wie sich die Geschwindigkeit einer Animation über ihre Dauer verändert.</a:t>
+            </a:r>
+          </a:p>
+        </p:txBody>
+      </p:sp>
     </p:spTree>
   </p:cSld>
   <p:clrMapOvr>
@@ -48085,7 +48318,7 @@
         </p:nvSpPr>
         <p:spPr>
           <a:xfrm>
-            <a:off x="-3175000" y="-392012"/>
+            <a:off x="-3689350" y="-487262"/>
             <a:ext cx="10515600" cy="1325563"/>
           </a:xfrm>
         </p:spPr>
@@ -48375,8 +48608,8 @@
         </p:nvSpPr>
         <p:spPr>
           <a:xfrm>
-            <a:off x="6166485" y="3293039"/>
-            <a:ext cx="6094476" cy="1363578"/>
+            <a:off x="5712643" y="3293039"/>
+            <a:ext cx="6548318" cy="1370183"/>
           </a:xfrm>
           <a:prstGeom prst="rect">
             <a:avLst/>
@@ -48397,13 +48630,20 @@
             </a:pPr>
             <a:r>
               <a:rPr lang="de-DE" sz="2000" b="0" dirty="0">
-                <a:solidFill>
-                  <a:srgbClr val="CF222E"/>
-                </a:solidFill>
                 <a:effectLst/>
                 <a:latin typeface="Consolas" panose="020B0609020204030204" pitchFamily="49" charset="0"/>
               </a:rPr>
-              <a:t>@keyframes</a:t>
+              <a:t>1</a:t>
+            </a:r>
+            <a:r>
+              <a:rPr lang="de-DE" sz="2000" b="0" dirty="0">
+                <a:solidFill>
+                  <a:srgbClr val="CF222E"/>
+                </a:solidFill>
+                <a:effectLst/>
+                <a:latin typeface="Consolas" panose="020B0609020204030204" pitchFamily="49" charset="0"/>
+              </a:rPr>
+              <a:t> @keyframes</a:t>
             </a:r>
             <a:r>
               <a:rPr lang="de-DE" sz="2000" b="0" dirty="0">
@@ -48451,7 +48691,7 @@
                 <a:effectLst/>
                 <a:latin typeface="Consolas" panose="020B0609020204030204" pitchFamily="49" charset="0"/>
               </a:rPr>
-              <a:t>  </a:t>
+              <a:t>2  </a:t>
             </a:r>
             <a:r>
               <a:rPr lang="de-DE" sz="2000" b="0" dirty="0">
@@ -48549,7 +48789,7 @@
                 <a:effectLst/>
                 <a:latin typeface="Consolas" panose="020B0609020204030204" pitchFamily="49" charset="0"/>
               </a:rPr>
-              <a:t>  </a:t>
+              <a:t>3  </a:t>
             </a:r>
             <a:r>
               <a:rPr lang="de-DE" sz="2000" b="0" dirty="0">
@@ -48657,7 +48897,7 @@
                 <a:effectLst/>
                 <a:latin typeface="Consolas" panose="020B0609020204030204" pitchFamily="49" charset="0"/>
               </a:rPr>
-              <a:t>  </a:t>
+              <a:t>4  </a:t>
             </a:r>
             <a:r>
               <a:rPr lang="de-DE" sz="2000" b="0" dirty="0">
@@ -48765,7 +49005,7 @@
                 <a:effectLst/>
                 <a:latin typeface="Consolas" panose="020B0609020204030204" pitchFamily="49" charset="0"/>
               </a:rPr>
-              <a:t>  </a:t>
+              <a:t>5  </a:t>
             </a:r>
             <a:r>
               <a:rPr lang="de-DE" sz="2000" b="0" dirty="0">
@@ -48873,7 +49113,7 @@
                 <a:effectLst/>
                 <a:latin typeface="Consolas" panose="020B0609020204030204" pitchFamily="49" charset="0"/>
               </a:rPr>
-              <a:t>  </a:t>
+              <a:t>6  </a:t>
             </a:r>
             <a:r>
               <a:rPr lang="de-DE" sz="2000" b="0" dirty="0">
@@ -48971,7 +49211,7 @@
                 <a:effectLst/>
                 <a:latin typeface="Consolas" panose="020B0609020204030204" pitchFamily="49" charset="0"/>
               </a:rPr>
-              <a:t>}</a:t>
+              <a:t>7}</a:t>
             </a:r>
           </a:p>
         </p:txBody>
@@ -48990,7 +49230,7 @@
         </p:nvSpPr>
         <p:spPr>
           <a:xfrm>
-            <a:off x="1017651" y="1139118"/>
+            <a:off x="503301" y="1234672"/>
             <a:ext cx="6176772" cy="830997"/>
           </a:xfrm>
           <a:prstGeom prst="rect">
@@ -49006,7 +49246,7 @@
           <a:p>
             <a:r>
               <a:rPr lang="de-DE" sz="2400" b="1" dirty="0"/>
-              <a:t>Bewegung selbst definieren.</a:t>
+              <a:t>Animationen/Bewegung selbst definieren.</a:t>
             </a:r>
             <a:br>
               <a:rPr lang="de-DE" sz="2400" dirty="0"/>
@@ -49131,7 +49371,7 @@
         </p:nvSpPr>
         <p:spPr>
           <a:xfrm>
-            <a:off x="3276346" y="2578792"/>
+            <a:off x="2455418" y="2089725"/>
             <a:ext cx="5639308" cy="1384995"/>
           </a:xfrm>
           <a:prstGeom prst="rect">
@@ -49178,7 +49418,7 @@
         </p:nvSpPr>
         <p:spPr>
           <a:xfrm>
-            <a:off x="3276346" y="3934349"/>
+            <a:off x="2444242" y="3749681"/>
             <a:ext cx="7541260" cy="1543115"/>
           </a:xfrm>
           <a:prstGeom prst="rect">
@@ -49200,13 +49440,20 @@
             </a:pPr>
             <a:r>
               <a:rPr lang="de-DE" sz="2000" b="0" dirty="0">
-                <a:solidFill>
-                  <a:srgbClr val="CF222E"/>
-                </a:solidFill>
                 <a:effectLst/>
                 <a:latin typeface="Consolas" panose="020B0609020204030204" pitchFamily="49" charset="0"/>
               </a:rPr>
-              <a:t>@keyframes</a:t>
+              <a:t>1</a:t>
+            </a:r>
+            <a:r>
+              <a:rPr lang="de-DE" sz="2000" b="0" dirty="0">
+                <a:solidFill>
+                  <a:srgbClr val="CF222E"/>
+                </a:solidFill>
+                <a:effectLst/>
+                <a:latin typeface="Consolas" panose="020B0609020204030204" pitchFamily="49" charset="0"/>
+              </a:rPr>
+              <a:t> @keyframes</a:t>
             </a:r>
             <a:r>
               <a:rPr lang="de-DE" sz="2000" b="0" dirty="0">
@@ -49254,7 +49501,7 @@
                 <a:effectLst/>
                 <a:latin typeface="Consolas" panose="020B0609020204030204" pitchFamily="49" charset="0"/>
               </a:rPr>
-              <a:t>  </a:t>
+              <a:t>2  </a:t>
             </a:r>
             <a:r>
               <a:rPr lang="de-DE" sz="2000" b="0" dirty="0">
@@ -49362,7 +49609,7 @@
                 <a:effectLst/>
                 <a:latin typeface="Consolas" panose="020B0609020204030204" pitchFamily="49" charset="0"/>
               </a:rPr>
-              <a:t>  </a:t>
+              <a:t>3  </a:t>
             </a:r>
             <a:r>
               <a:rPr lang="de-DE" sz="2000" b="0" dirty="0">
@@ -49470,7 +49717,7 @@
                 <a:effectLst/>
                 <a:latin typeface="Consolas" panose="020B0609020204030204" pitchFamily="49" charset="0"/>
               </a:rPr>
-              <a:t>}</a:t>
+              <a:t>4 }</a:t>
             </a:r>
           </a:p>
           <a:p>
@@ -49489,6 +49736,16 @@
                 <a:latin typeface="Consolas" panose="020B0609020204030204" pitchFamily="49" charset="0"/>
               </a:rPr>
             </a:br>
+            <a:r>
+              <a:rPr lang="de-DE" sz="2000" b="0" dirty="0">
+                <a:solidFill>
+                  <a:srgbClr val="1F2328"/>
+                </a:solidFill>
+                <a:effectLst/>
+                <a:latin typeface="Consolas" panose="020B0609020204030204" pitchFamily="49" charset="0"/>
+              </a:rPr>
+              <a:t>5 </a:t>
+            </a:r>
             <a:r>
               <a:rPr lang="de-DE" sz="2000" b="0" dirty="0">
                 <a:solidFill>
@@ -49525,7 +49782,7 @@
                 <a:effectLst/>
                 <a:latin typeface="Consolas" panose="020B0609020204030204" pitchFamily="49" charset="0"/>
               </a:rPr>
-              <a:t>  </a:t>
+              <a:t>6  </a:t>
             </a:r>
             <a:r>
               <a:rPr lang="de-DE" sz="2000" b="0" dirty="0">
@@ -49633,7 +49890,7 @@
                 <a:effectLst/>
                 <a:latin typeface="Consolas" panose="020B0609020204030204" pitchFamily="49" charset="0"/>
               </a:rPr>
-              <a:t>}</a:t>
+              <a:t>7 }</a:t>
             </a:r>
           </a:p>
         </p:txBody>
@@ -49652,8 +49909,8 @@
         </p:nvSpPr>
         <p:spPr>
           <a:xfrm>
-            <a:off x="5472938" y="582434"/>
-            <a:ext cx="6094476" cy="1569660"/>
+            <a:off x="2444242" y="1352080"/>
+            <a:ext cx="6094476" cy="1200329"/>
           </a:xfrm>
           <a:prstGeom prst="rect">
             <a:avLst/>
@@ -49668,15 +49925,12 @@
           <a:p>
             <a:r>
               <a:rPr lang="de-DE" sz="2400" b="1" dirty="0"/>
-              <a:t>Animationen zur Verbesserung der User Experience.</a:t>
+              <a:t>Animationen zur Verbesserung der User Experience + UI Elementen.</a:t>
             </a:r>
             <a:br>
               <a:rPr lang="de-DE" sz="2400" dirty="0"/>
             </a:br>
-            <a:r>
-              <a:rPr lang="de-DE" sz="2400" dirty="0"/>
-              <a:t>Feedback, Statusanzeige, sanftes Einblenden.</a:t>
-            </a:r>
+            <a:endParaRPr lang="de-DE" sz="2400" dirty="0"/>
           </a:p>
         </p:txBody>
       </p:sp>
@@ -49911,8 +50165,8 @@
         </p:nvSpPr>
         <p:spPr>
           <a:xfrm>
-            <a:off x="2088261" y="2944368"/>
-            <a:ext cx="7759754" cy="2620333"/>
+            <a:off x="2088261" y="3191256"/>
+            <a:ext cx="9478900" cy="2620333"/>
           </a:xfrm>
           <a:prstGeom prst="rect">
             <a:avLst/>
@@ -49932,17 +50186,24 @@
               <a:buNone/>
             </a:pPr>
             <a:r>
-              <a:rPr lang="de-DE" b="0" dirty="0">
-                <a:solidFill>
-                  <a:srgbClr val="A0111F"/>
-                </a:solidFill>
+              <a:rPr lang="de-DE" sz="2000" b="0" dirty="0">
                 <a:effectLst/>
                 <a:latin typeface="Consolas" panose="020B0609020204030204" pitchFamily="49" charset="0"/>
               </a:rPr>
-              <a:t>@keyframes</a:t>
+              <a:t>1</a:t>
             </a:r>
             <a:r>
-              <a:rPr lang="de-DE" b="0" dirty="0">
+              <a:rPr lang="de-DE" sz="2000" b="0" dirty="0">
+                <a:solidFill>
+                  <a:srgbClr val="A0111F"/>
+                </a:solidFill>
+                <a:effectLst/>
+                <a:latin typeface="Consolas" panose="020B0609020204030204" pitchFamily="49" charset="0"/>
+              </a:rPr>
+              <a:t>  @keyframes</a:t>
+            </a:r>
+            <a:r>
+              <a:rPr lang="de-DE" sz="2000" b="0" dirty="0">
                 <a:solidFill>
                   <a:srgbClr val="0E1116"/>
                 </a:solidFill>
@@ -49952,7 +50213,7 @@
               <a:t> </a:t>
             </a:r>
             <a:r>
-              <a:rPr lang="de-DE" b="0" dirty="0">
+              <a:rPr lang="de-DE" sz="2000" b="0" dirty="0">
                 <a:solidFill>
                   <a:srgbClr val="702C00"/>
                 </a:solidFill>
@@ -49962,7 +50223,7 @@
               <a:t>float</a:t>
             </a:r>
             <a:r>
-              <a:rPr lang="de-DE" b="0" dirty="0">
+              <a:rPr lang="de-DE" sz="2000" b="0" dirty="0">
                 <a:solidFill>
                   <a:srgbClr val="0E1116"/>
                 </a:solidFill>
@@ -49980,17 +50241,17 @@
               <a:buNone/>
             </a:pPr>
             <a:r>
-              <a:rPr lang="de-DE" b="0" dirty="0">
+              <a:rPr lang="de-DE" sz="2000" b="0" dirty="0">
                 <a:solidFill>
                   <a:srgbClr val="0E1116"/>
                 </a:solidFill>
                 <a:effectLst/>
                 <a:latin typeface="Consolas" panose="020B0609020204030204" pitchFamily="49" charset="0"/>
               </a:rPr>
-              <a:t>  </a:t>
+              <a:t>2   </a:t>
             </a:r>
             <a:r>
-              <a:rPr lang="de-DE" b="0" dirty="0">
+              <a:rPr lang="de-DE" sz="2000" b="0" dirty="0">
                 <a:solidFill>
                   <a:srgbClr val="023B95"/>
                 </a:solidFill>
@@ -50000,7 +50261,7 @@
               <a:t>0%</a:t>
             </a:r>
             <a:r>
-              <a:rPr lang="de-DE" b="0" dirty="0">
+              <a:rPr lang="de-DE" sz="2000" b="0" dirty="0">
                 <a:solidFill>
                   <a:srgbClr val="0E1116"/>
                 </a:solidFill>
@@ -50010,7 +50271,7 @@
               <a:t>, </a:t>
             </a:r>
             <a:r>
-              <a:rPr lang="de-DE" b="0" dirty="0">
+              <a:rPr lang="de-DE" sz="2000" b="0" dirty="0">
                 <a:solidFill>
                   <a:srgbClr val="023B95"/>
                 </a:solidFill>
@@ -50020,7 +50281,7 @@
               <a:t>100%</a:t>
             </a:r>
             <a:r>
-              <a:rPr lang="de-DE" b="0" dirty="0">
+              <a:rPr lang="de-DE" sz="2000" b="0" dirty="0">
                 <a:solidFill>
                   <a:srgbClr val="0E1116"/>
                 </a:solidFill>
@@ -50030,7 +50291,7 @@
               <a:t> { </a:t>
             </a:r>
             <a:r>
-              <a:rPr lang="de-DE" b="0" dirty="0">
+              <a:rPr lang="de-DE" sz="2000" b="0" dirty="0">
                 <a:solidFill>
                   <a:srgbClr val="023B95"/>
                 </a:solidFill>
@@ -50040,7 +50301,7 @@
               <a:t>transform</a:t>
             </a:r>
             <a:r>
-              <a:rPr lang="de-DE" b="0" dirty="0">
+              <a:rPr lang="de-DE" sz="2000" b="0" dirty="0">
                 <a:solidFill>
                   <a:srgbClr val="0E1116"/>
                 </a:solidFill>
@@ -50050,7 +50311,7 @@
               <a:t>: </a:t>
             </a:r>
             <a:r>
-              <a:rPr lang="de-DE" b="0" dirty="0">
+              <a:rPr lang="de-DE" sz="2000" b="0" dirty="0">
                 <a:solidFill>
                   <a:srgbClr val="023B95"/>
                 </a:solidFill>
@@ -50060,7 +50321,7 @@
               <a:t>translateY</a:t>
             </a:r>
             <a:r>
-              <a:rPr lang="de-DE" b="0" dirty="0">
+              <a:rPr lang="de-DE" sz="2000" b="0" dirty="0">
                 <a:solidFill>
                   <a:srgbClr val="0E1116"/>
                 </a:solidFill>
@@ -50070,7 +50331,7 @@
               <a:t>(</a:t>
             </a:r>
             <a:r>
-              <a:rPr lang="de-DE" b="0" dirty="0">
+              <a:rPr lang="de-DE" sz="2000" b="0" dirty="0">
                 <a:solidFill>
                   <a:srgbClr val="023B95"/>
                 </a:solidFill>
@@ -50080,7 +50341,7 @@
               <a:t>0</a:t>
             </a:r>
             <a:r>
-              <a:rPr lang="de-DE" b="0" dirty="0">
+              <a:rPr lang="de-DE" sz="2000" b="0" dirty="0">
                 <a:solidFill>
                   <a:srgbClr val="0E1116"/>
                 </a:solidFill>
@@ -50098,17 +50359,17 @@
               <a:buNone/>
             </a:pPr>
             <a:r>
-              <a:rPr lang="de-DE" b="0" dirty="0">
+              <a:rPr lang="de-DE" sz="2000" b="0" dirty="0">
                 <a:solidFill>
                   <a:srgbClr val="0E1116"/>
                 </a:solidFill>
                 <a:effectLst/>
                 <a:latin typeface="Consolas" panose="020B0609020204030204" pitchFamily="49" charset="0"/>
               </a:rPr>
-              <a:t>  </a:t>
+              <a:t>3   </a:t>
             </a:r>
             <a:r>
-              <a:rPr lang="de-DE" b="0" dirty="0">
+              <a:rPr lang="de-DE" sz="2000" b="0" dirty="0">
                 <a:solidFill>
                   <a:srgbClr val="023B95"/>
                 </a:solidFill>
@@ -50118,7 +50379,7 @@
               <a:t>50%</a:t>
             </a:r>
             <a:r>
-              <a:rPr lang="de-DE" b="0" dirty="0">
+              <a:rPr lang="de-DE" sz="2000" b="0" dirty="0">
                 <a:solidFill>
                   <a:srgbClr val="0E1116"/>
                 </a:solidFill>
@@ -50128,7 +50389,7 @@
               <a:t>      { </a:t>
             </a:r>
             <a:r>
-              <a:rPr lang="de-DE" b="0" dirty="0">
+              <a:rPr lang="de-DE" sz="2000" b="0" dirty="0">
                 <a:solidFill>
                   <a:srgbClr val="023B95"/>
                 </a:solidFill>
@@ -50138,7 +50399,7 @@
               <a:t>transform</a:t>
             </a:r>
             <a:r>
-              <a:rPr lang="de-DE" b="0" dirty="0">
+              <a:rPr lang="de-DE" sz="2000" b="0" dirty="0">
                 <a:solidFill>
                   <a:srgbClr val="0E1116"/>
                 </a:solidFill>
@@ -50148,7 +50409,7 @@
               <a:t>: </a:t>
             </a:r>
             <a:r>
-              <a:rPr lang="de-DE" b="0" dirty="0">
+              <a:rPr lang="de-DE" sz="2000" b="0" dirty="0">
                 <a:solidFill>
                   <a:srgbClr val="023B95"/>
                 </a:solidFill>
@@ -50158,7 +50419,7 @@
               <a:t>translateY</a:t>
             </a:r>
             <a:r>
-              <a:rPr lang="de-DE" b="0" dirty="0">
+              <a:rPr lang="de-DE" sz="2000" b="0" dirty="0">
                 <a:solidFill>
                   <a:srgbClr val="0E1116"/>
                 </a:solidFill>
@@ -50168,7 +50429,7 @@
               <a:t>(</a:t>
             </a:r>
             <a:r>
-              <a:rPr lang="de-DE" b="0" dirty="0">
+              <a:rPr lang="de-DE" sz="2000" b="0" dirty="0">
                 <a:solidFill>
                   <a:srgbClr val="023B95"/>
                 </a:solidFill>
@@ -50178,7 +50439,7 @@
               <a:t>-15</a:t>
             </a:r>
             <a:r>
-              <a:rPr lang="de-DE" b="0" dirty="0">
+              <a:rPr lang="de-DE" sz="2000" b="0" dirty="0">
                 <a:solidFill>
                   <a:srgbClr val="A0111F"/>
                 </a:solidFill>
@@ -50188,7 +50449,7 @@
               <a:t>px</a:t>
             </a:r>
             <a:r>
-              <a:rPr lang="de-DE" b="0" dirty="0">
+              <a:rPr lang="de-DE" sz="2000" b="0" dirty="0">
                 <a:solidFill>
                   <a:srgbClr val="0E1116"/>
                 </a:solidFill>
@@ -50206,14 +50467,14 @@
               <a:buNone/>
             </a:pPr>
             <a:r>
-              <a:rPr lang="de-DE" b="0" dirty="0">
+              <a:rPr lang="de-DE" sz="2000" b="0" dirty="0">
                 <a:solidFill>
                   <a:srgbClr val="0E1116"/>
                 </a:solidFill>
                 <a:effectLst/>
                 <a:latin typeface="Consolas" panose="020B0609020204030204" pitchFamily="49" charset="0"/>
               </a:rPr>
-              <a:t>}</a:t>
+              <a:t>4  }</a:t>
             </a:r>
           </a:p>
           <a:p>
@@ -50224,17 +50485,24 @@
               <a:buNone/>
             </a:pPr>
             <a:r>
-              <a:rPr lang="de-DE" b="0" dirty="0">
-                <a:solidFill>
-                  <a:srgbClr val="A0111F"/>
-                </a:solidFill>
+              <a:rPr lang="de-DE" sz="2000" b="0" dirty="0">
                 <a:effectLst/>
                 <a:latin typeface="Consolas" panose="020B0609020204030204" pitchFamily="49" charset="0"/>
               </a:rPr>
-              <a:t>@keyframes</a:t>
+              <a:t>5</a:t>
             </a:r>
             <a:r>
-              <a:rPr lang="de-DE" b="0" dirty="0">
+              <a:rPr lang="de-DE" sz="2000" b="0" dirty="0">
+                <a:solidFill>
+                  <a:srgbClr val="A0111F"/>
+                </a:solidFill>
+                <a:effectLst/>
+                <a:latin typeface="Consolas" panose="020B0609020204030204" pitchFamily="49" charset="0"/>
+              </a:rPr>
+              <a:t>  @keyframes</a:t>
+            </a:r>
+            <a:r>
+              <a:rPr lang="de-DE" sz="2000" b="0" dirty="0">
                 <a:solidFill>
                   <a:srgbClr val="0E1116"/>
                 </a:solidFill>
@@ -50244,7 +50512,7 @@
               <a:t> </a:t>
             </a:r>
             <a:r>
-              <a:rPr lang="de-DE" b="0" dirty="0">
+              <a:rPr lang="de-DE" sz="2000" b="0" dirty="0">
                 <a:solidFill>
                   <a:srgbClr val="702C00"/>
                 </a:solidFill>
@@ -50254,7 +50522,7 @@
               <a:t>glow</a:t>
             </a:r>
             <a:r>
-              <a:rPr lang="de-DE" b="0" dirty="0">
+              <a:rPr lang="de-DE" sz="2000" b="0" dirty="0">
                 <a:solidFill>
                   <a:srgbClr val="0E1116"/>
                 </a:solidFill>
@@ -50272,17 +50540,17 @@
               <a:buNone/>
             </a:pPr>
             <a:r>
-              <a:rPr lang="de-DE" b="0" dirty="0">
+              <a:rPr lang="de-DE" sz="2000" b="0" dirty="0">
                 <a:solidFill>
                   <a:srgbClr val="0E1116"/>
                 </a:solidFill>
                 <a:effectLst/>
                 <a:latin typeface="Consolas" panose="020B0609020204030204" pitchFamily="49" charset="0"/>
               </a:rPr>
-              <a:t>  </a:t>
+              <a:t>6   </a:t>
             </a:r>
             <a:r>
-              <a:rPr lang="de-DE" b="0" dirty="0">
+              <a:rPr lang="de-DE" sz="2000" b="0" dirty="0">
                 <a:solidFill>
                   <a:srgbClr val="023B95"/>
                 </a:solidFill>
@@ -50292,7 +50560,7 @@
               <a:t>0%</a:t>
             </a:r>
             <a:r>
-              <a:rPr lang="de-DE" b="0" dirty="0">
+              <a:rPr lang="de-DE" sz="2000" b="0" dirty="0">
                 <a:solidFill>
                   <a:srgbClr val="0E1116"/>
                 </a:solidFill>
@@ -50302,7 +50570,7 @@
               <a:t>, </a:t>
             </a:r>
             <a:r>
-              <a:rPr lang="de-DE" b="0" dirty="0">
+              <a:rPr lang="de-DE" sz="2000" b="0" dirty="0">
                 <a:solidFill>
                   <a:srgbClr val="023B95"/>
                 </a:solidFill>
@@ -50312,7 +50580,7 @@
               <a:t>100%</a:t>
             </a:r>
             <a:r>
-              <a:rPr lang="de-DE" b="0" dirty="0">
+              <a:rPr lang="de-DE" sz="2000" b="0" dirty="0">
                 <a:solidFill>
                   <a:srgbClr val="0E1116"/>
                 </a:solidFill>
@@ -50322,7 +50590,7 @@
               <a:t> { </a:t>
             </a:r>
             <a:r>
-              <a:rPr lang="de-DE" b="0" dirty="0">
+              <a:rPr lang="de-DE" sz="2000" b="0" dirty="0">
                 <a:solidFill>
                   <a:srgbClr val="023B95"/>
                 </a:solidFill>
@@ -50332,87 +50600,27 @@
               <a:t>box-shadow</a:t>
             </a:r>
             <a:r>
-              <a:rPr lang="de-DE" b="0" dirty="0">
+              <a:rPr lang="de-DE" sz="2000" b="0" dirty="0">
                 <a:solidFill>
                   <a:srgbClr val="0E1116"/>
                 </a:solidFill>
                 <a:effectLst/>
                 <a:latin typeface="Consolas" panose="020B0609020204030204" pitchFamily="49" charset="0"/>
               </a:rPr>
-              <a:t>: </a:t>
+              <a:t>: 0 </a:t>
             </a:r>
             <a:r>
-              <a:rPr lang="de-DE" b="0" dirty="0">
-                <a:solidFill>
-                  <a:srgbClr val="023B95"/>
+              <a:rPr lang="de-DE" sz="2000" b="0">
+                <a:solidFill>
+                  <a:srgbClr val="0E1116"/>
                 </a:solidFill>
                 <a:effectLst/>
                 <a:latin typeface="Consolas" panose="020B0609020204030204" pitchFamily="49" charset="0"/>
               </a:rPr>
-              <a:t>0</a:t>
+              <a:t>0 10px </a:t>
             </a:r>
             <a:r>
-              <a:rPr lang="de-DE" b="0" dirty="0">
-                <a:solidFill>
-                  <a:srgbClr val="0E1116"/>
-                </a:solidFill>
-                <a:effectLst/>
-                <a:latin typeface="Consolas" panose="020B0609020204030204" pitchFamily="49" charset="0"/>
-              </a:rPr>
-              <a:t> </a:t>
-            </a:r>
-            <a:r>
-              <a:rPr lang="de-DE" b="0" dirty="0">
-                <a:solidFill>
-                  <a:srgbClr val="023B95"/>
-                </a:solidFill>
-                <a:effectLst/>
-                <a:latin typeface="Consolas" panose="020B0609020204030204" pitchFamily="49" charset="0"/>
-              </a:rPr>
-              <a:t>0</a:t>
-            </a:r>
-            <a:r>
-              <a:rPr lang="de-DE" b="0" dirty="0">
-                <a:solidFill>
-                  <a:srgbClr val="0E1116"/>
-                </a:solidFill>
-                <a:effectLst/>
-                <a:latin typeface="Consolas" panose="020B0609020204030204" pitchFamily="49" charset="0"/>
-              </a:rPr>
-              <a:t> </a:t>
-            </a:r>
-            <a:r>
-              <a:rPr lang="de-DE" b="0" dirty="0">
-                <a:solidFill>
-                  <a:srgbClr val="023B95"/>
-                </a:solidFill>
-                <a:effectLst/>
-                <a:latin typeface="Consolas" panose="020B0609020204030204" pitchFamily="49" charset="0"/>
-              </a:rPr>
-              <a:t>5</a:t>
-            </a:r>
-            <a:r>
-              <a:rPr lang="de-DE" b="0" dirty="0">
-                <a:solidFill>
-                  <a:srgbClr val="A0111F"/>
-                </a:solidFill>
-                <a:effectLst/>
-                <a:latin typeface="Consolas" panose="020B0609020204030204" pitchFamily="49" charset="0"/>
-              </a:rPr>
-              <a:t>px</a:t>
-            </a:r>
-            <a:r>
-              <a:rPr lang="de-DE" b="0" dirty="0">
-                <a:solidFill>
-                  <a:srgbClr val="0E1116"/>
-                </a:solidFill>
-                <a:effectLst/>
-                <a:latin typeface="Consolas" panose="020B0609020204030204" pitchFamily="49" charset="0"/>
-              </a:rPr>
-              <a:t> </a:t>
-            </a:r>
-            <a:r>
-              <a:rPr lang="de-DE" b="0" dirty="0">
+              <a:rPr lang="de-DE" sz="2000" b="0">
                 <a:solidFill>
                   <a:srgbClr val="023B95"/>
                 </a:solidFill>
@@ -50422,7 +50630,7 @@
               <a:t>rgba</a:t>
             </a:r>
             <a:r>
-              <a:rPr lang="de-DE" b="0" dirty="0">
+              <a:rPr lang="de-DE" sz="2000" b="0" dirty="0">
                 <a:solidFill>
                   <a:srgbClr val="0E1116"/>
                 </a:solidFill>
@@ -50432,7 +50640,7 @@
               <a:t>(</a:t>
             </a:r>
             <a:r>
-              <a:rPr lang="de-DE" b="0" dirty="0">
+              <a:rPr lang="de-DE" sz="2000" b="0" dirty="0">
                 <a:solidFill>
                   <a:srgbClr val="023B95"/>
                 </a:solidFill>
@@ -50442,7 +50650,7 @@
               <a:t>59</a:t>
             </a:r>
             <a:r>
-              <a:rPr lang="de-DE" b="0" dirty="0">
+              <a:rPr lang="de-DE" sz="2000" b="0" dirty="0">
                 <a:solidFill>
                   <a:srgbClr val="0E1116"/>
                 </a:solidFill>
@@ -50452,7 +50660,7 @@
               <a:t>, </a:t>
             </a:r>
             <a:r>
-              <a:rPr lang="de-DE" b="0" dirty="0">
+              <a:rPr lang="de-DE" sz="2000" b="0" dirty="0">
                 <a:solidFill>
                   <a:srgbClr val="023B95"/>
                 </a:solidFill>
@@ -50462,7 +50670,7 @@
               <a:t>130</a:t>
             </a:r>
             <a:r>
-              <a:rPr lang="de-DE" b="0" dirty="0">
+              <a:rPr lang="de-DE" sz="2000" b="0" dirty="0">
                 <a:solidFill>
                   <a:srgbClr val="0E1116"/>
                 </a:solidFill>
@@ -50472,7 +50680,7 @@
               <a:t>, </a:t>
             </a:r>
             <a:r>
-              <a:rPr lang="de-DE" b="0" dirty="0">
+              <a:rPr lang="de-DE" sz="2000" b="0" dirty="0">
                 <a:solidFill>
                   <a:srgbClr val="023B95"/>
                 </a:solidFill>
@@ -50482,7 +50690,7 @@
               <a:t>246</a:t>
             </a:r>
             <a:r>
-              <a:rPr lang="de-DE" b="0" dirty="0">
+              <a:rPr lang="de-DE" sz="2000" b="0" dirty="0">
                 <a:solidFill>
                   <a:srgbClr val="0E1116"/>
                 </a:solidFill>
@@ -50492,7 +50700,7 @@
               <a:t>, </a:t>
             </a:r>
             <a:r>
-              <a:rPr lang="de-DE" b="0" dirty="0">
+              <a:rPr lang="de-DE" sz="2000" b="0" dirty="0">
                 <a:solidFill>
                   <a:srgbClr val="023B95"/>
                 </a:solidFill>
@@ -50502,7 +50710,7 @@
               <a:t>0.2</a:t>
             </a:r>
             <a:r>
-              <a:rPr lang="de-DE" b="0" dirty="0">
+              <a:rPr lang="de-DE" sz="2000" b="0" dirty="0">
                 <a:solidFill>
                   <a:srgbClr val="0E1116"/>
                 </a:solidFill>
@@ -50520,17 +50728,17 @@
               <a:buNone/>
             </a:pPr>
             <a:r>
-              <a:rPr lang="de-DE" b="0" dirty="0">
+              <a:rPr lang="de-DE" sz="2000" b="0" dirty="0">
                 <a:solidFill>
                   <a:srgbClr val="0E1116"/>
                 </a:solidFill>
                 <a:effectLst/>
                 <a:latin typeface="Consolas" panose="020B0609020204030204" pitchFamily="49" charset="0"/>
               </a:rPr>
-              <a:t>  </a:t>
+              <a:t>7   </a:t>
             </a:r>
             <a:r>
-              <a:rPr lang="de-DE" b="0" dirty="0">
+              <a:rPr lang="de-DE" sz="2000" b="0" dirty="0">
                 <a:solidFill>
                   <a:srgbClr val="023B95"/>
                 </a:solidFill>
@@ -50540,7 +50748,7 @@
               <a:t>50%</a:t>
             </a:r>
             <a:r>
-              <a:rPr lang="de-DE" b="0" dirty="0">
+              <a:rPr lang="de-DE" sz="2000" b="0" dirty="0">
                 <a:solidFill>
                   <a:srgbClr val="0E1116"/>
                 </a:solidFill>
@@ -50550,7 +50758,7 @@
               <a:t>      { </a:t>
             </a:r>
             <a:r>
-              <a:rPr lang="de-DE" b="0" dirty="0">
+              <a:rPr lang="de-DE" sz="2000" b="0" dirty="0">
                 <a:solidFill>
                   <a:srgbClr val="023B95"/>
                 </a:solidFill>
@@ -50560,87 +50768,17 @@
               <a:t>box-shadow</a:t>
             </a:r>
             <a:r>
-              <a:rPr lang="de-DE" b="0" dirty="0">
+              <a:rPr lang="de-DE" sz="2000" b="0" dirty="0">
                 <a:solidFill>
                   <a:srgbClr val="0E1116"/>
                 </a:solidFill>
                 <a:effectLst/>
                 <a:latin typeface="Consolas" panose="020B0609020204030204" pitchFamily="49" charset="0"/>
               </a:rPr>
-              <a:t>: </a:t>
+              <a:t>: 0 0 10px </a:t>
             </a:r>
             <a:r>
-              <a:rPr lang="de-DE" b="0" dirty="0">
-                <a:solidFill>
-                  <a:srgbClr val="023B95"/>
-                </a:solidFill>
-                <a:effectLst/>
-                <a:latin typeface="Consolas" panose="020B0609020204030204" pitchFamily="49" charset="0"/>
-              </a:rPr>
-              <a:t>0</a:t>
-            </a:r>
-            <a:r>
-              <a:rPr lang="de-DE" b="0" dirty="0">
-                <a:solidFill>
-                  <a:srgbClr val="0E1116"/>
-                </a:solidFill>
-                <a:effectLst/>
-                <a:latin typeface="Consolas" panose="020B0609020204030204" pitchFamily="49" charset="0"/>
-              </a:rPr>
-              <a:t> </a:t>
-            </a:r>
-            <a:r>
-              <a:rPr lang="de-DE" b="0" dirty="0">
-                <a:solidFill>
-                  <a:srgbClr val="023B95"/>
-                </a:solidFill>
-                <a:effectLst/>
-                <a:latin typeface="Consolas" panose="020B0609020204030204" pitchFamily="49" charset="0"/>
-              </a:rPr>
-              <a:t>0</a:t>
-            </a:r>
-            <a:r>
-              <a:rPr lang="de-DE" b="0" dirty="0">
-                <a:solidFill>
-                  <a:srgbClr val="0E1116"/>
-                </a:solidFill>
-                <a:effectLst/>
-                <a:latin typeface="Consolas" panose="020B0609020204030204" pitchFamily="49" charset="0"/>
-              </a:rPr>
-              <a:t> </a:t>
-            </a:r>
-            <a:r>
-              <a:rPr lang="de-DE" b="0" dirty="0">
-                <a:solidFill>
-                  <a:srgbClr val="023B95"/>
-                </a:solidFill>
-                <a:effectLst/>
-                <a:latin typeface="Consolas" panose="020B0609020204030204" pitchFamily="49" charset="0"/>
-              </a:rPr>
-              <a:t>20</a:t>
-            </a:r>
-            <a:r>
-              <a:rPr lang="de-DE" b="0" dirty="0">
-                <a:solidFill>
-                  <a:srgbClr val="A0111F"/>
-                </a:solidFill>
-                <a:effectLst/>
-                <a:latin typeface="Consolas" panose="020B0609020204030204" pitchFamily="49" charset="0"/>
-              </a:rPr>
-              <a:t>px</a:t>
-            </a:r>
-            <a:r>
-              <a:rPr lang="de-DE" b="0" dirty="0">
-                <a:solidFill>
-                  <a:srgbClr val="0E1116"/>
-                </a:solidFill>
-                <a:effectLst/>
-                <a:latin typeface="Consolas" panose="020B0609020204030204" pitchFamily="49" charset="0"/>
-              </a:rPr>
-              <a:t> </a:t>
-            </a:r>
-            <a:r>
-              <a:rPr lang="de-DE" b="0" dirty="0">
+              <a:rPr lang="de-DE" sz="2000" b="0" dirty="0">
                 <a:solidFill>
                   <a:srgbClr val="023B95"/>
                 </a:solidFill>
@@ -50650,7 +50788,7 @@
               <a:t>rgba</a:t>
             </a:r>
             <a:r>
-              <a:rPr lang="de-DE" b="0" dirty="0">
+              <a:rPr lang="de-DE" sz="2000" b="0" dirty="0">
                 <a:solidFill>
                   <a:srgbClr val="0E1116"/>
                 </a:solidFill>
@@ -50660,17 +50798,17 @@
               <a:t>(</a:t>
             </a:r>
             <a:r>
-              <a:rPr lang="de-DE" b="0" dirty="0">
+              <a:rPr lang="de-DE" sz="2000" b="0" dirty="0">
                 <a:solidFill>
                   <a:srgbClr val="023B95"/>
                 </a:solidFill>
                 <a:effectLst/>
                 <a:latin typeface="Consolas" panose="020B0609020204030204" pitchFamily="49" charset="0"/>
               </a:rPr>
-              <a:t>59</a:t>
+              <a:t>50</a:t>
             </a:r>
             <a:r>
-              <a:rPr lang="de-DE" b="0" dirty="0">
+              <a:rPr lang="de-DE" sz="2000" b="0" dirty="0">
                 <a:solidFill>
                   <a:srgbClr val="0E1116"/>
                 </a:solidFill>
@@ -50680,7 +50818,7 @@
               <a:t>, </a:t>
             </a:r>
             <a:r>
-              <a:rPr lang="de-DE" b="0" dirty="0">
+              <a:rPr lang="de-DE" sz="2000" b="0" dirty="0">
                 <a:solidFill>
                   <a:srgbClr val="023B95"/>
                 </a:solidFill>
@@ -50690,7 +50828,7 @@
               <a:t>130</a:t>
             </a:r>
             <a:r>
-              <a:rPr lang="de-DE" b="0" dirty="0">
+              <a:rPr lang="de-DE" sz="2000" b="0" dirty="0">
                 <a:solidFill>
                   <a:srgbClr val="0E1116"/>
                 </a:solidFill>
@@ -50700,7 +50838,7 @@
               <a:t>, </a:t>
             </a:r>
             <a:r>
-              <a:rPr lang="de-DE" b="0" dirty="0">
+              <a:rPr lang="de-DE" sz="2000" b="0" dirty="0">
                 <a:solidFill>
                   <a:srgbClr val="023B95"/>
                 </a:solidFill>
@@ -50710,7 +50848,7 @@
               <a:t>246</a:t>
             </a:r>
             <a:r>
-              <a:rPr lang="de-DE" b="0" dirty="0">
+              <a:rPr lang="de-DE" sz="2000" b="0" dirty="0">
                 <a:solidFill>
                   <a:srgbClr val="0E1116"/>
                 </a:solidFill>
@@ -50720,7 +50858,7 @@
               <a:t>, </a:t>
             </a:r>
             <a:r>
-              <a:rPr lang="de-DE" b="0" dirty="0">
+              <a:rPr lang="de-DE" sz="2000" b="0" dirty="0">
                 <a:solidFill>
                   <a:srgbClr val="023B95"/>
                 </a:solidFill>
@@ -50730,7 +50868,7 @@
               <a:t>0.6</a:t>
             </a:r>
             <a:r>
-              <a:rPr lang="de-DE" b="0" dirty="0">
+              <a:rPr lang="de-DE" sz="2000" b="0" dirty="0">
                 <a:solidFill>
                   <a:srgbClr val="0E1116"/>
                 </a:solidFill>
@@ -50748,14 +50886,14 @@
               <a:buNone/>
             </a:pPr>
             <a:r>
-              <a:rPr lang="de-DE" b="0" dirty="0">
+              <a:rPr lang="de-DE" sz="2000" b="0" dirty="0">
                 <a:solidFill>
                   <a:srgbClr val="0E1116"/>
                 </a:solidFill>
                 <a:effectLst/>
                 <a:latin typeface="Consolas" panose="020B0609020204030204" pitchFamily="49" charset="0"/>
               </a:rPr>
-              <a:t>}</a:t>
+              <a:t>9  }</a:t>
             </a:r>
           </a:p>
           <a:p>
@@ -50766,17 +50904,24 @@
               <a:buNone/>
             </a:pPr>
             <a:r>
-              <a:rPr lang="de-DE" b="0" dirty="0">
-                <a:solidFill>
-                  <a:srgbClr val="023B95"/>
-                </a:solidFill>
+              <a:rPr lang="de-DE" sz="2000" b="0" dirty="0">
                 <a:effectLst/>
                 <a:latin typeface="Consolas" panose="020B0609020204030204" pitchFamily="49" charset="0"/>
               </a:rPr>
-              <a:t>.box--chained</a:t>
+              <a:t>10</a:t>
             </a:r>
             <a:r>
-              <a:rPr lang="de-DE" b="0" dirty="0">
+              <a:rPr lang="de-DE" sz="2000" b="0" dirty="0">
+                <a:solidFill>
+                  <a:srgbClr val="023B95"/>
+                </a:solidFill>
+                <a:effectLst/>
+                <a:latin typeface="Consolas" panose="020B0609020204030204" pitchFamily="49" charset="0"/>
+              </a:rPr>
+              <a:t> .box--chained</a:t>
+            </a:r>
+            <a:r>
+              <a:rPr lang="de-DE" sz="2000" b="0" dirty="0">
                 <a:solidFill>
                   <a:srgbClr val="0E1116"/>
                 </a:solidFill>
@@ -50794,17 +50939,17 @@
               <a:buNone/>
             </a:pPr>
             <a:r>
-              <a:rPr lang="de-DE" b="0" dirty="0">
+              <a:rPr lang="de-DE" sz="2000" b="0" dirty="0">
                 <a:solidFill>
                   <a:srgbClr val="0E1116"/>
                 </a:solidFill>
                 <a:effectLst/>
                 <a:latin typeface="Consolas" panose="020B0609020204030204" pitchFamily="49" charset="0"/>
               </a:rPr>
-              <a:t>  </a:t>
+              <a:t>11 </a:t>
             </a:r>
             <a:r>
-              <a:rPr lang="de-DE" b="0" dirty="0">
+              <a:rPr lang="de-DE" sz="2000" b="0" dirty="0">
                 <a:solidFill>
                   <a:srgbClr val="023B95"/>
                 </a:solidFill>
@@ -50814,7 +50959,7 @@
               <a:t>animation</a:t>
             </a:r>
             <a:r>
-              <a:rPr lang="de-DE" b="0" dirty="0">
+              <a:rPr lang="de-DE" sz="2000" b="0" dirty="0">
                 <a:solidFill>
                   <a:srgbClr val="0E1116"/>
                 </a:solidFill>
@@ -50824,7 +50969,7 @@
               <a:t>: float </a:t>
             </a:r>
             <a:r>
-              <a:rPr lang="de-DE" b="0" dirty="0">
+              <a:rPr lang="de-DE" sz="2000" b="0" dirty="0">
                 <a:solidFill>
                   <a:srgbClr val="023B95"/>
                 </a:solidFill>
@@ -50834,7 +50979,7 @@
               <a:t>2</a:t>
             </a:r>
             <a:r>
-              <a:rPr lang="de-DE" b="0" dirty="0">
+              <a:rPr lang="de-DE" sz="2000" b="0" dirty="0">
                 <a:solidFill>
                   <a:srgbClr val="A0111F"/>
                 </a:solidFill>
@@ -50844,7 +50989,7 @@
               <a:t>s</a:t>
             </a:r>
             <a:r>
-              <a:rPr lang="de-DE" b="0" dirty="0">
+              <a:rPr lang="de-DE" sz="2000" b="0" dirty="0">
                 <a:solidFill>
                   <a:srgbClr val="0E1116"/>
                 </a:solidFill>
@@ -50854,7 +50999,7 @@
               <a:t> </a:t>
             </a:r>
             <a:r>
-              <a:rPr lang="de-DE" b="0" dirty="0">
+              <a:rPr lang="de-DE" sz="2000" b="0" dirty="0">
                 <a:solidFill>
                   <a:srgbClr val="023B95"/>
                 </a:solidFill>
@@ -50864,7 +51009,7 @@
               <a:t>ease-in-out</a:t>
             </a:r>
             <a:r>
-              <a:rPr lang="de-DE" b="0" dirty="0">
+              <a:rPr lang="de-DE" sz="2000" b="0" dirty="0">
                 <a:solidFill>
                   <a:srgbClr val="0E1116"/>
                 </a:solidFill>
@@ -50874,7 +51019,7 @@
               <a:t> </a:t>
             </a:r>
             <a:r>
-              <a:rPr lang="de-DE" b="0" dirty="0">
+              <a:rPr lang="de-DE" sz="2000" b="0" dirty="0">
                 <a:solidFill>
                   <a:srgbClr val="023B95"/>
                 </a:solidFill>
@@ -50884,7 +51029,7 @@
               <a:t>infinite</a:t>
             </a:r>
             <a:r>
-              <a:rPr lang="de-DE" b="0" dirty="0">
+              <a:rPr lang="de-DE" sz="2000" b="0" dirty="0">
                 <a:solidFill>
                   <a:srgbClr val="0E1116"/>
                 </a:solidFill>
@@ -50894,7 +51039,7 @@
               <a:t>, glow </a:t>
             </a:r>
             <a:r>
-              <a:rPr lang="de-DE" b="0" dirty="0">
+              <a:rPr lang="de-DE" sz="2000" b="0" dirty="0">
                 <a:solidFill>
                   <a:srgbClr val="023B95"/>
                 </a:solidFill>
@@ -50904,7 +51049,7 @@
               <a:t>3</a:t>
             </a:r>
             <a:r>
-              <a:rPr lang="de-DE" b="0" dirty="0">
+              <a:rPr lang="de-DE" sz="2000" b="0" dirty="0">
                 <a:solidFill>
                   <a:srgbClr val="A0111F"/>
                 </a:solidFill>
@@ -50914,7 +51059,7 @@
               <a:t>s</a:t>
             </a:r>
             <a:r>
-              <a:rPr lang="de-DE" b="0" dirty="0">
+              <a:rPr lang="de-DE" sz="2000" b="0" dirty="0">
                 <a:solidFill>
                   <a:srgbClr val="0E1116"/>
                 </a:solidFill>
@@ -50924,7 +51069,7 @@
               <a:t> </a:t>
             </a:r>
             <a:r>
-              <a:rPr lang="de-DE" b="0" dirty="0">
+              <a:rPr lang="de-DE" sz="2000" b="0" dirty="0">
                 <a:solidFill>
                   <a:srgbClr val="023B95"/>
                 </a:solidFill>
@@ -50934,17 +51079,17 @@
               <a:t>ease-in-out</a:t>
             </a:r>
             <a:r>
-              <a:rPr lang="de-DE" b="0" dirty="0">
+              <a:rPr lang="de-DE" sz="2000" b="0" dirty="0">
                 <a:solidFill>
                   <a:srgbClr val="0E1116"/>
                 </a:solidFill>
                 <a:effectLst/>
                 <a:latin typeface="Consolas" panose="020B0609020204030204" pitchFamily="49" charset="0"/>
               </a:rPr>
-              <a:t> </a:t>
+              <a:t> 12 </a:t>
             </a:r>
             <a:r>
-              <a:rPr lang="de-DE" b="0" dirty="0">
+              <a:rPr lang="de-DE" sz="2000" b="0" dirty="0">
                 <a:solidFill>
                   <a:srgbClr val="023B95"/>
                 </a:solidFill>
@@ -50954,7 +51099,7 @@
               <a:t>infinite</a:t>
             </a:r>
             <a:r>
-              <a:rPr lang="de-DE" b="0" dirty="0">
+              <a:rPr lang="de-DE" sz="2000" b="0" dirty="0">
                 <a:solidFill>
                   <a:srgbClr val="0E1116"/>
                 </a:solidFill>
@@ -50972,14 +51117,14 @@
               <a:buNone/>
             </a:pPr>
             <a:r>
-              <a:rPr lang="de-DE" b="0" dirty="0">
+              <a:rPr lang="de-DE" sz="2000" b="0" dirty="0">
                 <a:solidFill>
                   <a:srgbClr val="0E1116"/>
                 </a:solidFill>
                 <a:effectLst/>
                 <a:latin typeface="Consolas" panose="020B0609020204030204" pitchFamily="49" charset="0"/>
               </a:rPr>
-              <a:t>}</a:t>
+              <a:t>13 }</a:t>
             </a:r>
           </a:p>
           <a:p>
@@ -51088,6 +51233,360 @@
     </p:spTree>
     <p:extLst>
       <p:ext uri="{BB962C8B-B14F-4D97-AF65-F5344CB8AC3E}">
+        <p14:creationId xmlns:p14="http://schemas.microsoft.com/office/powerpoint/2010/main" val="1455364464"/>
+      </p:ext>
+    </p:extLst>
+  </p:cSld>
+  <p:clrMapOvr>
+    <a:masterClrMapping/>
+  </p:clrMapOvr>
+</p:sld>
+</file>
+
+<file path=ppt/slides/slide6.xml><?xml version="1.0" encoding="utf-8"?>
+<p:sld xmlns:a="http://schemas.openxmlformats.org/drawingml/2006/main" xmlns:r="http://schemas.openxmlformats.org/officeDocument/2006/relationships" xmlns:p="http://schemas.openxmlformats.org/presentationml/2006/main">
+  <p:cSld>
+    <p:spTree>
+      <p:nvGrpSpPr>
+        <p:cNvPr id="1" name="Shape 426">
+          <a:extLst>
+            <a:ext uri="{FF2B5EF4-FFF2-40B4-BE49-F238E27FC236}">
+              <a16:creationId xmlns:a16="http://schemas.microsoft.com/office/drawing/2014/main" id="{8A832A7B-2933-908D-C87C-B07FE7A164A5}"/>
+            </a:ext>
+          </a:extLst>
+        </p:cNvPr>
+        <p:cNvGrpSpPr/>
+        <p:nvPr/>
+      </p:nvGrpSpPr>
+      <p:grpSpPr>
+        <a:xfrm>
+          <a:off x="0" y="0"/>
+          <a:ext cx="0" cy="0"/>
+          <a:chOff x="0" y="0"/>
+          <a:chExt cx="0" cy="0"/>
+        </a:xfrm>
+      </p:grpSpPr>
+      <p:sp>
+        <p:nvSpPr>
+          <p:cNvPr id="4" name="Title 1">
+            <a:extLst>
+              <a:ext uri="{FF2B5EF4-FFF2-40B4-BE49-F238E27FC236}">
+                <a16:creationId xmlns:a16="http://schemas.microsoft.com/office/drawing/2014/main" id="{4C9AD611-CB7F-9264-4D1F-E80FA8342A79}"/>
+              </a:ext>
+            </a:extLst>
+          </p:cNvPr>
+          <p:cNvSpPr txBox="1">
+            <a:spLocks/>
+          </p:cNvSpPr>
+          <p:nvPr/>
+        </p:nvSpPr>
+        <p:spPr>
+          <a:xfrm>
+            <a:off x="190500" y="288925"/>
+            <a:ext cx="6054852" cy="625475"/>
+          </a:xfrm>
+          <a:prstGeom prst="rect">
+            <a:avLst/>
+          </a:prstGeom>
+        </p:spPr>
+        <p:txBody>
+          <a:bodyPr spcFirstLastPara="1" vert="horz" wrap="square" lIns="91425" tIns="91425" rIns="91425" bIns="91425" rtlCol="0" anchor="b" anchorCtr="0">
+            <a:noAutofit/>
+          </a:bodyPr>
+          <a:lstStyle>
+            <a:lvl1pPr lvl="0" algn="ctr" defTabSz="914400" rtl="0" eaLnBrk="1" latinLnBrk="0" hangingPunct="1">
+              <a:lnSpc>
+                <a:spcPct val="90000"/>
+              </a:lnSpc>
+              <a:spcBef>
+                <a:spcPts val="0"/>
+              </a:spcBef>
+              <a:spcAft>
+                <a:spcPts val="0"/>
+              </a:spcAft>
+              <a:buSzPts val="2400"/>
+              <a:buNone/>
+              <a:defRPr sz="3200" kern="1200">
+                <a:solidFill>
+                  <a:schemeClr val="tx1"/>
+                </a:solidFill>
+                <a:latin typeface="+mj-lt"/>
+                <a:ea typeface="+mj-ea"/>
+                <a:cs typeface="+mj-cs"/>
+              </a:defRPr>
+            </a:lvl1pPr>
+            <a:lvl2pPr lvl="1" algn="ctr">
+              <a:spcBef>
+                <a:spcPts val="0"/>
+              </a:spcBef>
+              <a:spcAft>
+                <a:spcPts val="0"/>
+              </a:spcAft>
+              <a:buSzPts val="2400"/>
+              <a:buNone/>
+              <a:defRPr sz="3200"/>
+            </a:lvl2pPr>
+            <a:lvl3pPr lvl="2" algn="ctr">
+              <a:spcBef>
+                <a:spcPts val="0"/>
+              </a:spcBef>
+              <a:spcAft>
+                <a:spcPts val="0"/>
+              </a:spcAft>
+              <a:buSzPts val="2400"/>
+              <a:buNone/>
+              <a:defRPr sz="3200"/>
+            </a:lvl3pPr>
+            <a:lvl4pPr lvl="3" algn="ctr">
+              <a:spcBef>
+                <a:spcPts val="0"/>
+              </a:spcBef>
+              <a:spcAft>
+                <a:spcPts val="0"/>
+              </a:spcAft>
+              <a:buSzPts val="2400"/>
+              <a:buNone/>
+              <a:defRPr sz="3200"/>
+            </a:lvl4pPr>
+            <a:lvl5pPr lvl="4" algn="ctr">
+              <a:spcBef>
+                <a:spcPts val="0"/>
+              </a:spcBef>
+              <a:spcAft>
+                <a:spcPts val="0"/>
+              </a:spcAft>
+              <a:buSzPts val="2400"/>
+              <a:buNone/>
+              <a:defRPr sz="3200"/>
+            </a:lvl5pPr>
+            <a:lvl6pPr lvl="5" algn="ctr">
+              <a:spcBef>
+                <a:spcPts val="0"/>
+              </a:spcBef>
+              <a:spcAft>
+                <a:spcPts val="0"/>
+              </a:spcAft>
+              <a:buSzPts val="2400"/>
+              <a:buNone/>
+              <a:defRPr sz="3200"/>
+            </a:lvl6pPr>
+            <a:lvl7pPr lvl="6" algn="ctr">
+              <a:spcBef>
+                <a:spcPts val="0"/>
+              </a:spcBef>
+              <a:spcAft>
+                <a:spcPts val="0"/>
+              </a:spcAft>
+              <a:buSzPts val="2400"/>
+              <a:buNone/>
+              <a:defRPr sz="3200"/>
+            </a:lvl7pPr>
+            <a:lvl8pPr lvl="7" algn="ctr">
+              <a:spcBef>
+                <a:spcPts val="0"/>
+              </a:spcBef>
+              <a:spcAft>
+                <a:spcPts val="0"/>
+              </a:spcAft>
+              <a:buSzPts val="2400"/>
+              <a:buNone/>
+              <a:defRPr sz="3200"/>
+            </a:lvl8pPr>
+            <a:lvl9pPr lvl="8" algn="ctr">
+              <a:spcBef>
+                <a:spcPts val="0"/>
+              </a:spcBef>
+              <a:spcAft>
+                <a:spcPts val="0"/>
+              </a:spcAft>
+              <a:buSzPts val="2400"/>
+              <a:buNone/>
+              <a:defRPr sz="3200"/>
+            </a:lvl9pPr>
+          </a:lstStyle>
+          <a:p>
+            <a:r>
+              <a:rPr lang="de-DE" b="1" dirty="0"/>
+              <a:t>Best Practices für Animationen</a:t>
+            </a:r>
+          </a:p>
+        </p:txBody>
+      </p:sp>
+      <p:sp>
+        <p:nvSpPr>
+          <p:cNvPr id="2" name="TextBox 1">
+            <a:extLst>
+              <a:ext uri="{FF2B5EF4-FFF2-40B4-BE49-F238E27FC236}">
+                <a16:creationId xmlns:a16="http://schemas.microsoft.com/office/drawing/2014/main" id="{11F0C13B-3AE9-CB48-36DD-A95A6684D3E8}"/>
+              </a:ext>
+            </a:extLst>
+          </p:cNvPr>
+          <p:cNvSpPr txBox="1"/>
+          <p:nvPr/>
+        </p:nvSpPr>
+        <p:spPr>
+          <a:xfrm>
+            <a:off x="11878056" y="6506956"/>
+            <a:ext cx="1307592" cy="369332"/>
+          </a:xfrm>
+          <a:prstGeom prst="rect">
+            <a:avLst/>
+          </a:prstGeom>
+          <a:noFill/>
+        </p:spPr>
+        <p:txBody>
+          <a:bodyPr wrap="square" rtlCol="0">
+            <a:spAutoFit/>
+          </a:bodyPr>
+          <a:lstStyle/>
+          <a:p>
+            <a:r>
+              <a:rPr lang="de-DE" dirty="0"/>
+              <a:t>5</a:t>
+            </a:r>
+          </a:p>
+        </p:txBody>
+      </p:sp>
+      <p:sp>
+        <p:nvSpPr>
+          <p:cNvPr id="9" name="TextBox 8">
+            <a:extLst>
+              <a:ext uri="{FF2B5EF4-FFF2-40B4-BE49-F238E27FC236}">
+                <a16:creationId xmlns:a16="http://schemas.microsoft.com/office/drawing/2014/main" id="{C98678A6-6983-6D75-BE09-D393A5F31071}"/>
+              </a:ext>
+            </a:extLst>
+          </p:cNvPr>
+          <p:cNvSpPr txBox="1"/>
+          <p:nvPr/>
+        </p:nvSpPr>
+        <p:spPr>
+          <a:xfrm>
+            <a:off x="995172" y="1677799"/>
+            <a:ext cx="10882884" cy="4154984"/>
+          </a:xfrm>
+          <a:prstGeom prst="rect">
+            <a:avLst/>
+          </a:prstGeom>
+          <a:noFill/>
+        </p:spPr>
+        <p:txBody>
+          <a:bodyPr wrap="square">
+            <a:spAutoFit/>
+          </a:bodyPr>
+          <a:lstStyle/>
+          <a:p>
+            <a:r>
+              <a:rPr lang="de-DE" sz="2400" b="1" dirty="0">
+                <a:solidFill>
+                  <a:srgbClr val="000000"/>
+                </a:solidFill>
+                <a:latin typeface="Consolas" panose="020B0609020204030204" pitchFamily="49" charset="0"/>
+              </a:rPr>
+              <a:t>Nur transform und opacity animieren</a:t>
+            </a:r>
+            <a:r>
+              <a:rPr lang="de-DE" sz="2400" dirty="0">
+                <a:solidFill>
+                  <a:srgbClr val="000000"/>
+                </a:solidFill>
+                <a:latin typeface="Consolas" panose="020B0609020204030204" pitchFamily="49" charset="0"/>
+              </a:rPr>
+              <a:t> (GPU-beschleunigt)</a:t>
+            </a:r>
+          </a:p>
+          <a:p>
+            <a:endParaRPr lang="de-DE" sz="2400" dirty="0">
+              <a:solidFill>
+                <a:srgbClr val="000000"/>
+              </a:solidFill>
+              <a:latin typeface="Consolas" panose="020B0609020204030204" pitchFamily="49" charset="0"/>
+            </a:endParaRPr>
+          </a:p>
+          <a:p>
+            <a:r>
+              <a:rPr lang="de-DE" sz="2400" b="1" dirty="0">
+                <a:solidFill>
+                  <a:srgbClr val="000000"/>
+                </a:solidFill>
+                <a:latin typeface="Consolas" panose="020B0609020204030204" pitchFamily="49" charset="0"/>
+              </a:rPr>
+              <a:t>width, height, margin vermeiden </a:t>
+            </a:r>
+            <a:r>
+              <a:rPr lang="de-DE" sz="2400" dirty="0">
+                <a:solidFill>
+                  <a:srgbClr val="000000"/>
+                </a:solidFill>
+                <a:latin typeface="Consolas" panose="020B0609020204030204" pitchFamily="49" charset="0"/>
+              </a:rPr>
+              <a:t>(löst Layout-Neuberechnung aus)</a:t>
+            </a:r>
+          </a:p>
+          <a:p>
+            <a:endParaRPr lang="de-DE" sz="2400" dirty="0">
+              <a:solidFill>
+                <a:srgbClr val="000000"/>
+              </a:solidFill>
+              <a:latin typeface="Consolas" panose="020B0609020204030204" pitchFamily="49" charset="0"/>
+            </a:endParaRPr>
+          </a:p>
+          <a:p>
+            <a:r>
+              <a:rPr lang="de-DE" sz="2400" b="1" dirty="0">
+                <a:solidFill>
+                  <a:srgbClr val="000000"/>
+                </a:solidFill>
+                <a:latin typeface="Consolas" panose="020B0609020204030204" pitchFamily="49" charset="0"/>
+              </a:rPr>
+              <a:t>Dauer und Timing sinnvoll wählen</a:t>
+            </a:r>
+          </a:p>
+          <a:p>
+            <a:r>
+              <a:rPr lang="de-DE" sz="2400" dirty="0">
+                <a:solidFill>
+                  <a:srgbClr val="000000"/>
+                </a:solidFill>
+                <a:latin typeface="Consolas" panose="020B0609020204030204" pitchFamily="49" charset="0"/>
+              </a:rPr>
+              <a:t>Kurze und natürliche Bewegungen (z. B. 150–300 ms) wirken flüssiger und angenehmer.</a:t>
+            </a:r>
+          </a:p>
+          <a:p>
+            <a:endParaRPr lang="de-DE" sz="2400" dirty="0">
+              <a:solidFill>
+                <a:srgbClr val="000000"/>
+              </a:solidFill>
+              <a:latin typeface="Consolas" panose="020B0609020204030204" pitchFamily="49" charset="0"/>
+            </a:endParaRPr>
+          </a:p>
+          <a:p>
+            <a:r>
+              <a:rPr lang="de-DE" sz="2400" b="1" dirty="0">
+                <a:solidFill>
+                  <a:srgbClr val="000000"/>
+                </a:solidFill>
+                <a:latin typeface="Consolas" panose="020B0609020204030204" pitchFamily="49" charset="0"/>
+              </a:rPr>
+              <a:t>Animationen sparsam einsetzen</a:t>
+            </a:r>
+          </a:p>
+          <a:p>
+            <a:r>
+              <a:rPr lang="de-DE" sz="2400" dirty="0">
+                <a:solidFill>
+                  <a:srgbClr val="000000"/>
+                </a:solidFill>
+                <a:latin typeface="Consolas" panose="020B0609020204030204" pitchFamily="49" charset="0"/>
+              </a:rPr>
+              <a:t>Zu viele Animationen gleichzeitig können Performance und Nutzererlebnis verschlechtern.</a:t>
+            </a:r>
+          </a:p>
+        </p:txBody>
+      </p:sp>
+    </p:spTree>
+    <p:extLst>
+      <p:ext uri="{BB962C8B-B14F-4D97-AF65-F5344CB8AC3E}">
         <p14:creationId xmlns:p14="http://schemas.microsoft.com/office/powerpoint/2010/main" val="3714839329"/>
       </p:ext>
     </p:extLst>
@@ -51098,7 +51597,7 @@
 </p:sld>
 </file>
 
-<file path=ppt/slides/slide6.xml><?xml version="1.0" encoding="utf-8"?>
+<file path=ppt/slides/slide7.xml><?xml version="1.0" encoding="utf-8"?>
 <p:sld xmlns:a="http://schemas.openxmlformats.org/drawingml/2006/main" xmlns:r="http://schemas.openxmlformats.org/officeDocument/2006/relationships" xmlns:p="http://schemas.openxmlformats.org/presentationml/2006/main">
   <p:cSld>
     <p:spTree>
@@ -51297,8 +51796,542 @@
           <a:p>
             <a:r>
               <a:rPr lang="de-DE" dirty="0"/>
-              <a:t>5</a:t>
+              <a:t>6</a:t>
             </a:r>
+          </a:p>
+        </p:txBody>
+      </p:sp>
+      <p:sp>
+        <p:nvSpPr>
+          <p:cNvPr id="3" name="Rectangle 1">
+            <a:extLst>
+              <a:ext uri="{FF2B5EF4-FFF2-40B4-BE49-F238E27FC236}">
+                <a16:creationId xmlns:a16="http://schemas.microsoft.com/office/drawing/2014/main" id="{03BBEBEA-7E0B-5B2C-0A45-12E4CD503837}"/>
+              </a:ext>
+            </a:extLst>
+          </p:cNvPr>
+          <p:cNvSpPr>
+            <a:spLocks noChangeArrowheads="1"/>
+          </p:cNvSpPr>
+          <p:nvPr/>
+        </p:nvSpPr>
+        <p:spPr bwMode="auto">
+          <a:xfrm>
+            <a:off x="886968" y="1228400"/>
+            <a:ext cx="8708538" cy="4401205"/>
+          </a:xfrm>
+          <a:prstGeom prst="rect">
+            <a:avLst/>
+          </a:prstGeom>
+          <a:noFill/>
+          <a:ln>
+            <a:noFill/>
+          </a:ln>
+          <a:effectLst/>
+          <a:extLst>
+            <a:ext uri="{909E8E84-426E-40DD-AFC4-6F175D3DCCD1}">
+              <a14:hiddenFill xmlns:a14="http://schemas.microsoft.com/office/drawing/2010/main">
+                <a:solidFill>
+                  <a:schemeClr val="accent1"/>
+                </a:solidFill>
+              </a14:hiddenFill>
+            </a:ext>
+            <a:ext uri="{91240B29-F687-4F45-9708-019B960494DF}">
+              <a14:hiddenLine xmlns:a14="http://schemas.microsoft.com/office/drawing/2010/main" w="9525">
+                <a:solidFill>
+                  <a:schemeClr val="tx1"/>
+                </a:solidFill>
+                <a:miter lim="800000"/>
+                <a:headEnd/>
+                <a:tailEnd/>
+              </a14:hiddenLine>
+            </a:ext>
+            <a:ext uri="{AF507438-7753-43E0-B8FC-AC1667EBCBE1}">
+              <a14:hiddenEffects xmlns:a14="http://schemas.microsoft.com/office/drawing/2010/main">
+                <a:effectLst>
+                  <a:outerShdw dist="35921" dir="2700000" algn="ctr" rotWithShape="0">
+                    <a:schemeClr val="bg2"/>
+                  </a:outerShdw>
+                </a:effectLst>
+              </a14:hiddenEffects>
+            </a:ext>
+          </a:extLst>
+        </p:spPr>
+        <p:txBody>
+          <a:bodyPr vert="horz" wrap="none" lIns="91440" tIns="45720" rIns="91440" bIns="45720" numCol="1" anchor="ctr" anchorCtr="0" compatLnSpc="1">
+            <a:prstTxWarp prst="textNoShape">
+              <a:avLst/>
+            </a:prstTxWarp>
+            <a:spAutoFit/>
+          </a:bodyPr>
+          <a:lstStyle/>
+          <a:p>
+            <a:pPr marL="0" marR="0" lvl="0" indent="0" algn="l" defTabSz="914400" rtl="0" eaLnBrk="0" fontAlgn="base" latinLnBrk="0" hangingPunct="0">
+              <a:lnSpc>
+                <a:spcPct val="100000"/>
+              </a:lnSpc>
+              <a:spcBef>
+                <a:spcPct val="0"/>
+              </a:spcBef>
+              <a:spcAft>
+                <a:spcPct val="0"/>
+              </a:spcAft>
+              <a:buClrTx/>
+              <a:buSzTx/>
+              <a:tabLst/>
+            </a:pPr>
+            <a:r>
+              <a:rPr kumimoji="0" lang="de-DE" altLang="de-DE" sz="1800" b="1" i="0" u="none" strike="noStrike" cap="none" normalizeH="0" baseline="0" dirty="0">
+                <a:ln>
+                  <a:noFill/>
+                </a:ln>
+                <a:solidFill>
+                  <a:schemeClr val="tx1"/>
+                </a:solidFill>
+                <a:effectLst/>
+                <a:latin typeface="Arial" panose="020B0604020202020204" pitchFamily="34" charset="0"/>
+              </a:rPr>
+              <a:t>MDN Web Docs - </a:t>
+            </a:r>
+            <a:r>
+              <a:rPr kumimoji="0" lang="de-DE" altLang="de-DE" sz="1800" b="1" i="1" u="none" strike="noStrike" cap="none" normalizeH="0" baseline="0" dirty="0">
+                <a:ln>
+                  <a:noFill/>
+                </a:ln>
+                <a:solidFill>
+                  <a:schemeClr val="tx1"/>
+                </a:solidFill>
+                <a:effectLst/>
+                <a:latin typeface="Arial" panose="020B0604020202020204" pitchFamily="34" charset="0"/>
+              </a:rPr>
+              <a:t>CSS animation Property</a:t>
+            </a:r>
+            <a:br>
+              <a:rPr kumimoji="0" lang="de-DE" altLang="de-DE" sz="1800" b="0" i="0" u="none" strike="noStrike" cap="none" normalizeH="0" baseline="0" dirty="0">
+                <a:ln>
+                  <a:noFill/>
+                </a:ln>
+                <a:solidFill>
+                  <a:schemeClr val="tx1"/>
+                </a:solidFill>
+                <a:effectLst/>
+                <a:latin typeface="Arial" panose="020B0604020202020204" pitchFamily="34" charset="0"/>
+              </a:rPr>
+            </a:br>
+            <a:r>
+              <a:rPr kumimoji="0" lang="de-DE" altLang="de-DE" sz="1800" b="0" i="0" u="none" strike="noStrike" cap="none" normalizeH="0" baseline="0" dirty="0">
+                <a:ln>
+                  <a:noFill/>
+                </a:ln>
+                <a:solidFill>
+                  <a:schemeClr val="tx1"/>
+                </a:solidFill>
+                <a:effectLst/>
+                <a:latin typeface="Arial" panose="020B0604020202020204" pitchFamily="34" charset="0"/>
+                <a:hlinkClick r:id="rId3"/>
+              </a:rPr>
+              <a:t>https://developer.mozilla.org/en-US/docs/Web/CSS/Reference/Properties/animation</a:t>
+            </a:r>
+            <a:endParaRPr kumimoji="0" lang="de-DE" altLang="de-DE" sz="1800" b="0" i="0" u="none" strike="noStrike" cap="none" normalizeH="0" baseline="0" dirty="0">
+              <a:ln>
+                <a:noFill/>
+              </a:ln>
+              <a:solidFill>
+                <a:schemeClr val="tx1"/>
+              </a:solidFill>
+              <a:effectLst/>
+              <a:latin typeface="Arial" panose="020B0604020202020204" pitchFamily="34" charset="0"/>
+            </a:endParaRPr>
+          </a:p>
+          <a:p>
+            <a:pPr marL="0" marR="0" lvl="0" indent="0" algn="l" defTabSz="914400" rtl="0" eaLnBrk="0" fontAlgn="base" latinLnBrk="0" hangingPunct="0">
+              <a:lnSpc>
+                <a:spcPct val="100000"/>
+              </a:lnSpc>
+              <a:spcBef>
+                <a:spcPct val="0"/>
+              </a:spcBef>
+              <a:spcAft>
+                <a:spcPct val="0"/>
+              </a:spcAft>
+              <a:buClrTx/>
+              <a:buSzTx/>
+              <a:tabLst/>
+            </a:pPr>
+            <a:r>
+              <a:rPr kumimoji="0" lang="de-DE" altLang="de-DE" sz="1800" b="1" i="0" u="none" strike="noStrike" cap="none" normalizeH="0" baseline="0" dirty="0">
+                <a:ln>
+                  <a:noFill/>
+                </a:ln>
+                <a:solidFill>
+                  <a:schemeClr val="tx1"/>
+                </a:solidFill>
+                <a:effectLst/>
+                <a:latin typeface="Arial" panose="020B0604020202020204" pitchFamily="34" charset="0"/>
+              </a:rPr>
+              <a:t>Design.dev - </a:t>
+            </a:r>
+            <a:r>
+              <a:rPr kumimoji="0" lang="de-DE" altLang="de-DE" sz="1800" b="1" i="1" u="none" strike="noStrike" cap="none" normalizeH="0" baseline="0" dirty="0">
+                <a:ln>
+                  <a:noFill/>
+                </a:ln>
+                <a:solidFill>
+                  <a:schemeClr val="tx1"/>
+                </a:solidFill>
+                <a:effectLst/>
+                <a:latin typeface="Arial" panose="020B0604020202020204" pitchFamily="34" charset="0"/>
+              </a:rPr>
+              <a:t>CSS Transitions Guide</a:t>
+            </a:r>
+            <a:br>
+              <a:rPr kumimoji="0" lang="de-DE" altLang="de-DE" sz="1800" b="0" i="0" u="none" strike="noStrike" cap="none" normalizeH="0" baseline="0" dirty="0">
+                <a:ln>
+                  <a:noFill/>
+                </a:ln>
+                <a:solidFill>
+                  <a:schemeClr val="tx1"/>
+                </a:solidFill>
+                <a:effectLst/>
+                <a:latin typeface="Arial" panose="020B0604020202020204" pitchFamily="34" charset="0"/>
+              </a:rPr>
+            </a:br>
+            <a:r>
+              <a:rPr kumimoji="0" lang="de-DE" altLang="de-DE" sz="1800" b="0" i="0" u="none" strike="noStrike" cap="none" normalizeH="0" baseline="0" dirty="0">
+                <a:ln>
+                  <a:noFill/>
+                </a:ln>
+                <a:solidFill>
+                  <a:schemeClr val="tx1"/>
+                </a:solidFill>
+                <a:effectLst/>
+                <a:latin typeface="Arial" panose="020B0604020202020204" pitchFamily="34" charset="0"/>
+                <a:hlinkClick r:id="rId4"/>
+              </a:rPr>
+              <a:t>https://design.dev/guides/css-transitions/</a:t>
+            </a:r>
+            <a:endParaRPr kumimoji="0" lang="de-DE" altLang="de-DE" sz="1800" b="0" i="0" u="none" strike="noStrike" cap="none" normalizeH="0" baseline="0" dirty="0">
+              <a:ln>
+                <a:noFill/>
+              </a:ln>
+              <a:solidFill>
+                <a:schemeClr val="tx1"/>
+              </a:solidFill>
+              <a:effectLst/>
+              <a:latin typeface="Arial" panose="020B0604020202020204" pitchFamily="34" charset="0"/>
+            </a:endParaRPr>
+          </a:p>
+          <a:p>
+            <a:pPr marL="0" marR="0" lvl="0" indent="0" algn="l" defTabSz="914400" rtl="0" eaLnBrk="0" fontAlgn="base" latinLnBrk="0" hangingPunct="0">
+              <a:lnSpc>
+                <a:spcPct val="100000"/>
+              </a:lnSpc>
+              <a:spcBef>
+                <a:spcPct val="0"/>
+              </a:spcBef>
+              <a:spcAft>
+                <a:spcPct val="0"/>
+              </a:spcAft>
+              <a:buClrTx/>
+              <a:buSzTx/>
+              <a:tabLst/>
+            </a:pPr>
+            <a:r>
+              <a:rPr kumimoji="0" lang="de-DE" altLang="de-DE" sz="1800" b="1" i="0" u="none" strike="noStrike" cap="none" normalizeH="0" baseline="0" dirty="0">
+                <a:ln>
+                  <a:noFill/>
+                </a:ln>
+                <a:solidFill>
+                  <a:schemeClr val="tx1"/>
+                </a:solidFill>
+                <a:effectLst/>
+                <a:latin typeface="Arial" panose="020B0604020202020204" pitchFamily="34" charset="0"/>
+              </a:rPr>
+              <a:t>CSS Portal - </a:t>
+            </a:r>
+            <a:r>
+              <a:rPr kumimoji="0" lang="de-DE" altLang="de-DE" sz="1800" b="1" i="1" u="none" strike="noStrike" cap="none" normalizeH="0" baseline="0" dirty="0">
+                <a:ln>
+                  <a:noFill/>
+                </a:ln>
+                <a:solidFill>
+                  <a:schemeClr val="tx1"/>
+                </a:solidFill>
+                <a:effectLst/>
+                <a:latin typeface="Arial" panose="020B0604020202020204" pitchFamily="34" charset="0"/>
+              </a:rPr>
+              <a:t>@keyframes CSS At-Rule</a:t>
+            </a:r>
+            <a:br>
+              <a:rPr kumimoji="0" lang="de-DE" altLang="de-DE" sz="1800" b="0" i="0" u="none" strike="noStrike" cap="none" normalizeH="0" baseline="0" dirty="0">
+                <a:ln>
+                  <a:noFill/>
+                </a:ln>
+                <a:solidFill>
+                  <a:schemeClr val="tx1"/>
+                </a:solidFill>
+                <a:effectLst/>
+                <a:latin typeface="Arial" panose="020B0604020202020204" pitchFamily="34" charset="0"/>
+              </a:rPr>
+            </a:br>
+            <a:r>
+              <a:rPr kumimoji="0" lang="de-DE" altLang="de-DE" sz="1800" b="0" i="0" u="none" strike="noStrike" cap="none" normalizeH="0" baseline="0" dirty="0">
+                <a:ln>
+                  <a:noFill/>
+                </a:ln>
+                <a:solidFill>
+                  <a:schemeClr val="tx1"/>
+                </a:solidFill>
+                <a:effectLst/>
+                <a:latin typeface="Arial" panose="020B0604020202020204" pitchFamily="34" charset="0"/>
+                <a:hlinkClick r:id="rId5"/>
+              </a:rPr>
+              <a:t>https://www.cssportal.com/css-at-rules/keyframes.php</a:t>
+            </a:r>
+            <a:endParaRPr kumimoji="0" lang="de-DE" altLang="de-DE" sz="1800" b="0" i="0" u="none" strike="noStrike" cap="none" normalizeH="0" baseline="0" dirty="0">
+              <a:ln>
+                <a:noFill/>
+              </a:ln>
+              <a:solidFill>
+                <a:schemeClr val="tx1"/>
+              </a:solidFill>
+              <a:effectLst/>
+              <a:latin typeface="Arial" panose="020B0604020202020204" pitchFamily="34" charset="0"/>
+            </a:endParaRPr>
+          </a:p>
+          <a:p>
+            <a:pPr marL="0" marR="0" lvl="0" indent="0" algn="l" defTabSz="914400" rtl="0" eaLnBrk="0" fontAlgn="base" latinLnBrk="0" hangingPunct="0">
+              <a:lnSpc>
+                <a:spcPct val="100000"/>
+              </a:lnSpc>
+              <a:spcBef>
+                <a:spcPct val="0"/>
+              </a:spcBef>
+              <a:spcAft>
+                <a:spcPct val="0"/>
+              </a:spcAft>
+              <a:buClrTx/>
+              <a:buSzTx/>
+              <a:tabLst/>
+            </a:pPr>
+            <a:r>
+              <a:rPr kumimoji="0" lang="de-DE" altLang="de-DE" sz="1800" b="1" i="0" u="none" strike="noStrike" cap="none" normalizeH="0" baseline="0" dirty="0">
+                <a:ln>
+                  <a:noFill/>
+                </a:ln>
+                <a:solidFill>
+                  <a:schemeClr val="tx1"/>
+                </a:solidFill>
+                <a:effectLst/>
+                <a:latin typeface="Arial" panose="020B0604020202020204" pitchFamily="34" charset="0"/>
+              </a:rPr>
+              <a:t>CSS-Tricks - </a:t>
+            </a:r>
+            <a:r>
+              <a:rPr kumimoji="0" lang="de-DE" altLang="de-DE" sz="1800" b="1" i="1" u="none" strike="noStrike" cap="none" normalizeH="0" baseline="0" dirty="0">
+                <a:ln>
+                  <a:noFill/>
+                </a:ln>
+                <a:solidFill>
+                  <a:schemeClr val="tx1"/>
+                </a:solidFill>
+                <a:effectLst/>
+                <a:latin typeface="Arial" panose="020B0604020202020204" pitchFamily="34" charset="0"/>
+              </a:rPr>
+              <a:t>Animation Property Almanac</a:t>
+            </a:r>
+            <a:br>
+              <a:rPr kumimoji="0" lang="de-DE" altLang="de-DE" sz="1800" b="0" i="0" u="none" strike="noStrike" cap="none" normalizeH="0" baseline="0" dirty="0">
+                <a:ln>
+                  <a:noFill/>
+                </a:ln>
+                <a:solidFill>
+                  <a:schemeClr val="tx1"/>
+                </a:solidFill>
+                <a:effectLst/>
+                <a:latin typeface="Arial" panose="020B0604020202020204" pitchFamily="34" charset="0"/>
+              </a:rPr>
+            </a:br>
+            <a:r>
+              <a:rPr kumimoji="0" lang="de-DE" altLang="de-DE" sz="1800" b="0" i="0" u="none" strike="noStrike" cap="none" normalizeH="0" baseline="0" dirty="0">
+                <a:ln>
+                  <a:noFill/>
+                </a:ln>
+                <a:solidFill>
+                  <a:schemeClr val="tx1"/>
+                </a:solidFill>
+                <a:effectLst/>
+                <a:latin typeface="Arial" panose="020B0604020202020204" pitchFamily="34" charset="0"/>
+                <a:hlinkClick r:id="rId6"/>
+              </a:rPr>
+              <a:t>https://css-tricks.com/almanac/properties/a/animation/</a:t>
+            </a:r>
+            <a:endParaRPr kumimoji="0" lang="de-DE" altLang="de-DE" sz="1800" b="0" i="0" u="none" strike="noStrike" cap="none" normalizeH="0" baseline="0" dirty="0">
+              <a:ln>
+                <a:noFill/>
+              </a:ln>
+              <a:solidFill>
+                <a:schemeClr val="tx1"/>
+              </a:solidFill>
+              <a:effectLst/>
+              <a:latin typeface="Arial" panose="020B0604020202020204" pitchFamily="34" charset="0"/>
+            </a:endParaRPr>
+          </a:p>
+          <a:p>
+            <a:pPr lvl="0" eaLnBrk="0" fontAlgn="base" hangingPunct="0">
+              <a:spcBef>
+                <a:spcPct val="0"/>
+              </a:spcBef>
+              <a:spcAft>
+                <a:spcPct val="0"/>
+              </a:spcAft>
+            </a:pPr>
+            <a:r>
+              <a:rPr lang="en-US" b="1" dirty="0" err="1">
+                <a:latin typeface="Arial" panose="020B0604020202020204" pitchFamily="34" charset="0"/>
+                <a:cs typeface="Arial" panose="020B0604020202020204" pitchFamily="34" charset="0"/>
+              </a:rPr>
+              <a:t>web.dev</a:t>
+            </a:r>
+            <a:r>
+              <a:rPr lang="en-US" b="1" dirty="0">
+                <a:latin typeface="Arial" panose="020B0604020202020204" pitchFamily="34" charset="0"/>
+                <a:cs typeface="Arial" panose="020B0604020202020204" pitchFamily="34" charset="0"/>
+              </a:rPr>
+              <a:t> - High-Performance CSS Animations</a:t>
+            </a:r>
+          </a:p>
+          <a:p>
+            <a:pPr lvl="0" eaLnBrk="0" fontAlgn="base" hangingPunct="0">
+              <a:spcBef>
+                <a:spcPct val="0"/>
+              </a:spcBef>
+              <a:spcAft>
+                <a:spcPct val="0"/>
+              </a:spcAft>
+            </a:pPr>
+            <a:r>
+              <a:rPr lang="en-US" dirty="0">
+                <a:latin typeface="Arial" panose="020B0604020202020204" pitchFamily="34" charset="0"/>
+                <a:cs typeface="Arial" panose="020B0604020202020204" pitchFamily="34" charset="0"/>
+                <a:hlinkClick r:id="rId7"/>
+              </a:rPr>
+              <a:t>https://web.dev/articles/animations-guide</a:t>
+            </a:r>
+            <a:endParaRPr lang="en-US" dirty="0">
+              <a:latin typeface="Arial" panose="020B0604020202020204" pitchFamily="34" charset="0"/>
+              <a:cs typeface="Arial" panose="020B0604020202020204" pitchFamily="34" charset="0"/>
+            </a:endParaRPr>
+          </a:p>
+          <a:p>
+            <a:pPr lvl="0" eaLnBrk="0" fontAlgn="base" hangingPunct="0">
+              <a:spcBef>
+                <a:spcPct val="0"/>
+              </a:spcBef>
+              <a:spcAft>
+                <a:spcPct val="0"/>
+              </a:spcAft>
+            </a:pPr>
+            <a:endParaRPr kumimoji="0" lang="en-US" altLang="de-DE" sz="1800" b="0" i="0" u="none" strike="noStrike" cap="none" normalizeH="0" baseline="0" dirty="0">
+              <a:ln>
+                <a:noFill/>
+              </a:ln>
+              <a:solidFill>
+                <a:schemeClr val="tx1"/>
+              </a:solidFill>
+              <a:effectLst/>
+              <a:latin typeface="Arial" panose="020B0604020202020204" pitchFamily="34" charset="0"/>
+              <a:cs typeface="Arial" panose="020B0604020202020204" pitchFamily="34" charset="0"/>
+            </a:endParaRPr>
+          </a:p>
+          <a:p>
+            <a:pPr lvl="0" eaLnBrk="0" fontAlgn="base" hangingPunct="0">
+              <a:spcBef>
+                <a:spcPct val="0"/>
+              </a:spcBef>
+              <a:spcAft>
+                <a:spcPct val="0"/>
+              </a:spcAft>
+            </a:pPr>
+            <a:r>
+              <a:rPr lang="en-US" altLang="de-DE" sz="2800" b="1" dirty="0">
+                <a:latin typeface="Arial" panose="020B0604020202020204" pitchFamily="34" charset="0"/>
+                <a:cs typeface="Arial" panose="020B0604020202020204" pitchFamily="34" charset="0"/>
+              </a:rPr>
+              <a:t>DEMO:</a:t>
+            </a:r>
+          </a:p>
+          <a:p>
+            <a:pPr lvl="0" eaLnBrk="0" fontAlgn="base" hangingPunct="0">
+              <a:spcBef>
+                <a:spcPct val="0"/>
+              </a:spcBef>
+              <a:spcAft>
+                <a:spcPct val="0"/>
+              </a:spcAft>
+            </a:pPr>
+            <a:r>
+              <a:rPr lang="de-DE" dirty="0">
+                <a:hlinkClick r:id="rId8"/>
+              </a:rPr>
+              <a:t>wannas234/CSS-Animationen-und-Transitionen: Web Engineering, 4. Semester</a:t>
+            </a:r>
+            <a:endParaRPr kumimoji="0" lang="de-DE" altLang="de-DE" sz="1800" b="0" i="0" u="none" strike="noStrike" cap="none" normalizeH="0" baseline="0" dirty="0">
+              <a:ln>
+                <a:noFill/>
+              </a:ln>
+              <a:solidFill>
+                <a:schemeClr val="tx1"/>
+              </a:solidFill>
+              <a:effectLst/>
+              <a:latin typeface="Arial" panose="020B0604020202020204" pitchFamily="34" charset="0"/>
+              <a:cs typeface="Arial" panose="020B0604020202020204" pitchFamily="34" charset="0"/>
+            </a:endParaRPr>
+          </a:p>
+          <a:p>
+            <a:pPr marL="0" marR="0" lvl="0" indent="0" algn="l" defTabSz="914400" rtl="0" eaLnBrk="0" fontAlgn="base" latinLnBrk="0" hangingPunct="0">
+              <a:lnSpc>
+                <a:spcPct val="100000"/>
+              </a:lnSpc>
+              <a:spcBef>
+                <a:spcPct val="0"/>
+              </a:spcBef>
+              <a:spcAft>
+                <a:spcPct val="0"/>
+              </a:spcAft>
+              <a:buClrTx/>
+              <a:buSzTx/>
+              <a:tabLst/>
+            </a:pPr>
+            <a:endParaRPr lang="de-DE" altLang="de-DE" dirty="0">
+              <a:latin typeface="Arial" panose="020B0604020202020204" pitchFamily="34" charset="0"/>
+            </a:endParaRPr>
+          </a:p>
+          <a:p>
+            <a:pPr marL="0" marR="0" lvl="0" indent="0" algn="l" defTabSz="914400" rtl="0" eaLnBrk="0" fontAlgn="base" latinLnBrk="0" hangingPunct="0">
+              <a:lnSpc>
+                <a:spcPct val="100000"/>
+              </a:lnSpc>
+              <a:spcBef>
+                <a:spcPct val="0"/>
+              </a:spcBef>
+              <a:spcAft>
+                <a:spcPct val="0"/>
+              </a:spcAft>
+              <a:buClrTx/>
+              <a:buSzTx/>
+              <a:tabLst/>
+            </a:pPr>
+            <a:endParaRPr kumimoji="0" lang="de-DE" altLang="de-DE" sz="1800" b="0" i="0" u="none" strike="noStrike" cap="none" normalizeH="0" baseline="0" dirty="0">
+              <a:ln>
+                <a:noFill/>
+              </a:ln>
+              <a:solidFill>
+                <a:schemeClr val="tx1"/>
+              </a:solidFill>
+              <a:effectLst/>
+              <a:latin typeface="Arial" panose="020B0604020202020204" pitchFamily="34" charset="0"/>
+            </a:endParaRPr>
           </a:p>
         </p:txBody>
       </p:sp>
@@ -52224,10 +53257,4 @@
     </a:ext>
   </a:extLst>
 </a:theme>
-</file>
-
-<file path=docMetadata/LabelInfo.xml><?xml version="1.0" encoding="utf-8"?>
-<clbl:labelList xmlns:clbl="http://schemas.microsoft.com/office/2020/mipLabelMetadata">
-  <clbl:label id="{e0793d39-0939-496d-b129-198edd916feb}" enabled="0" method="" siteId="{e0793d39-0939-496d-b129-198edd916feb}" removed="1"/>
-</clbl:labelList>
 </file>